--- a/Mapping_the_Unknown_Workshop.pptx
+++ b/Mapping_the_Unknown_Workshop.pptx
@@ -4,43 +4,46 @@
   <p:sldMasterIdLst>
     <p:sldMasterId id="2147483648" r:id="rId1"/>
   </p:sldMasterIdLst>
+  <p:notesMasterIdLst>
+    <p:notesMasterId r:id="rId36"/>
+  </p:notesMasterIdLst>
   <p:sldIdLst>
-    <p:sldId id="256" r:id="rId7"/>
-    <p:sldId id="257" r:id="rId9"/>
-    <p:sldId id="258" r:id="rId10"/>
-    <p:sldId id="259" r:id="rId11"/>
-    <p:sldId id="260" r:id="rId12"/>
-    <p:sldId id="261" r:id="rId13"/>
-    <p:sldId id="262" r:id="rId14"/>
-    <p:sldId id="263" r:id="rId15"/>
-    <p:sldId id="264" r:id="rId16"/>
-    <p:sldId id="265" r:id="rId17"/>
-    <p:sldId id="266" r:id="rId18"/>
-    <p:sldId id="267" r:id="rId19"/>
-    <p:sldId id="268" r:id="rId20"/>
-    <p:sldId id="269" r:id="rId21"/>
-    <p:sldId id="270" r:id="rId22"/>
-    <p:sldId id="271" r:id="rId23"/>
-    <p:sldId id="272" r:id="rId24"/>
-    <p:sldId id="273" r:id="rId25"/>
-    <p:sldId id="274" r:id="rId26"/>
-    <p:sldId id="275" r:id="rId27"/>
-    <p:sldId id="276" r:id="rId28"/>
-    <p:sldId id="277" r:id="rId29"/>
-    <p:sldId id="278" r:id="rId30"/>
-    <p:sldId id="279" r:id="rId31"/>
-    <p:sldId id="280" r:id="rId32"/>
-    <p:sldId id="281" r:id="rId33"/>
-    <p:sldId id="282" r:id="rId34"/>
-    <p:sldId id="283" r:id="rId35"/>
-    <p:sldId id="284" r:id="rId36"/>
-    <p:sldId id="285" r:id="rId37"/>
-    <p:sldId id="286" r:id="rId38"/>
-    <p:sldId id="287" r:id="rId39"/>
-    <p:sldId id="288" r:id="rId40"/>
-    <p:sldId id="289" r:id="rId41"/>
+    <p:sldId id="256" r:id="rId2"/>
+    <p:sldId id="257" r:id="rId3"/>
+    <p:sldId id="258" r:id="rId4"/>
+    <p:sldId id="259" r:id="rId5"/>
+    <p:sldId id="260" r:id="rId6"/>
+    <p:sldId id="261" r:id="rId7"/>
+    <p:sldId id="262" r:id="rId8"/>
+    <p:sldId id="263" r:id="rId9"/>
+    <p:sldId id="264" r:id="rId10"/>
+    <p:sldId id="265" r:id="rId11"/>
+    <p:sldId id="266" r:id="rId12"/>
+    <p:sldId id="267" r:id="rId13"/>
+    <p:sldId id="268" r:id="rId14"/>
+    <p:sldId id="269" r:id="rId15"/>
+    <p:sldId id="270" r:id="rId16"/>
+    <p:sldId id="271" r:id="rId17"/>
+    <p:sldId id="272" r:id="rId18"/>
+    <p:sldId id="273" r:id="rId19"/>
+    <p:sldId id="274" r:id="rId20"/>
+    <p:sldId id="275" r:id="rId21"/>
+    <p:sldId id="276" r:id="rId22"/>
+    <p:sldId id="277" r:id="rId23"/>
+    <p:sldId id="278" r:id="rId24"/>
+    <p:sldId id="279" r:id="rId25"/>
+    <p:sldId id="280" r:id="rId26"/>
+    <p:sldId id="281" r:id="rId27"/>
+    <p:sldId id="282" r:id="rId28"/>
+    <p:sldId id="283" r:id="rId29"/>
+    <p:sldId id="284" r:id="rId30"/>
+    <p:sldId id="285" r:id="rId31"/>
+    <p:sldId id="286" r:id="rId32"/>
+    <p:sldId id="287" r:id="rId33"/>
+    <p:sldId id="288" r:id="rId34"/>
+    <p:sldId id="289" r:id="rId35"/>
   </p:sldIdLst>
-  <p:sldSz cx="12191695" cy="6858000" type="screen4x3"/>
+  <p:sldSz cx="12192000" cy="6858000"/>
   <p:notesSz cx="6858000" cy="9144000"/>
   <p:defaultTextStyle>
     <a:defPPr>
@@ -137,11 +140,27 @@
       </a:defRPr>
     </a:lvl9pPr>
   </p:defaultTextStyle>
+  <p:extLst>
+    <p:ext uri="{EFAFB233-063F-42B5-8137-9DF3F51BA10A}">
+      <p15:sldGuideLst xmlns:p15="http://schemas.microsoft.com/office/powerpoint/2012/main">
+        <p15:guide id="1" orient="horz" pos="2160">
+          <p15:clr>
+            <a:srgbClr val="A4A3A4"/>
+          </p15:clr>
+        </p15:guide>
+        <p15:guide id="2" pos="2880">
+          <p15:clr>
+            <a:srgbClr val="A4A3A4"/>
+          </p15:clr>
+        </p15:guide>
+      </p15:sldGuideLst>
+    </p:ext>
+  </p:extLst>
 </p:presentation>
 </file>
 
 <file path=ppt/notesMasters/notesMaster1.xml><?xml version="1.0" encoding="utf-8"?>
-<p:notesMaster xmlns:a="http://schemas.openxmlformats.org/drawingml/2006/main" xmlns:p="http://schemas.openxmlformats.org/presentationml/2006/main" xmlns:r="http://schemas.openxmlformats.org/officeDocument/2006/relationships">
+<p:notesMaster xmlns:a="http://schemas.openxmlformats.org/drawingml/2006/main" xmlns:r="http://schemas.openxmlformats.org/officeDocument/2006/relationships" xmlns:p="http://schemas.openxmlformats.org/presentationml/2006/main">
   <p:cSld>
     <p:bg>
       <p:bgRef idx="1001">
@@ -162,241 +181,16 @@
           <a:chExt cx="0" cy="0"/>
         </a:xfrm>
       </p:grpSpPr>
-      <p:sp>
-        <p:nvSpPr>
-          <p:cNvPr id="2" name="Header Placeholder 1"/>
-          <p:cNvSpPr>
-            <a:spLocks noGrp="1"/>
-          </p:cNvSpPr>
-          <p:nvPr>
-            <p:ph type="hdr" sz="quarter"/>
-          </p:nvPr>
-        </p:nvSpPr>
-        <p:spPr>
-          <a:xfrm>
-            <a:off x="0" y="0"/>
-            <a:ext cx="2971800" cy="457200"/>
-          </a:xfrm>
-          <a:prstGeom prst="rect">
-            <a:avLst/>
-          </a:prstGeom>
-        </p:spPr>
-        <p:txBody>
-          <a:bodyPr vert="horz" lIns="91440" tIns="45720" rIns="91440" bIns="45720" rtlCol="0"/>
-          <a:lstStyle>
-            <a:lvl1pPr algn="l">
-              <a:defRPr sz="1200"/>
-            </a:lvl1pPr>
-          </a:lstStyle>
-          <a:p>
-            <a:endParaRPr lang="en-US"/>
-          </a:p>
-        </p:txBody>
-      </p:sp>
-      <p:sp>
-        <p:nvSpPr>
-          <p:cNvPr id="3" name="Date Placeholder 2"/>
-          <p:cNvSpPr>
-            <a:spLocks noGrp="1"/>
-          </p:cNvSpPr>
-          <p:nvPr>
-            <p:ph type="dt" idx="1"/>
-          </p:nvPr>
-        </p:nvSpPr>
-        <p:spPr>
-          <a:xfrm>
-            <a:off x="3884613" y="0"/>
-            <a:ext cx="2971800" cy="457200"/>
-          </a:xfrm>
-          <a:prstGeom prst="rect">
-            <a:avLst/>
-          </a:prstGeom>
-        </p:spPr>
-        <p:txBody>
-          <a:bodyPr vert="horz" lIns="91440" tIns="45720" rIns="91440" bIns="45720" rtlCol="0"/>
-          <a:lstStyle>
-            <a:lvl1pPr algn="r">
-              <a:defRPr sz="1200"/>
-            </a:lvl1pPr>
-          </a:lstStyle>
-          <a:p>
-            <a:fld id="{0F89C1C7-3DCD-1040-A9CF-14679D8B5DDD}" type="datetimeFigureOut">
-              <a:rPr lang="en-US" smtClean="0"/>
-              <a:t>10/17/16</a:t>
-            </a:fld>
-            <a:endParaRPr lang="en-US"/>
-          </a:p>
-        </p:txBody>
-      </p:sp>
-      <p:sp>
-        <p:nvSpPr>
-          <p:cNvPr id="4" name="Slide Image Placeholder 3"/>
-          <p:cNvSpPr>
-            <a:spLocks noGrp="1" noRot="1" noChangeAspect="1"/>
-          </p:cNvSpPr>
-          <p:nvPr>
-            <p:ph type="sldImg" idx="2"/>
-          </p:nvPr>
-        </p:nvSpPr>
-        <p:spPr>
-          <a:xfrm>
-            <a:off x="1143000" y="685800"/>
-            <a:ext cx="4572000" cy="3429000"/>
-          </a:xfrm>
-          <a:prstGeom prst="rect">
-            <a:avLst/>
-          </a:prstGeom>
-          <a:noFill/>
-          <a:ln w="12700">
-            <a:solidFill>
-              <a:prstClr val="black"/>
-            </a:solidFill>
-          </a:ln>
-        </p:spPr>
-        <p:txBody>
-          <a:bodyPr vert="horz" lIns="91440" tIns="45720" rIns="91440" bIns="45720" rtlCol="0" anchor="ctr"/>
-          <a:lstStyle/>
-          <a:p>
-            <a:endParaRPr lang="en-US"/>
-          </a:p>
-        </p:txBody>
-      </p:sp>
-      <p:sp>
-        <p:nvSpPr>
-          <p:cNvPr id="5" name="Notes Placeholder 4"/>
-          <p:cNvSpPr>
-            <a:spLocks noGrp="1"/>
-          </p:cNvSpPr>
-          <p:nvPr>
-            <p:ph type="body" sz="quarter" idx="3"/>
-          </p:nvPr>
-        </p:nvSpPr>
-        <p:spPr>
-          <a:xfrm>
-            <a:off x="685800" y="4343400"/>
-            <a:ext cx="5486400" cy="4114800"/>
-          </a:xfrm>
-          <a:prstGeom prst="rect">
-            <a:avLst/>
-          </a:prstGeom>
-        </p:spPr>
-        <p:txBody>
-          <a:bodyPr vert="horz" lIns="91440" tIns="45720" rIns="91440" bIns="45720" rtlCol="0"/>
-          <a:lstStyle/>
-          <a:p>
-            <a:pPr lvl="0"/>
-            <a:r>
-              <a:rPr lang="en-US" smtClean="0"/>
-              <a:t>Click to edit Master text styles</a:t>
-            </a:r>
-          </a:p>
-          <a:p>
-            <a:pPr lvl="1"/>
-            <a:r>
-              <a:rPr lang="en-US" smtClean="0"/>
-              <a:t>Second level</a:t>
-            </a:r>
-          </a:p>
-          <a:p>
-            <a:pPr lvl="2"/>
-            <a:r>
-              <a:rPr lang="en-US" smtClean="0"/>
-              <a:t>Third level</a:t>
-            </a:r>
-          </a:p>
-          <a:p>
-            <a:pPr lvl="3"/>
-            <a:r>
-              <a:rPr lang="en-US" smtClean="0"/>
-              <a:t>Fourth level</a:t>
-            </a:r>
-          </a:p>
-          <a:p>
-            <a:pPr lvl="4"/>
-            <a:r>
-              <a:rPr lang="en-US" smtClean="0"/>
-              <a:t>Fifth level</a:t>
-            </a:r>
-            <a:endParaRPr lang="en-US"/>
-          </a:p>
-        </p:txBody>
-      </p:sp>
-      <p:sp>
-        <p:nvSpPr>
-          <p:cNvPr id="6" name="Footer Placeholder 5"/>
-          <p:cNvSpPr>
-            <a:spLocks noGrp="1"/>
-          </p:cNvSpPr>
-          <p:nvPr>
-            <p:ph type="ftr" sz="quarter" idx="4"/>
-          </p:nvPr>
-        </p:nvSpPr>
-        <p:spPr>
-          <a:xfrm>
-            <a:off x="0" y="8685213"/>
-            <a:ext cx="2971800" cy="457200"/>
-          </a:xfrm>
-          <a:prstGeom prst="rect">
-            <a:avLst/>
-          </a:prstGeom>
-        </p:spPr>
-        <p:txBody>
-          <a:bodyPr vert="horz" lIns="91440" tIns="45720" rIns="91440" bIns="45720" rtlCol="0" anchor="b"/>
-          <a:lstStyle>
-            <a:lvl1pPr algn="l">
-              <a:defRPr sz="1200"/>
-            </a:lvl1pPr>
-          </a:lstStyle>
-          <a:p>
-            <a:endParaRPr lang="en-US"/>
-          </a:p>
-        </p:txBody>
-      </p:sp>
-      <p:sp>
-        <p:nvSpPr>
-          <p:cNvPr id="7" name="Slide Number Placeholder 6"/>
-          <p:cNvSpPr>
-            <a:spLocks noGrp="1"/>
-          </p:cNvSpPr>
-          <p:nvPr>
-            <p:ph type="sldNum" sz="quarter" idx="5"/>
-          </p:nvPr>
-        </p:nvSpPr>
-        <p:spPr>
-          <a:xfrm>
-            <a:off x="3884613" y="8685213"/>
-            <a:ext cx="2971800" cy="457200"/>
-          </a:xfrm>
-          <a:prstGeom prst="rect">
-            <a:avLst/>
-          </a:prstGeom>
-        </p:spPr>
-        <p:txBody>
-          <a:bodyPr vert="horz" lIns="91440" tIns="45720" rIns="91440" bIns="45720" rtlCol="0" anchor="b"/>
-          <a:lstStyle>
-            <a:lvl1pPr algn="r">
-              <a:defRPr sz="1200"/>
-            </a:lvl1pPr>
-          </a:lstStyle>
-          <a:p>
-            <a:fld id="{BB5E49A5-4136-284D-997B-48E1D791AD67}" type="slidenum">
-              <a:rPr lang="en-US" smtClean="0"/>
-              <a:t>‹#›</a:t>
-            </a:fld>
-            <a:endParaRPr lang="en-US"/>
-          </a:p>
-        </p:txBody>
-      </p:sp>
     </p:spTree>
     <p:extLst>
       <p:ext uri="{BB962C8B-B14F-4D97-AF65-F5344CB8AC3E}">
-        <p14:creationId xmlns:p14="http://schemas.microsoft.com/office/powerpoint/2010/main" val="2623252185"/>
+        <p14:creationId xmlns:p14="http://schemas.microsoft.com/office/powerpoint/2010/main" val="3571219681"/>
       </p:ext>
     </p:extLst>
   </p:cSld>
   <p:clrMap bg1="lt1" tx1="dk1" bg2="lt2" tx2="dk2" accent1="accent1" accent2="accent2" accent3="accent3" accent4="accent4" accent5="accent5" accent6="accent6" hlink="hlink" folHlink="folHlink"/>
   <p:notesStyle>
-    <a:lvl1pPr marL="0" algn="l" defTabSz="457200" rtl="0" eaLnBrk="1" latinLnBrk="0" hangingPunct="1">
+    <a:lvl1pPr marL="0" algn="l" defTabSz="914400" rtl="0" eaLnBrk="1" latinLnBrk="0" hangingPunct="1">
       <a:defRPr sz="1200" kern="1200">
         <a:solidFill>
           <a:schemeClr val="tx1"/>
@@ -406,7 +200,7 @@
         <a:cs typeface="+mn-cs"/>
       </a:defRPr>
     </a:lvl1pPr>
-    <a:lvl2pPr marL="457200" algn="l" defTabSz="457200" rtl="0" eaLnBrk="1" latinLnBrk="0" hangingPunct="1">
+    <a:lvl2pPr marL="457200" algn="l" defTabSz="914400" rtl="0" eaLnBrk="1" latinLnBrk="0" hangingPunct="1">
       <a:defRPr sz="1200" kern="1200">
         <a:solidFill>
           <a:schemeClr val="tx1"/>
@@ -416,7 +210,7 @@
         <a:cs typeface="+mn-cs"/>
       </a:defRPr>
     </a:lvl2pPr>
-    <a:lvl3pPr marL="914400" algn="l" defTabSz="457200" rtl="0" eaLnBrk="1" latinLnBrk="0" hangingPunct="1">
+    <a:lvl3pPr marL="914400" algn="l" defTabSz="914400" rtl="0" eaLnBrk="1" latinLnBrk="0" hangingPunct="1">
       <a:defRPr sz="1200" kern="1200">
         <a:solidFill>
           <a:schemeClr val="tx1"/>
@@ -426,7 +220,7 @@
         <a:cs typeface="+mn-cs"/>
       </a:defRPr>
     </a:lvl3pPr>
-    <a:lvl4pPr marL="1371600" algn="l" defTabSz="457200" rtl="0" eaLnBrk="1" latinLnBrk="0" hangingPunct="1">
+    <a:lvl4pPr marL="1371600" algn="l" defTabSz="914400" rtl="0" eaLnBrk="1" latinLnBrk="0" hangingPunct="1">
       <a:defRPr sz="1200" kern="1200">
         <a:solidFill>
           <a:schemeClr val="tx1"/>
@@ -436,7 +230,7 @@
         <a:cs typeface="+mn-cs"/>
       </a:defRPr>
     </a:lvl4pPr>
-    <a:lvl5pPr marL="1828800" algn="l" defTabSz="457200" rtl="0" eaLnBrk="1" latinLnBrk="0" hangingPunct="1">
+    <a:lvl5pPr marL="1828800" algn="l" defTabSz="914400" rtl="0" eaLnBrk="1" latinLnBrk="0" hangingPunct="1">
       <a:defRPr sz="1200" kern="1200">
         <a:solidFill>
           <a:schemeClr val="tx1"/>
@@ -446,7 +240,7 @@
         <a:cs typeface="+mn-cs"/>
       </a:defRPr>
     </a:lvl5pPr>
-    <a:lvl6pPr marL="2286000" algn="l" defTabSz="457200" rtl="0" eaLnBrk="1" latinLnBrk="0" hangingPunct="1">
+    <a:lvl6pPr marL="2286000" algn="l" defTabSz="914400" rtl="0" eaLnBrk="1" latinLnBrk="0" hangingPunct="1">
       <a:defRPr sz="1200" kern="1200">
         <a:solidFill>
           <a:schemeClr val="tx1"/>
@@ -456,7 +250,7 @@
         <a:cs typeface="+mn-cs"/>
       </a:defRPr>
     </a:lvl6pPr>
-    <a:lvl7pPr marL="2743200" algn="l" defTabSz="457200" rtl="0" eaLnBrk="1" latinLnBrk="0" hangingPunct="1">
+    <a:lvl7pPr marL="2743200" algn="l" defTabSz="914400" rtl="0" eaLnBrk="1" latinLnBrk="0" hangingPunct="1">
       <a:defRPr sz="1200" kern="1200">
         <a:solidFill>
           <a:schemeClr val="tx1"/>
@@ -466,7 +260,7 @@
         <a:cs typeface="+mn-cs"/>
       </a:defRPr>
     </a:lvl7pPr>
-    <a:lvl8pPr marL="3200400" algn="l" defTabSz="457200" rtl="0" eaLnBrk="1" latinLnBrk="0" hangingPunct="1">
+    <a:lvl8pPr marL="3200400" algn="l" defTabSz="914400" rtl="0" eaLnBrk="1" latinLnBrk="0" hangingPunct="1">
       <a:defRPr sz="1200" kern="1200">
         <a:solidFill>
           <a:schemeClr val="tx1"/>
@@ -476,7 +270,7 @@
         <a:cs typeface="+mn-cs"/>
       </a:defRPr>
     </a:lvl8pPr>
-    <a:lvl9pPr marL="3657600" algn="l" defTabSz="457200" rtl="0" eaLnBrk="1" latinLnBrk="0" hangingPunct="1">
+    <a:lvl9pPr marL="3657600" algn="l" defTabSz="914400" rtl="0" eaLnBrk="1" latinLnBrk="0" hangingPunct="1">
       <a:defRPr sz="1200" kern="1200">
         <a:solidFill>
           <a:schemeClr val="tx1"/>
@@ -491,7 +285,7 @@
 </file>
 
 <file path=ppt/notesSlides/notesSlide1.xml><?xml version="1.0" encoding="utf-8"?>
-<p:notes xmlns:a="http://schemas.openxmlformats.org/drawingml/2006/main" xmlns:p="http://schemas.openxmlformats.org/presentationml/2006/main" xmlns:r="http://schemas.openxmlformats.org/officeDocument/2006/relationships">
+<p:notes xmlns:a="http://schemas.openxmlformats.org/drawingml/2006/main" xmlns:r="http://schemas.openxmlformats.org/officeDocument/2006/relationships" xmlns:p="http://schemas.openxmlformats.org/presentationml/2006/main">
   <p:cSld>
     <p:spTree>
       <p:nvGrpSpPr>
@@ -511,7 +305,7 @@
         <p:nvSpPr>
           <p:cNvPr id="2" name="Slide Image Placeholder 1"/>
           <p:cNvSpPr>
-            <a:spLocks noGrp="1"/>
+            <a:spLocks noGrp="1" noRot="1" noChangeAspect="1"/>
           </p:cNvSpPr>
           <p:nvPr>
             <p:ph type="sldImg" idx="2"/>
@@ -526,7 +320,7 @@
             <a:spLocks noGrp="1"/>
           </p:cNvSpPr>
           <p:nvPr>
-            <p:ph type="body" idx="3" sz="quarter"/>
+            <p:ph type="body" sz="quarter" idx="3"/>
           </p:nvPr>
         </p:nvSpPr>
         <p:spPr/>
@@ -547,7 +341,7 @@
             <a:spLocks noGrp="1"/>
           </p:cNvSpPr>
           <p:nvPr>
-            <p:ph type="sldNum" idx="5" sz="quarter"/>
+            <p:ph type="sldNum" sz="quarter" idx="5"/>
           </p:nvPr>
         </p:nvSpPr>
         <p:spPr/>
@@ -561,7 +355,7 @@
 </file>
 
 <file path=ppt/notesSlides/notesSlide10.xml><?xml version="1.0" encoding="utf-8"?>
-<p:notes xmlns:a="http://schemas.openxmlformats.org/drawingml/2006/main" xmlns:p="http://schemas.openxmlformats.org/presentationml/2006/main" xmlns:r="http://schemas.openxmlformats.org/officeDocument/2006/relationships">
+<p:notes xmlns:a="http://schemas.openxmlformats.org/drawingml/2006/main" xmlns:r="http://schemas.openxmlformats.org/officeDocument/2006/relationships" xmlns:p="http://schemas.openxmlformats.org/presentationml/2006/main">
   <p:cSld>
     <p:spTree>
       <p:nvGrpSpPr>
@@ -581,7 +375,7 @@
         <p:nvSpPr>
           <p:cNvPr id="2" name="Slide Image Placeholder 1"/>
           <p:cNvSpPr>
-            <a:spLocks noGrp="1"/>
+            <a:spLocks noGrp="1" noRot="1" noChangeAspect="1"/>
           </p:cNvSpPr>
           <p:nvPr>
             <p:ph type="sldImg" idx="2"/>
@@ -596,7 +390,7 @@
             <a:spLocks noGrp="1"/>
           </p:cNvSpPr>
           <p:nvPr>
-            <p:ph type="body" idx="3" sz="quarter"/>
+            <p:ph type="body" sz="quarter" idx="3"/>
           </p:nvPr>
         </p:nvSpPr>
         <p:spPr/>
@@ -617,7 +411,7 @@
             <a:spLocks noGrp="1"/>
           </p:cNvSpPr>
           <p:nvPr>
-            <p:ph type="sldNum" idx="5" sz="quarter"/>
+            <p:ph type="sldNum" sz="quarter" idx="5"/>
           </p:nvPr>
         </p:nvSpPr>
         <p:spPr/>
@@ -631,7 +425,7 @@
 </file>
 
 <file path=ppt/notesSlides/notesSlide11.xml><?xml version="1.0" encoding="utf-8"?>
-<p:notes xmlns:a="http://schemas.openxmlformats.org/drawingml/2006/main" xmlns:p="http://schemas.openxmlformats.org/presentationml/2006/main" xmlns:r="http://schemas.openxmlformats.org/officeDocument/2006/relationships">
+<p:notes xmlns:a="http://schemas.openxmlformats.org/drawingml/2006/main" xmlns:r="http://schemas.openxmlformats.org/officeDocument/2006/relationships" xmlns:p="http://schemas.openxmlformats.org/presentationml/2006/main">
   <p:cSld>
     <p:spTree>
       <p:nvGrpSpPr>
@@ -651,7 +445,7 @@
         <p:nvSpPr>
           <p:cNvPr id="2" name="Slide Image Placeholder 1"/>
           <p:cNvSpPr>
-            <a:spLocks noGrp="1"/>
+            <a:spLocks noGrp="1" noRot="1" noChangeAspect="1"/>
           </p:cNvSpPr>
           <p:nvPr>
             <p:ph type="sldImg" idx="2"/>
@@ -666,7 +460,7 @@
             <a:spLocks noGrp="1"/>
           </p:cNvSpPr>
           <p:nvPr>
-            <p:ph type="body" idx="3" sz="quarter"/>
+            <p:ph type="body" sz="quarter" idx="3"/>
           </p:nvPr>
         </p:nvSpPr>
         <p:spPr/>
@@ -687,7 +481,7 @@
             <a:spLocks noGrp="1"/>
           </p:cNvSpPr>
           <p:nvPr>
-            <p:ph type="sldNum" idx="5" sz="quarter"/>
+            <p:ph type="sldNum" sz="quarter" idx="5"/>
           </p:nvPr>
         </p:nvSpPr>
         <p:spPr/>
@@ -701,7 +495,7 @@
 </file>
 
 <file path=ppt/notesSlides/notesSlide12.xml><?xml version="1.0" encoding="utf-8"?>
-<p:notes xmlns:a="http://schemas.openxmlformats.org/drawingml/2006/main" xmlns:p="http://schemas.openxmlformats.org/presentationml/2006/main" xmlns:r="http://schemas.openxmlformats.org/officeDocument/2006/relationships">
+<p:notes xmlns:a="http://schemas.openxmlformats.org/drawingml/2006/main" xmlns:r="http://schemas.openxmlformats.org/officeDocument/2006/relationships" xmlns:p="http://schemas.openxmlformats.org/presentationml/2006/main">
   <p:cSld>
     <p:spTree>
       <p:nvGrpSpPr>
@@ -721,7 +515,7 @@
         <p:nvSpPr>
           <p:cNvPr id="2" name="Slide Image Placeholder 1"/>
           <p:cNvSpPr>
-            <a:spLocks noGrp="1"/>
+            <a:spLocks noGrp="1" noRot="1" noChangeAspect="1"/>
           </p:cNvSpPr>
           <p:nvPr>
             <p:ph type="sldImg" idx="2"/>
@@ -736,7 +530,7 @@
             <a:spLocks noGrp="1"/>
           </p:cNvSpPr>
           <p:nvPr>
-            <p:ph type="body" idx="3" sz="quarter"/>
+            <p:ph type="body" sz="quarter" idx="3"/>
           </p:nvPr>
         </p:nvSpPr>
         <p:spPr/>
@@ -757,7 +551,7 @@
             <a:spLocks noGrp="1"/>
           </p:cNvSpPr>
           <p:nvPr>
-            <p:ph type="sldNum" idx="5" sz="quarter"/>
+            <p:ph type="sldNum" sz="quarter" idx="5"/>
           </p:nvPr>
         </p:nvSpPr>
         <p:spPr/>
@@ -771,7 +565,7 @@
 </file>
 
 <file path=ppt/notesSlides/notesSlide13.xml><?xml version="1.0" encoding="utf-8"?>
-<p:notes xmlns:a="http://schemas.openxmlformats.org/drawingml/2006/main" xmlns:p="http://schemas.openxmlformats.org/presentationml/2006/main" xmlns:r="http://schemas.openxmlformats.org/officeDocument/2006/relationships">
+<p:notes xmlns:a="http://schemas.openxmlformats.org/drawingml/2006/main" xmlns:r="http://schemas.openxmlformats.org/officeDocument/2006/relationships" xmlns:p="http://schemas.openxmlformats.org/presentationml/2006/main">
   <p:cSld>
     <p:spTree>
       <p:nvGrpSpPr>
@@ -791,7 +585,7 @@
         <p:nvSpPr>
           <p:cNvPr id="2" name="Slide Image Placeholder 1"/>
           <p:cNvSpPr>
-            <a:spLocks noGrp="1"/>
+            <a:spLocks noGrp="1" noRot="1" noChangeAspect="1"/>
           </p:cNvSpPr>
           <p:nvPr>
             <p:ph type="sldImg" idx="2"/>
@@ -806,7 +600,7 @@
             <a:spLocks noGrp="1"/>
           </p:cNvSpPr>
           <p:nvPr>
-            <p:ph type="body" idx="3" sz="quarter"/>
+            <p:ph type="body" sz="quarter" idx="3"/>
           </p:nvPr>
         </p:nvSpPr>
         <p:spPr/>
@@ -827,7 +621,7 @@
             <a:spLocks noGrp="1"/>
           </p:cNvSpPr>
           <p:nvPr>
-            <p:ph type="sldNum" idx="5" sz="quarter"/>
+            <p:ph type="sldNum" sz="quarter" idx="5"/>
           </p:nvPr>
         </p:nvSpPr>
         <p:spPr/>
@@ -841,7 +635,7 @@
 </file>
 
 <file path=ppt/notesSlides/notesSlide14.xml><?xml version="1.0" encoding="utf-8"?>
-<p:notes xmlns:a="http://schemas.openxmlformats.org/drawingml/2006/main" xmlns:p="http://schemas.openxmlformats.org/presentationml/2006/main" xmlns:r="http://schemas.openxmlformats.org/officeDocument/2006/relationships">
+<p:notes xmlns:a="http://schemas.openxmlformats.org/drawingml/2006/main" xmlns:r="http://schemas.openxmlformats.org/officeDocument/2006/relationships" xmlns:p="http://schemas.openxmlformats.org/presentationml/2006/main">
   <p:cSld>
     <p:spTree>
       <p:nvGrpSpPr>
@@ -861,7 +655,7 @@
         <p:nvSpPr>
           <p:cNvPr id="2" name="Slide Image Placeholder 1"/>
           <p:cNvSpPr>
-            <a:spLocks noGrp="1"/>
+            <a:spLocks noGrp="1" noRot="1" noChangeAspect="1"/>
           </p:cNvSpPr>
           <p:nvPr>
             <p:ph type="sldImg" idx="2"/>
@@ -876,7 +670,7 @@
             <a:spLocks noGrp="1"/>
           </p:cNvSpPr>
           <p:nvPr>
-            <p:ph type="body" idx="3" sz="quarter"/>
+            <p:ph type="body" sz="quarter" idx="3"/>
           </p:nvPr>
         </p:nvSpPr>
         <p:spPr/>
@@ -897,7 +691,7 @@
             <a:spLocks noGrp="1"/>
           </p:cNvSpPr>
           <p:nvPr>
-            <p:ph type="sldNum" idx="5" sz="quarter"/>
+            <p:ph type="sldNum" sz="quarter" idx="5"/>
           </p:nvPr>
         </p:nvSpPr>
         <p:spPr/>
@@ -911,7 +705,7 @@
 </file>
 
 <file path=ppt/notesSlides/notesSlide15.xml><?xml version="1.0" encoding="utf-8"?>
-<p:notes xmlns:a="http://schemas.openxmlformats.org/drawingml/2006/main" xmlns:p="http://schemas.openxmlformats.org/presentationml/2006/main" xmlns:r="http://schemas.openxmlformats.org/officeDocument/2006/relationships">
+<p:notes xmlns:a="http://schemas.openxmlformats.org/drawingml/2006/main" xmlns:r="http://schemas.openxmlformats.org/officeDocument/2006/relationships" xmlns:p="http://schemas.openxmlformats.org/presentationml/2006/main">
   <p:cSld>
     <p:spTree>
       <p:nvGrpSpPr>
@@ -931,7 +725,7 @@
         <p:nvSpPr>
           <p:cNvPr id="2" name="Slide Image Placeholder 1"/>
           <p:cNvSpPr>
-            <a:spLocks noGrp="1"/>
+            <a:spLocks noGrp="1" noRot="1" noChangeAspect="1"/>
           </p:cNvSpPr>
           <p:nvPr>
             <p:ph type="sldImg" idx="2"/>
@@ -946,7 +740,7 @@
             <a:spLocks noGrp="1"/>
           </p:cNvSpPr>
           <p:nvPr>
-            <p:ph type="body" idx="3" sz="quarter"/>
+            <p:ph type="body" sz="quarter" idx="3"/>
           </p:nvPr>
         </p:nvSpPr>
         <p:spPr/>
@@ -967,7 +761,7 @@
             <a:spLocks noGrp="1"/>
           </p:cNvSpPr>
           <p:nvPr>
-            <p:ph type="sldNum" idx="5" sz="quarter"/>
+            <p:ph type="sldNum" sz="quarter" idx="5"/>
           </p:nvPr>
         </p:nvSpPr>
         <p:spPr/>
@@ -981,7 +775,7 @@
 </file>
 
 <file path=ppt/notesSlides/notesSlide16.xml><?xml version="1.0" encoding="utf-8"?>
-<p:notes xmlns:a="http://schemas.openxmlformats.org/drawingml/2006/main" xmlns:p="http://schemas.openxmlformats.org/presentationml/2006/main" xmlns:r="http://schemas.openxmlformats.org/officeDocument/2006/relationships">
+<p:notes xmlns:a="http://schemas.openxmlformats.org/drawingml/2006/main" xmlns:r="http://schemas.openxmlformats.org/officeDocument/2006/relationships" xmlns:p="http://schemas.openxmlformats.org/presentationml/2006/main">
   <p:cSld>
     <p:spTree>
       <p:nvGrpSpPr>
@@ -1001,7 +795,7 @@
         <p:nvSpPr>
           <p:cNvPr id="2" name="Slide Image Placeholder 1"/>
           <p:cNvSpPr>
-            <a:spLocks noGrp="1"/>
+            <a:spLocks noGrp="1" noRot="1" noChangeAspect="1"/>
           </p:cNvSpPr>
           <p:nvPr>
             <p:ph type="sldImg" idx="2"/>
@@ -1016,7 +810,7 @@
             <a:spLocks noGrp="1"/>
           </p:cNvSpPr>
           <p:nvPr>
-            <p:ph type="body" idx="3" sz="quarter"/>
+            <p:ph type="body" sz="quarter" idx="3"/>
           </p:nvPr>
         </p:nvSpPr>
         <p:spPr/>
@@ -1037,7 +831,7 @@
             <a:spLocks noGrp="1"/>
           </p:cNvSpPr>
           <p:nvPr>
-            <p:ph type="sldNum" idx="5" sz="quarter"/>
+            <p:ph type="sldNum" sz="quarter" idx="5"/>
           </p:nvPr>
         </p:nvSpPr>
         <p:spPr/>
@@ -1051,7 +845,7 @@
 </file>
 
 <file path=ppt/notesSlides/notesSlide17.xml><?xml version="1.0" encoding="utf-8"?>
-<p:notes xmlns:a="http://schemas.openxmlformats.org/drawingml/2006/main" xmlns:p="http://schemas.openxmlformats.org/presentationml/2006/main" xmlns:r="http://schemas.openxmlformats.org/officeDocument/2006/relationships">
+<p:notes xmlns:a="http://schemas.openxmlformats.org/drawingml/2006/main" xmlns:r="http://schemas.openxmlformats.org/officeDocument/2006/relationships" xmlns:p="http://schemas.openxmlformats.org/presentationml/2006/main">
   <p:cSld>
     <p:spTree>
       <p:nvGrpSpPr>
@@ -1071,7 +865,7 @@
         <p:nvSpPr>
           <p:cNvPr id="2" name="Slide Image Placeholder 1"/>
           <p:cNvSpPr>
-            <a:spLocks noGrp="1"/>
+            <a:spLocks noGrp="1" noRot="1" noChangeAspect="1"/>
           </p:cNvSpPr>
           <p:nvPr>
             <p:ph type="sldImg" idx="2"/>
@@ -1086,7 +880,7 @@
             <a:spLocks noGrp="1"/>
           </p:cNvSpPr>
           <p:nvPr>
-            <p:ph type="body" idx="3" sz="quarter"/>
+            <p:ph type="body" sz="quarter" idx="3"/>
           </p:nvPr>
         </p:nvSpPr>
         <p:spPr/>
@@ -1107,7 +901,7 @@
             <a:spLocks noGrp="1"/>
           </p:cNvSpPr>
           <p:nvPr>
-            <p:ph type="sldNum" idx="5" sz="quarter"/>
+            <p:ph type="sldNum" sz="quarter" idx="5"/>
           </p:nvPr>
         </p:nvSpPr>
         <p:spPr/>
@@ -1121,7 +915,7 @@
 </file>
 
 <file path=ppt/notesSlides/notesSlide18.xml><?xml version="1.0" encoding="utf-8"?>
-<p:notes xmlns:a="http://schemas.openxmlformats.org/drawingml/2006/main" xmlns:p="http://schemas.openxmlformats.org/presentationml/2006/main" xmlns:r="http://schemas.openxmlformats.org/officeDocument/2006/relationships">
+<p:notes xmlns:a="http://schemas.openxmlformats.org/drawingml/2006/main" xmlns:r="http://schemas.openxmlformats.org/officeDocument/2006/relationships" xmlns:p="http://schemas.openxmlformats.org/presentationml/2006/main">
   <p:cSld>
     <p:spTree>
       <p:nvGrpSpPr>
@@ -1141,7 +935,7 @@
         <p:nvSpPr>
           <p:cNvPr id="2" name="Slide Image Placeholder 1"/>
           <p:cNvSpPr>
-            <a:spLocks noGrp="1"/>
+            <a:spLocks noGrp="1" noRot="1" noChangeAspect="1"/>
           </p:cNvSpPr>
           <p:nvPr>
             <p:ph type="sldImg" idx="2"/>
@@ -1156,7 +950,7 @@
             <a:spLocks noGrp="1"/>
           </p:cNvSpPr>
           <p:nvPr>
-            <p:ph type="body" idx="3" sz="quarter"/>
+            <p:ph type="body" sz="quarter" idx="3"/>
           </p:nvPr>
         </p:nvSpPr>
         <p:spPr/>
@@ -1177,7 +971,7 @@
             <a:spLocks noGrp="1"/>
           </p:cNvSpPr>
           <p:nvPr>
-            <p:ph type="sldNum" idx="5" sz="quarter"/>
+            <p:ph type="sldNum" sz="quarter" idx="5"/>
           </p:nvPr>
         </p:nvSpPr>
         <p:spPr/>
@@ -1191,7 +985,7 @@
 </file>
 
 <file path=ppt/notesSlides/notesSlide19.xml><?xml version="1.0" encoding="utf-8"?>
-<p:notes xmlns:a="http://schemas.openxmlformats.org/drawingml/2006/main" xmlns:p="http://schemas.openxmlformats.org/presentationml/2006/main" xmlns:r="http://schemas.openxmlformats.org/officeDocument/2006/relationships">
+<p:notes xmlns:a="http://schemas.openxmlformats.org/drawingml/2006/main" xmlns:r="http://schemas.openxmlformats.org/officeDocument/2006/relationships" xmlns:p="http://schemas.openxmlformats.org/presentationml/2006/main">
   <p:cSld>
     <p:spTree>
       <p:nvGrpSpPr>
@@ -1211,7 +1005,7 @@
         <p:nvSpPr>
           <p:cNvPr id="2" name="Slide Image Placeholder 1"/>
           <p:cNvSpPr>
-            <a:spLocks noGrp="1"/>
+            <a:spLocks noGrp="1" noRot="1" noChangeAspect="1"/>
           </p:cNvSpPr>
           <p:nvPr>
             <p:ph type="sldImg" idx="2"/>
@@ -1226,7 +1020,7 @@
             <a:spLocks noGrp="1"/>
           </p:cNvSpPr>
           <p:nvPr>
-            <p:ph type="body" idx="3" sz="quarter"/>
+            <p:ph type="body" sz="quarter" idx="3"/>
           </p:nvPr>
         </p:nvSpPr>
         <p:spPr/>
@@ -1247,7 +1041,7 @@
             <a:spLocks noGrp="1"/>
           </p:cNvSpPr>
           <p:nvPr>
-            <p:ph type="sldNum" idx="5" sz="quarter"/>
+            <p:ph type="sldNum" sz="quarter" idx="5"/>
           </p:nvPr>
         </p:nvSpPr>
         <p:spPr/>
@@ -1261,7 +1055,7 @@
 </file>
 
 <file path=ppt/notesSlides/notesSlide2.xml><?xml version="1.0" encoding="utf-8"?>
-<p:notes xmlns:a="http://schemas.openxmlformats.org/drawingml/2006/main" xmlns:p="http://schemas.openxmlformats.org/presentationml/2006/main" xmlns:r="http://schemas.openxmlformats.org/officeDocument/2006/relationships">
+<p:notes xmlns:a="http://schemas.openxmlformats.org/drawingml/2006/main" xmlns:r="http://schemas.openxmlformats.org/officeDocument/2006/relationships" xmlns:p="http://schemas.openxmlformats.org/presentationml/2006/main">
   <p:cSld>
     <p:spTree>
       <p:nvGrpSpPr>
@@ -1281,7 +1075,7 @@
         <p:nvSpPr>
           <p:cNvPr id="2" name="Slide Image Placeholder 1"/>
           <p:cNvSpPr>
-            <a:spLocks noGrp="1"/>
+            <a:spLocks noGrp="1" noRot="1" noChangeAspect="1"/>
           </p:cNvSpPr>
           <p:nvPr>
             <p:ph type="sldImg" idx="2"/>
@@ -1296,7 +1090,7 @@
             <a:spLocks noGrp="1"/>
           </p:cNvSpPr>
           <p:nvPr>
-            <p:ph type="body" idx="3" sz="quarter"/>
+            <p:ph type="body" sz="quarter" idx="3"/>
           </p:nvPr>
         </p:nvSpPr>
         <p:spPr/>
@@ -1317,7 +1111,7 @@
             <a:spLocks noGrp="1"/>
           </p:cNvSpPr>
           <p:nvPr>
-            <p:ph type="sldNum" idx="5" sz="quarter"/>
+            <p:ph type="sldNum" sz="quarter" idx="5"/>
           </p:nvPr>
         </p:nvSpPr>
         <p:spPr/>
@@ -1331,7 +1125,7 @@
 </file>
 
 <file path=ppt/notesSlides/notesSlide20.xml><?xml version="1.0" encoding="utf-8"?>
-<p:notes xmlns:a="http://schemas.openxmlformats.org/drawingml/2006/main" xmlns:p="http://schemas.openxmlformats.org/presentationml/2006/main" xmlns:r="http://schemas.openxmlformats.org/officeDocument/2006/relationships">
+<p:notes xmlns:a="http://schemas.openxmlformats.org/drawingml/2006/main" xmlns:r="http://schemas.openxmlformats.org/officeDocument/2006/relationships" xmlns:p="http://schemas.openxmlformats.org/presentationml/2006/main">
   <p:cSld>
     <p:spTree>
       <p:nvGrpSpPr>
@@ -1351,7 +1145,7 @@
         <p:nvSpPr>
           <p:cNvPr id="2" name="Slide Image Placeholder 1"/>
           <p:cNvSpPr>
-            <a:spLocks noGrp="1"/>
+            <a:spLocks noGrp="1" noRot="1" noChangeAspect="1"/>
           </p:cNvSpPr>
           <p:nvPr>
             <p:ph type="sldImg" idx="2"/>
@@ -1366,7 +1160,7 @@
             <a:spLocks noGrp="1"/>
           </p:cNvSpPr>
           <p:nvPr>
-            <p:ph type="body" idx="3" sz="quarter"/>
+            <p:ph type="body" sz="quarter" idx="3"/>
           </p:nvPr>
         </p:nvSpPr>
         <p:spPr/>
@@ -1387,7 +1181,7 @@
             <a:spLocks noGrp="1"/>
           </p:cNvSpPr>
           <p:nvPr>
-            <p:ph type="sldNum" idx="5" sz="quarter"/>
+            <p:ph type="sldNum" sz="quarter" idx="5"/>
           </p:nvPr>
         </p:nvSpPr>
         <p:spPr/>
@@ -1401,7 +1195,7 @@
 </file>
 
 <file path=ppt/notesSlides/notesSlide21.xml><?xml version="1.0" encoding="utf-8"?>
-<p:notes xmlns:a="http://schemas.openxmlformats.org/drawingml/2006/main" xmlns:p="http://schemas.openxmlformats.org/presentationml/2006/main" xmlns:r="http://schemas.openxmlformats.org/officeDocument/2006/relationships">
+<p:notes xmlns:a="http://schemas.openxmlformats.org/drawingml/2006/main" xmlns:r="http://schemas.openxmlformats.org/officeDocument/2006/relationships" xmlns:p="http://schemas.openxmlformats.org/presentationml/2006/main">
   <p:cSld>
     <p:spTree>
       <p:nvGrpSpPr>
@@ -1421,7 +1215,7 @@
         <p:nvSpPr>
           <p:cNvPr id="2" name="Slide Image Placeholder 1"/>
           <p:cNvSpPr>
-            <a:spLocks noGrp="1"/>
+            <a:spLocks noGrp="1" noRot="1" noChangeAspect="1"/>
           </p:cNvSpPr>
           <p:nvPr>
             <p:ph type="sldImg" idx="2"/>
@@ -1436,7 +1230,7 @@
             <a:spLocks noGrp="1"/>
           </p:cNvSpPr>
           <p:nvPr>
-            <p:ph type="body" idx="3" sz="quarter"/>
+            <p:ph type="body" sz="quarter" idx="3"/>
           </p:nvPr>
         </p:nvSpPr>
         <p:spPr/>
@@ -1457,7 +1251,7 @@
             <a:spLocks noGrp="1"/>
           </p:cNvSpPr>
           <p:nvPr>
-            <p:ph type="sldNum" idx="5" sz="quarter"/>
+            <p:ph type="sldNum" sz="quarter" idx="5"/>
           </p:nvPr>
         </p:nvSpPr>
         <p:spPr/>
@@ -1471,7 +1265,7 @@
 </file>
 
 <file path=ppt/notesSlides/notesSlide22.xml><?xml version="1.0" encoding="utf-8"?>
-<p:notes xmlns:a="http://schemas.openxmlformats.org/drawingml/2006/main" xmlns:p="http://schemas.openxmlformats.org/presentationml/2006/main" xmlns:r="http://schemas.openxmlformats.org/officeDocument/2006/relationships">
+<p:notes xmlns:a="http://schemas.openxmlformats.org/drawingml/2006/main" xmlns:r="http://schemas.openxmlformats.org/officeDocument/2006/relationships" xmlns:p="http://schemas.openxmlformats.org/presentationml/2006/main">
   <p:cSld>
     <p:spTree>
       <p:nvGrpSpPr>
@@ -1491,7 +1285,7 @@
         <p:nvSpPr>
           <p:cNvPr id="2" name="Slide Image Placeholder 1"/>
           <p:cNvSpPr>
-            <a:spLocks noGrp="1"/>
+            <a:spLocks noGrp="1" noRot="1" noChangeAspect="1"/>
           </p:cNvSpPr>
           <p:nvPr>
             <p:ph type="sldImg" idx="2"/>
@@ -1506,7 +1300,7 @@
             <a:spLocks noGrp="1"/>
           </p:cNvSpPr>
           <p:nvPr>
-            <p:ph type="body" idx="3" sz="quarter"/>
+            <p:ph type="body" sz="quarter" idx="3"/>
           </p:nvPr>
         </p:nvSpPr>
         <p:spPr/>
@@ -1527,7 +1321,7 @@
             <a:spLocks noGrp="1"/>
           </p:cNvSpPr>
           <p:nvPr>
-            <p:ph type="sldNum" idx="5" sz="quarter"/>
+            <p:ph type="sldNum" sz="quarter" idx="5"/>
           </p:nvPr>
         </p:nvSpPr>
         <p:spPr/>
@@ -1541,7 +1335,7 @@
 </file>
 
 <file path=ppt/notesSlides/notesSlide23.xml><?xml version="1.0" encoding="utf-8"?>
-<p:notes xmlns:a="http://schemas.openxmlformats.org/drawingml/2006/main" xmlns:p="http://schemas.openxmlformats.org/presentationml/2006/main" xmlns:r="http://schemas.openxmlformats.org/officeDocument/2006/relationships">
+<p:notes xmlns:a="http://schemas.openxmlformats.org/drawingml/2006/main" xmlns:r="http://schemas.openxmlformats.org/officeDocument/2006/relationships" xmlns:p="http://schemas.openxmlformats.org/presentationml/2006/main">
   <p:cSld>
     <p:spTree>
       <p:nvGrpSpPr>
@@ -1561,7 +1355,7 @@
         <p:nvSpPr>
           <p:cNvPr id="2" name="Slide Image Placeholder 1"/>
           <p:cNvSpPr>
-            <a:spLocks noGrp="1"/>
+            <a:spLocks noGrp="1" noRot="1" noChangeAspect="1"/>
           </p:cNvSpPr>
           <p:nvPr>
             <p:ph type="sldImg" idx="2"/>
@@ -1576,7 +1370,7 @@
             <a:spLocks noGrp="1"/>
           </p:cNvSpPr>
           <p:nvPr>
-            <p:ph type="body" idx="3" sz="quarter"/>
+            <p:ph type="body" sz="quarter" idx="3"/>
           </p:nvPr>
         </p:nvSpPr>
         <p:spPr/>
@@ -1597,7 +1391,7 @@
             <a:spLocks noGrp="1"/>
           </p:cNvSpPr>
           <p:nvPr>
-            <p:ph type="sldNum" idx="5" sz="quarter"/>
+            <p:ph type="sldNum" sz="quarter" idx="5"/>
           </p:nvPr>
         </p:nvSpPr>
         <p:spPr/>
@@ -1611,7 +1405,7 @@
 </file>
 
 <file path=ppt/notesSlides/notesSlide24.xml><?xml version="1.0" encoding="utf-8"?>
-<p:notes xmlns:a="http://schemas.openxmlformats.org/drawingml/2006/main" xmlns:p="http://schemas.openxmlformats.org/presentationml/2006/main" xmlns:r="http://schemas.openxmlformats.org/officeDocument/2006/relationships">
+<p:notes xmlns:a="http://schemas.openxmlformats.org/drawingml/2006/main" xmlns:r="http://schemas.openxmlformats.org/officeDocument/2006/relationships" xmlns:p="http://schemas.openxmlformats.org/presentationml/2006/main">
   <p:cSld>
     <p:spTree>
       <p:nvGrpSpPr>
@@ -1631,7 +1425,7 @@
         <p:nvSpPr>
           <p:cNvPr id="2" name="Slide Image Placeholder 1"/>
           <p:cNvSpPr>
-            <a:spLocks noGrp="1"/>
+            <a:spLocks noGrp="1" noRot="1" noChangeAspect="1"/>
           </p:cNvSpPr>
           <p:nvPr>
             <p:ph type="sldImg" idx="2"/>
@@ -1646,7 +1440,7 @@
             <a:spLocks noGrp="1"/>
           </p:cNvSpPr>
           <p:nvPr>
-            <p:ph type="body" idx="3" sz="quarter"/>
+            <p:ph type="body" sz="quarter" idx="3"/>
           </p:nvPr>
         </p:nvSpPr>
         <p:spPr/>
@@ -1667,7 +1461,7 @@
             <a:spLocks noGrp="1"/>
           </p:cNvSpPr>
           <p:nvPr>
-            <p:ph type="sldNum" idx="5" sz="quarter"/>
+            <p:ph type="sldNum" sz="quarter" idx="5"/>
           </p:nvPr>
         </p:nvSpPr>
         <p:spPr/>
@@ -1681,7 +1475,7 @@
 </file>
 
 <file path=ppt/notesSlides/notesSlide25.xml><?xml version="1.0" encoding="utf-8"?>
-<p:notes xmlns:a="http://schemas.openxmlformats.org/drawingml/2006/main" xmlns:p="http://schemas.openxmlformats.org/presentationml/2006/main" xmlns:r="http://schemas.openxmlformats.org/officeDocument/2006/relationships">
+<p:notes xmlns:a="http://schemas.openxmlformats.org/drawingml/2006/main" xmlns:r="http://schemas.openxmlformats.org/officeDocument/2006/relationships" xmlns:p="http://schemas.openxmlformats.org/presentationml/2006/main">
   <p:cSld>
     <p:spTree>
       <p:nvGrpSpPr>
@@ -1701,7 +1495,7 @@
         <p:nvSpPr>
           <p:cNvPr id="2" name="Slide Image Placeholder 1"/>
           <p:cNvSpPr>
-            <a:spLocks noGrp="1"/>
+            <a:spLocks noGrp="1" noRot="1" noChangeAspect="1"/>
           </p:cNvSpPr>
           <p:nvPr>
             <p:ph type="sldImg" idx="2"/>
@@ -1716,7 +1510,7 @@
             <a:spLocks noGrp="1"/>
           </p:cNvSpPr>
           <p:nvPr>
-            <p:ph type="body" idx="3" sz="quarter"/>
+            <p:ph type="body" sz="quarter" idx="3"/>
           </p:nvPr>
         </p:nvSpPr>
         <p:spPr/>
@@ -1737,7 +1531,7 @@
             <a:spLocks noGrp="1"/>
           </p:cNvSpPr>
           <p:nvPr>
-            <p:ph type="sldNum" idx="5" sz="quarter"/>
+            <p:ph type="sldNum" sz="quarter" idx="5"/>
           </p:nvPr>
         </p:nvSpPr>
         <p:spPr/>
@@ -1751,7 +1545,7 @@
 </file>
 
 <file path=ppt/notesSlides/notesSlide26.xml><?xml version="1.0" encoding="utf-8"?>
-<p:notes xmlns:a="http://schemas.openxmlformats.org/drawingml/2006/main" xmlns:p="http://schemas.openxmlformats.org/presentationml/2006/main" xmlns:r="http://schemas.openxmlformats.org/officeDocument/2006/relationships">
+<p:notes xmlns:a="http://schemas.openxmlformats.org/drawingml/2006/main" xmlns:r="http://schemas.openxmlformats.org/officeDocument/2006/relationships" xmlns:p="http://schemas.openxmlformats.org/presentationml/2006/main">
   <p:cSld>
     <p:spTree>
       <p:nvGrpSpPr>
@@ -1771,7 +1565,7 @@
         <p:nvSpPr>
           <p:cNvPr id="2" name="Slide Image Placeholder 1"/>
           <p:cNvSpPr>
-            <a:spLocks noGrp="1"/>
+            <a:spLocks noGrp="1" noRot="1" noChangeAspect="1"/>
           </p:cNvSpPr>
           <p:nvPr>
             <p:ph type="sldImg" idx="2"/>
@@ -1786,7 +1580,7 @@
             <a:spLocks noGrp="1"/>
           </p:cNvSpPr>
           <p:nvPr>
-            <p:ph type="body" idx="3" sz="quarter"/>
+            <p:ph type="body" sz="quarter" idx="3"/>
           </p:nvPr>
         </p:nvSpPr>
         <p:spPr/>
@@ -1807,7 +1601,7 @@
             <a:spLocks noGrp="1"/>
           </p:cNvSpPr>
           <p:nvPr>
-            <p:ph type="sldNum" idx="5" sz="quarter"/>
+            <p:ph type="sldNum" sz="quarter" idx="5"/>
           </p:nvPr>
         </p:nvSpPr>
         <p:spPr/>
@@ -1821,7 +1615,7 @@
 </file>
 
 <file path=ppt/notesSlides/notesSlide27.xml><?xml version="1.0" encoding="utf-8"?>
-<p:notes xmlns:a="http://schemas.openxmlformats.org/drawingml/2006/main" xmlns:p="http://schemas.openxmlformats.org/presentationml/2006/main" xmlns:r="http://schemas.openxmlformats.org/officeDocument/2006/relationships">
+<p:notes xmlns:a="http://schemas.openxmlformats.org/drawingml/2006/main" xmlns:r="http://schemas.openxmlformats.org/officeDocument/2006/relationships" xmlns:p="http://schemas.openxmlformats.org/presentationml/2006/main">
   <p:cSld>
     <p:spTree>
       <p:nvGrpSpPr>
@@ -1841,7 +1635,7 @@
         <p:nvSpPr>
           <p:cNvPr id="2" name="Slide Image Placeholder 1"/>
           <p:cNvSpPr>
-            <a:spLocks noGrp="1"/>
+            <a:spLocks noGrp="1" noRot="1" noChangeAspect="1"/>
           </p:cNvSpPr>
           <p:nvPr>
             <p:ph type="sldImg" idx="2"/>
@@ -1856,7 +1650,7 @@
             <a:spLocks noGrp="1"/>
           </p:cNvSpPr>
           <p:nvPr>
-            <p:ph type="body" idx="3" sz="quarter"/>
+            <p:ph type="body" sz="quarter" idx="3"/>
           </p:nvPr>
         </p:nvSpPr>
         <p:spPr/>
@@ -1877,7 +1671,7 @@
             <a:spLocks noGrp="1"/>
           </p:cNvSpPr>
           <p:nvPr>
-            <p:ph type="sldNum" idx="5" sz="quarter"/>
+            <p:ph type="sldNum" sz="quarter" idx="5"/>
           </p:nvPr>
         </p:nvSpPr>
         <p:spPr/>
@@ -1891,7 +1685,7 @@
 </file>
 
 <file path=ppt/notesSlides/notesSlide28.xml><?xml version="1.0" encoding="utf-8"?>
-<p:notes xmlns:a="http://schemas.openxmlformats.org/drawingml/2006/main" xmlns:p="http://schemas.openxmlformats.org/presentationml/2006/main" xmlns:r="http://schemas.openxmlformats.org/officeDocument/2006/relationships">
+<p:notes xmlns:a="http://schemas.openxmlformats.org/drawingml/2006/main" xmlns:r="http://schemas.openxmlformats.org/officeDocument/2006/relationships" xmlns:p="http://schemas.openxmlformats.org/presentationml/2006/main">
   <p:cSld>
     <p:spTree>
       <p:nvGrpSpPr>
@@ -1911,7 +1705,7 @@
         <p:nvSpPr>
           <p:cNvPr id="2" name="Slide Image Placeholder 1"/>
           <p:cNvSpPr>
-            <a:spLocks noGrp="1"/>
+            <a:spLocks noGrp="1" noRot="1" noChangeAspect="1"/>
           </p:cNvSpPr>
           <p:nvPr>
             <p:ph type="sldImg" idx="2"/>
@@ -1926,7 +1720,7 @@
             <a:spLocks noGrp="1"/>
           </p:cNvSpPr>
           <p:nvPr>
-            <p:ph type="body" idx="3" sz="quarter"/>
+            <p:ph type="body" sz="quarter" idx="3"/>
           </p:nvPr>
         </p:nvSpPr>
         <p:spPr/>
@@ -1947,7 +1741,7 @@
             <a:spLocks noGrp="1"/>
           </p:cNvSpPr>
           <p:nvPr>
-            <p:ph type="sldNum" idx="5" sz="quarter"/>
+            <p:ph type="sldNum" sz="quarter" idx="5"/>
           </p:nvPr>
         </p:nvSpPr>
         <p:spPr/>
@@ -1961,7 +1755,7 @@
 </file>
 
 <file path=ppt/notesSlides/notesSlide29.xml><?xml version="1.0" encoding="utf-8"?>
-<p:notes xmlns:a="http://schemas.openxmlformats.org/drawingml/2006/main" xmlns:p="http://schemas.openxmlformats.org/presentationml/2006/main" xmlns:r="http://schemas.openxmlformats.org/officeDocument/2006/relationships">
+<p:notes xmlns:a="http://schemas.openxmlformats.org/drawingml/2006/main" xmlns:r="http://schemas.openxmlformats.org/officeDocument/2006/relationships" xmlns:p="http://schemas.openxmlformats.org/presentationml/2006/main">
   <p:cSld>
     <p:spTree>
       <p:nvGrpSpPr>
@@ -1981,7 +1775,7 @@
         <p:nvSpPr>
           <p:cNvPr id="2" name="Slide Image Placeholder 1"/>
           <p:cNvSpPr>
-            <a:spLocks noGrp="1"/>
+            <a:spLocks noGrp="1" noRot="1" noChangeAspect="1"/>
           </p:cNvSpPr>
           <p:nvPr>
             <p:ph type="sldImg" idx="2"/>
@@ -1996,7 +1790,7 @@
             <a:spLocks noGrp="1"/>
           </p:cNvSpPr>
           <p:nvPr>
-            <p:ph type="body" idx="3" sz="quarter"/>
+            <p:ph type="body" sz="quarter" idx="3"/>
           </p:nvPr>
         </p:nvSpPr>
         <p:spPr/>
@@ -2017,7 +1811,7 @@
             <a:spLocks noGrp="1"/>
           </p:cNvSpPr>
           <p:nvPr>
-            <p:ph type="sldNum" idx="5" sz="quarter"/>
+            <p:ph type="sldNum" sz="quarter" idx="5"/>
           </p:nvPr>
         </p:nvSpPr>
         <p:spPr/>
@@ -2031,7 +1825,7 @@
 </file>
 
 <file path=ppt/notesSlides/notesSlide3.xml><?xml version="1.0" encoding="utf-8"?>
-<p:notes xmlns:a="http://schemas.openxmlformats.org/drawingml/2006/main" xmlns:p="http://schemas.openxmlformats.org/presentationml/2006/main" xmlns:r="http://schemas.openxmlformats.org/officeDocument/2006/relationships">
+<p:notes xmlns:a="http://schemas.openxmlformats.org/drawingml/2006/main" xmlns:r="http://schemas.openxmlformats.org/officeDocument/2006/relationships" xmlns:p="http://schemas.openxmlformats.org/presentationml/2006/main">
   <p:cSld>
     <p:spTree>
       <p:nvGrpSpPr>
@@ -2051,7 +1845,7 @@
         <p:nvSpPr>
           <p:cNvPr id="2" name="Slide Image Placeholder 1"/>
           <p:cNvSpPr>
-            <a:spLocks noGrp="1"/>
+            <a:spLocks noGrp="1" noRot="1" noChangeAspect="1"/>
           </p:cNvSpPr>
           <p:nvPr>
             <p:ph type="sldImg" idx="2"/>
@@ -2066,7 +1860,7 @@
             <a:spLocks noGrp="1"/>
           </p:cNvSpPr>
           <p:nvPr>
-            <p:ph type="body" idx="3" sz="quarter"/>
+            <p:ph type="body" sz="quarter" idx="3"/>
           </p:nvPr>
         </p:nvSpPr>
         <p:spPr/>
@@ -2075,7 +1869,7 @@
           <a:lstStyle/>
           <a:p>
             <a:r>
-              <a:t>Read the agenda aloud once so learners can pace themselves. Mention that modules 01-03 are conceptual (no software yet), 04-05 are hands-on (QGIS then Colab), 06-07 turn results into communication, and 08 is the graded deliverable. Point out this slide's structure repeats as a divider before every module, so learners always know where they are in the two hours. 唸過一次議程讓學員掌握節奏。模組 01-03 是概念性、尚未動手；04-05 動手操作（先 QGIS 後 Colab）；06-07 把結果轉化為溝通；08 為最終評量產出。之後每個模組前都會有相同格式的分隔頁，讓學員隨時知道進度。</a:t>
+              <a:t>Read the agenda aloud once so learners can see the whole arc. Mention that modules 01-03 are conceptual (no software yet), 04-05 are hands-on (QGIS then Colab), 06-07 turn results into communication, and 08 is the graded deliverable. Point out this slide's structure repeats as a divider before every module, so learners always know where they are in the workshop. 唸過一次議程讓學員看見整體路徑。模組 01-03 是概念性、尚未動手；04-05 動手操作（先 QGIS 後 Colab）；06-07 把結果轉化為溝通；08 為最終評量產出。之後每個模組前都會有相同格式的分隔頁，讓學員隨時知道進度。</a:t>
             </a:r>
           </a:p>
         </p:txBody>
@@ -2087,7 +1881,7 @@
             <a:spLocks noGrp="1"/>
           </p:cNvSpPr>
           <p:nvPr>
-            <p:ph type="sldNum" idx="5" sz="quarter"/>
+            <p:ph type="sldNum" sz="quarter" idx="5"/>
           </p:nvPr>
         </p:nvSpPr>
         <p:spPr/>
@@ -2101,7 +1895,7 @@
 </file>
 
 <file path=ppt/notesSlides/notesSlide30.xml><?xml version="1.0" encoding="utf-8"?>
-<p:notes xmlns:a="http://schemas.openxmlformats.org/drawingml/2006/main" xmlns:p="http://schemas.openxmlformats.org/presentationml/2006/main" xmlns:r="http://schemas.openxmlformats.org/officeDocument/2006/relationships">
+<p:notes xmlns:a="http://schemas.openxmlformats.org/drawingml/2006/main" xmlns:r="http://schemas.openxmlformats.org/officeDocument/2006/relationships" xmlns:p="http://schemas.openxmlformats.org/presentationml/2006/main">
   <p:cSld>
     <p:spTree>
       <p:nvGrpSpPr>
@@ -2121,7 +1915,7 @@
         <p:nvSpPr>
           <p:cNvPr id="2" name="Slide Image Placeholder 1"/>
           <p:cNvSpPr>
-            <a:spLocks noGrp="1"/>
+            <a:spLocks noGrp="1" noRot="1" noChangeAspect="1"/>
           </p:cNvSpPr>
           <p:nvPr>
             <p:ph type="sldImg" idx="2"/>
@@ -2136,7 +1930,7 @@
             <a:spLocks noGrp="1"/>
           </p:cNvSpPr>
           <p:nvPr>
-            <p:ph type="body" idx="3" sz="quarter"/>
+            <p:ph type="body" sz="quarter" idx="3"/>
           </p:nvPr>
         </p:nvSpPr>
         <p:spPr/>
@@ -2157,7 +1951,7 @@
             <a:spLocks noGrp="1"/>
           </p:cNvSpPr>
           <p:nvPr>
-            <p:ph type="sldNum" idx="5" sz="quarter"/>
+            <p:ph type="sldNum" sz="quarter" idx="5"/>
           </p:nvPr>
         </p:nvSpPr>
         <p:spPr/>
@@ -2171,7 +1965,7 @@
 </file>
 
 <file path=ppt/notesSlides/notesSlide31.xml><?xml version="1.0" encoding="utf-8"?>
-<p:notes xmlns:a="http://schemas.openxmlformats.org/drawingml/2006/main" xmlns:p="http://schemas.openxmlformats.org/presentationml/2006/main" xmlns:r="http://schemas.openxmlformats.org/officeDocument/2006/relationships">
+<p:notes xmlns:a="http://schemas.openxmlformats.org/drawingml/2006/main" xmlns:r="http://schemas.openxmlformats.org/officeDocument/2006/relationships" xmlns:p="http://schemas.openxmlformats.org/presentationml/2006/main">
   <p:cSld>
     <p:spTree>
       <p:nvGrpSpPr>
@@ -2191,7 +1985,7 @@
         <p:nvSpPr>
           <p:cNvPr id="2" name="Slide Image Placeholder 1"/>
           <p:cNvSpPr>
-            <a:spLocks noGrp="1"/>
+            <a:spLocks noGrp="1" noRot="1" noChangeAspect="1"/>
           </p:cNvSpPr>
           <p:nvPr>
             <p:ph type="sldImg" idx="2"/>
@@ -2206,7 +2000,7 @@
             <a:spLocks noGrp="1"/>
           </p:cNvSpPr>
           <p:nvPr>
-            <p:ph type="body" idx="3" sz="quarter"/>
+            <p:ph type="body" sz="quarter" idx="3"/>
           </p:nvPr>
         </p:nvSpPr>
         <p:spPr/>
@@ -2227,7 +2021,7 @@
             <a:spLocks noGrp="1"/>
           </p:cNvSpPr>
           <p:nvPr>
-            <p:ph type="sldNum" idx="5" sz="quarter"/>
+            <p:ph type="sldNum" sz="quarter" idx="5"/>
           </p:nvPr>
         </p:nvSpPr>
         <p:spPr/>
@@ -2241,7 +2035,7 @@
 </file>
 
 <file path=ppt/notesSlides/notesSlide32.xml><?xml version="1.0" encoding="utf-8"?>
-<p:notes xmlns:a="http://schemas.openxmlformats.org/drawingml/2006/main" xmlns:p="http://schemas.openxmlformats.org/presentationml/2006/main" xmlns:r="http://schemas.openxmlformats.org/officeDocument/2006/relationships">
+<p:notes xmlns:a="http://schemas.openxmlformats.org/drawingml/2006/main" xmlns:r="http://schemas.openxmlformats.org/officeDocument/2006/relationships" xmlns:p="http://schemas.openxmlformats.org/presentationml/2006/main">
   <p:cSld>
     <p:spTree>
       <p:nvGrpSpPr>
@@ -2261,7 +2055,7 @@
         <p:nvSpPr>
           <p:cNvPr id="2" name="Slide Image Placeholder 1"/>
           <p:cNvSpPr>
-            <a:spLocks noGrp="1"/>
+            <a:spLocks noGrp="1" noRot="1" noChangeAspect="1"/>
           </p:cNvSpPr>
           <p:nvPr>
             <p:ph type="sldImg" idx="2"/>
@@ -2276,7 +2070,7 @@
             <a:spLocks noGrp="1"/>
           </p:cNvSpPr>
           <p:nvPr>
-            <p:ph type="body" idx="3" sz="quarter"/>
+            <p:ph type="body" sz="quarter" idx="3"/>
           </p:nvPr>
         </p:nvSpPr>
         <p:spPr/>
@@ -2297,7 +2091,7 @@
             <a:spLocks noGrp="1"/>
           </p:cNvSpPr>
           <p:nvPr>
-            <p:ph type="sldNum" idx="5" sz="quarter"/>
+            <p:ph type="sldNum" sz="quarter" idx="5"/>
           </p:nvPr>
         </p:nvSpPr>
         <p:spPr/>
@@ -2311,7 +2105,7 @@
 </file>
 
 <file path=ppt/notesSlides/notesSlide33.xml><?xml version="1.0" encoding="utf-8"?>
-<p:notes xmlns:a="http://schemas.openxmlformats.org/drawingml/2006/main" xmlns:p="http://schemas.openxmlformats.org/presentationml/2006/main" xmlns:r="http://schemas.openxmlformats.org/officeDocument/2006/relationships">
+<p:notes xmlns:a="http://schemas.openxmlformats.org/drawingml/2006/main" xmlns:r="http://schemas.openxmlformats.org/officeDocument/2006/relationships" xmlns:p="http://schemas.openxmlformats.org/presentationml/2006/main">
   <p:cSld>
     <p:spTree>
       <p:nvGrpSpPr>
@@ -2331,7 +2125,7 @@
         <p:nvSpPr>
           <p:cNvPr id="2" name="Slide Image Placeholder 1"/>
           <p:cNvSpPr>
-            <a:spLocks noGrp="1"/>
+            <a:spLocks noGrp="1" noRot="1" noChangeAspect="1"/>
           </p:cNvSpPr>
           <p:nvPr>
             <p:ph type="sldImg" idx="2"/>
@@ -2346,7 +2140,7 @@
             <a:spLocks noGrp="1"/>
           </p:cNvSpPr>
           <p:nvPr>
-            <p:ph type="body" idx="3" sz="quarter"/>
+            <p:ph type="body" sz="quarter" idx="3"/>
           </p:nvPr>
         </p:nvSpPr>
         <p:spPr/>
@@ -2367,7 +2161,7 @@
             <a:spLocks noGrp="1"/>
           </p:cNvSpPr>
           <p:nvPr>
-            <p:ph type="sldNum" idx="5" sz="quarter"/>
+            <p:ph type="sldNum" sz="quarter" idx="5"/>
           </p:nvPr>
         </p:nvSpPr>
         <p:spPr/>
@@ -2381,7 +2175,7 @@
 </file>
 
 <file path=ppt/notesSlides/notesSlide34.xml><?xml version="1.0" encoding="utf-8"?>
-<p:notes xmlns:a="http://schemas.openxmlformats.org/drawingml/2006/main" xmlns:p="http://schemas.openxmlformats.org/presentationml/2006/main" xmlns:r="http://schemas.openxmlformats.org/officeDocument/2006/relationships">
+<p:notes xmlns:a="http://schemas.openxmlformats.org/drawingml/2006/main" xmlns:r="http://schemas.openxmlformats.org/officeDocument/2006/relationships" xmlns:p="http://schemas.openxmlformats.org/presentationml/2006/main">
   <p:cSld>
     <p:spTree>
       <p:nvGrpSpPr>
@@ -2401,7 +2195,7 @@
         <p:nvSpPr>
           <p:cNvPr id="2" name="Slide Image Placeholder 1"/>
           <p:cNvSpPr>
-            <a:spLocks noGrp="1"/>
+            <a:spLocks noGrp="1" noRot="1" noChangeAspect="1"/>
           </p:cNvSpPr>
           <p:nvPr>
             <p:ph type="sldImg" idx="2"/>
@@ -2416,7 +2210,7 @@
             <a:spLocks noGrp="1"/>
           </p:cNvSpPr>
           <p:nvPr>
-            <p:ph type="body" idx="3" sz="quarter"/>
+            <p:ph type="body" sz="quarter" idx="3"/>
           </p:nvPr>
         </p:nvSpPr>
         <p:spPr/>
@@ -2437,7 +2231,7 @@
             <a:spLocks noGrp="1"/>
           </p:cNvSpPr>
           <p:nvPr>
-            <p:ph type="sldNum" idx="5" sz="quarter"/>
+            <p:ph type="sldNum" sz="quarter" idx="5"/>
           </p:nvPr>
         </p:nvSpPr>
         <p:spPr/>
@@ -2451,7 +2245,7 @@
 </file>
 
 <file path=ppt/notesSlides/notesSlide4.xml><?xml version="1.0" encoding="utf-8"?>
-<p:notes xmlns:a="http://schemas.openxmlformats.org/drawingml/2006/main" xmlns:p="http://schemas.openxmlformats.org/presentationml/2006/main" xmlns:r="http://schemas.openxmlformats.org/officeDocument/2006/relationships">
+<p:notes xmlns:a="http://schemas.openxmlformats.org/drawingml/2006/main" xmlns:r="http://schemas.openxmlformats.org/officeDocument/2006/relationships" xmlns:p="http://schemas.openxmlformats.org/presentationml/2006/main">
   <p:cSld>
     <p:spTree>
       <p:nvGrpSpPr>
@@ -2471,7 +2265,7 @@
         <p:nvSpPr>
           <p:cNvPr id="2" name="Slide Image Placeholder 1"/>
           <p:cNvSpPr>
-            <a:spLocks noGrp="1"/>
+            <a:spLocks noGrp="1" noRot="1" noChangeAspect="1"/>
           </p:cNvSpPr>
           <p:nvPr>
             <p:ph type="sldImg" idx="2"/>
@@ -2486,7 +2280,7 @@
             <a:spLocks noGrp="1"/>
           </p:cNvSpPr>
           <p:nvPr>
-            <p:ph type="body" idx="3" sz="quarter"/>
+            <p:ph type="body" sz="quarter" idx="3"/>
           </p:nvPr>
         </p:nvSpPr>
         <p:spPr/>
@@ -2507,7 +2301,7 @@
             <a:spLocks noGrp="1"/>
           </p:cNvSpPr>
           <p:nvPr>
-            <p:ph type="sldNum" idx="5" sz="quarter"/>
+            <p:ph type="sldNum" sz="quarter" idx="5"/>
           </p:nvPr>
         </p:nvSpPr>
         <p:spPr/>
@@ -2521,7 +2315,7 @@
 </file>
 
 <file path=ppt/notesSlides/notesSlide5.xml><?xml version="1.0" encoding="utf-8"?>
-<p:notes xmlns:a="http://schemas.openxmlformats.org/drawingml/2006/main" xmlns:p="http://schemas.openxmlformats.org/presentationml/2006/main" xmlns:r="http://schemas.openxmlformats.org/officeDocument/2006/relationships">
+<p:notes xmlns:a="http://schemas.openxmlformats.org/drawingml/2006/main" xmlns:r="http://schemas.openxmlformats.org/officeDocument/2006/relationships" xmlns:p="http://schemas.openxmlformats.org/presentationml/2006/main">
   <p:cSld>
     <p:spTree>
       <p:nvGrpSpPr>
@@ -2541,7 +2335,7 @@
         <p:nvSpPr>
           <p:cNvPr id="2" name="Slide Image Placeholder 1"/>
           <p:cNvSpPr>
-            <a:spLocks noGrp="1"/>
+            <a:spLocks noGrp="1" noRot="1" noChangeAspect="1"/>
           </p:cNvSpPr>
           <p:nvPr>
             <p:ph type="sldImg" idx="2"/>
@@ -2556,7 +2350,7 @@
             <a:spLocks noGrp="1"/>
           </p:cNvSpPr>
           <p:nvPr>
-            <p:ph type="body" idx="3" sz="quarter"/>
+            <p:ph type="body" sz="quarter" idx="3"/>
           </p:nvPr>
         </p:nvSpPr>
         <p:spPr/>
@@ -2577,7 +2371,7 @@
             <a:spLocks noGrp="1"/>
           </p:cNvSpPr>
           <p:nvPr>
-            <p:ph type="sldNum" idx="5" sz="quarter"/>
+            <p:ph type="sldNum" sz="quarter" idx="5"/>
           </p:nvPr>
         </p:nvSpPr>
         <p:spPr/>
@@ -2591,7 +2385,7 @@
 </file>
 
 <file path=ppt/notesSlides/notesSlide6.xml><?xml version="1.0" encoding="utf-8"?>
-<p:notes xmlns:a="http://schemas.openxmlformats.org/drawingml/2006/main" xmlns:p="http://schemas.openxmlformats.org/presentationml/2006/main" xmlns:r="http://schemas.openxmlformats.org/officeDocument/2006/relationships">
+<p:notes xmlns:a="http://schemas.openxmlformats.org/drawingml/2006/main" xmlns:r="http://schemas.openxmlformats.org/officeDocument/2006/relationships" xmlns:p="http://schemas.openxmlformats.org/presentationml/2006/main">
   <p:cSld>
     <p:spTree>
       <p:nvGrpSpPr>
@@ -2611,7 +2405,7 @@
         <p:nvSpPr>
           <p:cNvPr id="2" name="Slide Image Placeholder 1"/>
           <p:cNvSpPr>
-            <a:spLocks noGrp="1"/>
+            <a:spLocks noGrp="1" noRot="1" noChangeAspect="1"/>
           </p:cNvSpPr>
           <p:nvPr>
             <p:ph type="sldImg" idx="2"/>
@@ -2626,7 +2420,7 @@
             <a:spLocks noGrp="1"/>
           </p:cNvSpPr>
           <p:nvPr>
-            <p:ph type="body" idx="3" sz="quarter"/>
+            <p:ph type="body" sz="quarter" idx="3"/>
           </p:nvPr>
         </p:nvSpPr>
         <p:spPr/>
@@ -2647,7 +2441,7 @@
             <a:spLocks noGrp="1"/>
           </p:cNvSpPr>
           <p:nvPr>
-            <p:ph type="sldNum" idx="5" sz="quarter"/>
+            <p:ph type="sldNum" sz="quarter" idx="5"/>
           </p:nvPr>
         </p:nvSpPr>
         <p:spPr/>
@@ -2661,7 +2455,7 @@
 </file>
 
 <file path=ppt/notesSlides/notesSlide7.xml><?xml version="1.0" encoding="utf-8"?>
-<p:notes xmlns:a="http://schemas.openxmlformats.org/drawingml/2006/main" xmlns:p="http://schemas.openxmlformats.org/presentationml/2006/main" xmlns:r="http://schemas.openxmlformats.org/officeDocument/2006/relationships">
+<p:notes xmlns:a="http://schemas.openxmlformats.org/drawingml/2006/main" xmlns:r="http://schemas.openxmlformats.org/officeDocument/2006/relationships" xmlns:p="http://schemas.openxmlformats.org/presentationml/2006/main">
   <p:cSld>
     <p:spTree>
       <p:nvGrpSpPr>
@@ -2681,7 +2475,7 @@
         <p:nvSpPr>
           <p:cNvPr id="2" name="Slide Image Placeholder 1"/>
           <p:cNvSpPr>
-            <a:spLocks noGrp="1"/>
+            <a:spLocks noGrp="1" noRot="1" noChangeAspect="1"/>
           </p:cNvSpPr>
           <p:nvPr>
             <p:ph type="sldImg" idx="2"/>
@@ -2696,7 +2490,7 @@
             <a:spLocks noGrp="1"/>
           </p:cNvSpPr>
           <p:nvPr>
-            <p:ph type="body" idx="3" sz="quarter"/>
+            <p:ph type="body" sz="quarter" idx="3"/>
           </p:nvPr>
         </p:nvSpPr>
         <p:spPr/>
@@ -2717,7 +2511,7 @@
             <a:spLocks noGrp="1"/>
           </p:cNvSpPr>
           <p:nvPr>
-            <p:ph type="sldNum" idx="5" sz="quarter"/>
+            <p:ph type="sldNum" sz="quarter" idx="5"/>
           </p:nvPr>
         </p:nvSpPr>
         <p:spPr/>
@@ -2731,7 +2525,7 @@
 </file>
 
 <file path=ppt/notesSlides/notesSlide8.xml><?xml version="1.0" encoding="utf-8"?>
-<p:notes xmlns:a="http://schemas.openxmlformats.org/drawingml/2006/main" xmlns:p="http://schemas.openxmlformats.org/presentationml/2006/main" xmlns:r="http://schemas.openxmlformats.org/officeDocument/2006/relationships">
+<p:notes xmlns:a="http://schemas.openxmlformats.org/drawingml/2006/main" xmlns:r="http://schemas.openxmlformats.org/officeDocument/2006/relationships" xmlns:p="http://schemas.openxmlformats.org/presentationml/2006/main">
   <p:cSld>
     <p:spTree>
       <p:nvGrpSpPr>
@@ -2751,7 +2545,7 @@
         <p:nvSpPr>
           <p:cNvPr id="2" name="Slide Image Placeholder 1"/>
           <p:cNvSpPr>
-            <a:spLocks noGrp="1"/>
+            <a:spLocks noGrp="1" noRot="1" noChangeAspect="1"/>
           </p:cNvSpPr>
           <p:nvPr>
             <p:ph type="sldImg" idx="2"/>
@@ -2766,7 +2560,7 @@
             <a:spLocks noGrp="1"/>
           </p:cNvSpPr>
           <p:nvPr>
-            <p:ph type="body" idx="3" sz="quarter"/>
+            <p:ph type="body" sz="quarter" idx="3"/>
           </p:nvPr>
         </p:nvSpPr>
         <p:spPr/>
@@ -2787,7 +2581,7 @@
             <a:spLocks noGrp="1"/>
           </p:cNvSpPr>
           <p:nvPr>
-            <p:ph type="sldNum" idx="5" sz="quarter"/>
+            <p:ph type="sldNum" sz="quarter" idx="5"/>
           </p:nvPr>
         </p:nvSpPr>
         <p:spPr/>
@@ -2801,7 +2595,7 @@
 </file>
 
 <file path=ppt/notesSlides/notesSlide9.xml><?xml version="1.0" encoding="utf-8"?>
-<p:notes xmlns:a="http://schemas.openxmlformats.org/drawingml/2006/main" xmlns:p="http://schemas.openxmlformats.org/presentationml/2006/main" xmlns:r="http://schemas.openxmlformats.org/officeDocument/2006/relationships">
+<p:notes xmlns:a="http://schemas.openxmlformats.org/drawingml/2006/main" xmlns:r="http://schemas.openxmlformats.org/officeDocument/2006/relationships" xmlns:p="http://schemas.openxmlformats.org/presentationml/2006/main">
   <p:cSld>
     <p:spTree>
       <p:nvGrpSpPr>
@@ -2821,7 +2615,7 @@
         <p:nvSpPr>
           <p:cNvPr id="2" name="Slide Image Placeholder 1"/>
           <p:cNvSpPr>
-            <a:spLocks noGrp="1"/>
+            <a:spLocks noGrp="1" noRot="1" noChangeAspect="1"/>
           </p:cNvSpPr>
           <p:nvPr>
             <p:ph type="sldImg" idx="2"/>
@@ -2836,7 +2630,7 @@
             <a:spLocks noGrp="1"/>
           </p:cNvSpPr>
           <p:nvPr>
-            <p:ph type="body" idx="3" sz="quarter"/>
+            <p:ph type="body" sz="quarter" idx="3"/>
           </p:nvPr>
         </p:nvSpPr>
         <p:spPr/>
@@ -2857,7 +2651,7 @@
             <a:spLocks noGrp="1"/>
           </p:cNvSpPr>
           <p:nvPr>
-            <p:ph type="sldNum" idx="5" sz="quarter"/>
+            <p:ph type="sldNum" sz="quarter" idx="5"/>
           </p:nvPr>
         </p:nvSpPr>
         <p:spPr/>
@@ -2908,10 +2702,9 @@
           <a:lstStyle/>
           <a:p>
             <a:r>
-              <a:rPr lang="en-US" smtClean="0"/>
+              <a:rPr lang="en-US"/>
               <a:t>Click to edit Master title style</a:t>
             </a:r>
-            <a:endParaRPr lang="en-US"/>
           </a:p>
         </p:txBody>
       </p:sp>
@@ -3027,10 +2820,9 @@
           </a:lstStyle>
           <a:p>
             <a:r>
-              <a:rPr lang="en-US" smtClean="0"/>
+              <a:rPr lang="en-US"/>
               <a:t>Click to edit Master subtitle style</a:t>
             </a:r>
-            <a:endParaRPr lang="en-US"/>
           </a:p>
         </p:txBody>
       </p:sp>
@@ -3051,7 +2843,7 @@
           <a:p>
             <a:fld id="{5BCAD085-E8A6-8845-BD4E-CB4CCA059FC4}" type="datetimeFigureOut">
               <a:rPr lang="en-US" smtClean="0"/>
-              <a:t>1/27/13</a:t>
+              <a:t>9/2/2026</a:t>
             </a:fld>
             <a:endParaRPr lang="en-US"/>
           </a:p>
@@ -3145,10 +2937,9 @@
           <a:lstStyle/>
           <a:p>
             <a:r>
-              <a:rPr lang="en-US" smtClean="0"/>
+              <a:rPr lang="en-US"/>
               <a:t>Click to edit Master title style</a:t>
             </a:r>
-            <a:endParaRPr lang="en-US"/>
           </a:p>
         </p:txBody>
       </p:sp>
@@ -3169,38 +2960,37 @@
           <a:p>
             <a:pPr lvl="0"/>
             <a:r>
-              <a:rPr lang="en-US" smtClean="0"/>
+              <a:rPr lang="en-US"/>
               <a:t>Click to edit Master text styles</a:t>
             </a:r>
           </a:p>
           <a:p>
             <a:pPr lvl="1"/>
             <a:r>
-              <a:rPr lang="en-US" smtClean="0"/>
+              <a:rPr lang="en-US"/>
               <a:t>Second level</a:t>
             </a:r>
           </a:p>
           <a:p>
             <a:pPr lvl="2"/>
             <a:r>
-              <a:rPr lang="en-US" smtClean="0"/>
+              <a:rPr lang="en-US"/>
               <a:t>Third level</a:t>
             </a:r>
           </a:p>
           <a:p>
             <a:pPr lvl="3"/>
             <a:r>
-              <a:rPr lang="en-US" smtClean="0"/>
+              <a:rPr lang="en-US"/>
               <a:t>Fourth level</a:t>
             </a:r>
           </a:p>
           <a:p>
             <a:pPr lvl="4"/>
             <a:r>
-              <a:rPr lang="en-US" smtClean="0"/>
+              <a:rPr lang="en-US"/>
               <a:t>Fifth level</a:t>
             </a:r>
-            <a:endParaRPr lang="en-US"/>
           </a:p>
         </p:txBody>
       </p:sp>
@@ -3221,7 +3011,7 @@
           <a:p>
             <a:fld id="{5BCAD085-E8A6-8845-BD4E-CB4CCA059FC4}" type="datetimeFigureOut">
               <a:rPr lang="en-US" smtClean="0"/>
-              <a:t>1/27/13</a:t>
+              <a:t>9/2/2026</a:t>
             </a:fld>
             <a:endParaRPr lang="en-US"/>
           </a:p>
@@ -3320,10 +3110,9 @@
           <a:lstStyle/>
           <a:p>
             <a:r>
-              <a:rPr lang="en-US" smtClean="0"/>
+              <a:rPr lang="en-US"/>
               <a:t>Click to edit Master title style</a:t>
             </a:r>
-            <a:endParaRPr lang="en-US"/>
           </a:p>
         </p:txBody>
       </p:sp>
@@ -3349,38 +3138,37 @@
           <a:p>
             <a:pPr lvl="0"/>
             <a:r>
-              <a:rPr lang="en-US" smtClean="0"/>
+              <a:rPr lang="en-US"/>
               <a:t>Click to edit Master text styles</a:t>
             </a:r>
           </a:p>
           <a:p>
             <a:pPr lvl="1"/>
             <a:r>
-              <a:rPr lang="en-US" smtClean="0"/>
+              <a:rPr lang="en-US"/>
               <a:t>Second level</a:t>
             </a:r>
           </a:p>
           <a:p>
             <a:pPr lvl="2"/>
             <a:r>
-              <a:rPr lang="en-US" smtClean="0"/>
+              <a:rPr lang="en-US"/>
               <a:t>Third level</a:t>
             </a:r>
           </a:p>
           <a:p>
             <a:pPr lvl="3"/>
             <a:r>
-              <a:rPr lang="en-US" smtClean="0"/>
+              <a:rPr lang="en-US"/>
               <a:t>Fourth level</a:t>
             </a:r>
           </a:p>
           <a:p>
             <a:pPr lvl="4"/>
             <a:r>
-              <a:rPr lang="en-US" smtClean="0"/>
+              <a:rPr lang="en-US"/>
               <a:t>Fifth level</a:t>
             </a:r>
-            <a:endParaRPr lang="en-US"/>
           </a:p>
         </p:txBody>
       </p:sp>
@@ -3401,7 +3189,7 @@
           <a:p>
             <a:fld id="{5BCAD085-E8A6-8845-BD4E-CB4CCA059FC4}" type="datetimeFigureOut">
               <a:rPr lang="en-US" smtClean="0"/>
-              <a:t>1/27/13</a:t>
+              <a:t>9/2/2026</a:t>
             </a:fld>
             <a:endParaRPr lang="en-US"/>
           </a:p>
@@ -3495,10 +3283,9 @@
           <a:lstStyle/>
           <a:p>
             <a:r>
-              <a:rPr lang="en-US" smtClean="0"/>
+              <a:rPr lang="en-US"/>
               <a:t>Click to edit Master title style</a:t>
             </a:r>
-            <a:endParaRPr lang="en-US"/>
           </a:p>
         </p:txBody>
       </p:sp>
@@ -3519,38 +3306,37 @@
           <a:p>
             <a:pPr lvl="0"/>
             <a:r>
-              <a:rPr lang="en-US" smtClean="0"/>
+              <a:rPr lang="en-US"/>
               <a:t>Click to edit Master text styles</a:t>
             </a:r>
           </a:p>
           <a:p>
             <a:pPr lvl="1"/>
             <a:r>
-              <a:rPr lang="en-US" smtClean="0"/>
+              <a:rPr lang="en-US"/>
               <a:t>Second level</a:t>
             </a:r>
           </a:p>
           <a:p>
             <a:pPr lvl="2"/>
             <a:r>
-              <a:rPr lang="en-US" smtClean="0"/>
+              <a:rPr lang="en-US"/>
               <a:t>Third level</a:t>
             </a:r>
           </a:p>
           <a:p>
             <a:pPr lvl="3"/>
             <a:r>
-              <a:rPr lang="en-US" smtClean="0"/>
+              <a:rPr lang="en-US"/>
               <a:t>Fourth level</a:t>
             </a:r>
           </a:p>
           <a:p>
             <a:pPr lvl="4"/>
             <a:r>
-              <a:rPr lang="en-US" smtClean="0"/>
+              <a:rPr lang="en-US"/>
               <a:t>Fifth level</a:t>
             </a:r>
-            <a:endParaRPr lang="en-US"/>
           </a:p>
         </p:txBody>
       </p:sp>
@@ -3571,7 +3357,7 @@
           <a:p>
             <a:fld id="{5BCAD085-E8A6-8845-BD4E-CB4CCA059FC4}" type="datetimeFigureOut">
               <a:rPr lang="en-US" smtClean="0"/>
-              <a:t>1/27/13</a:t>
+              <a:t>9/2/2026</a:t>
             </a:fld>
             <a:endParaRPr lang="en-US"/>
           </a:p>
@@ -3674,10 +3460,9 @@
           </a:lstStyle>
           <a:p>
             <a:r>
-              <a:rPr lang="en-US" smtClean="0"/>
+              <a:rPr lang="en-US"/>
               <a:t>Click to edit Master title style</a:t>
             </a:r>
-            <a:endParaRPr lang="en-US"/>
           </a:p>
         </p:txBody>
       </p:sp>
@@ -3794,7 +3579,7 @@
           <a:p>
             <a:pPr lvl="0"/>
             <a:r>
-              <a:rPr lang="en-US" smtClean="0"/>
+              <a:rPr lang="en-US"/>
               <a:t>Click to edit Master text styles</a:t>
             </a:r>
           </a:p>
@@ -3817,7 +3602,7 @@
           <a:p>
             <a:fld id="{5BCAD085-E8A6-8845-BD4E-CB4CCA059FC4}" type="datetimeFigureOut">
               <a:rPr lang="en-US" smtClean="0"/>
-              <a:t>1/27/13</a:t>
+              <a:t>9/2/2026</a:t>
             </a:fld>
             <a:endParaRPr lang="en-US"/>
           </a:p>
@@ -3911,10 +3696,9 @@
           <a:lstStyle/>
           <a:p>
             <a:r>
-              <a:rPr lang="en-US" smtClean="0"/>
+              <a:rPr lang="en-US"/>
               <a:t>Click to edit Master title style</a:t>
             </a:r>
-            <a:endParaRPr lang="en-US"/>
           </a:p>
         </p:txBody>
       </p:sp>
@@ -3968,38 +3752,37 @@
           <a:p>
             <a:pPr lvl="0"/>
             <a:r>
-              <a:rPr lang="en-US" smtClean="0"/>
+              <a:rPr lang="en-US"/>
               <a:t>Click to edit Master text styles</a:t>
             </a:r>
           </a:p>
           <a:p>
             <a:pPr lvl="1"/>
             <a:r>
-              <a:rPr lang="en-US" smtClean="0"/>
+              <a:rPr lang="en-US"/>
               <a:t>Second level</a:t>
             </a:r>
           </a:p>
           <a:p>
             <a:pPr lvl="2"/>
             <a:r>
-              <a:rPr lang="en-US" smtClean="0"/>
+              <a:rPr lang="en-US"/>
               <a:t>Third level</a:t>
             </a:r>
           </a:p>
           <a:p>
             <a:pPr lvl="3"/>
             <a:r>
-              <a:rPr lang="en-US" smtClean="0"/>
+              <a:rPr lang="en-US"/>
               <a:t>Fourth level</a:t>
             </a:r>
           </a:p>
           <a:p>
             <a:pPr lvl="4"/>
             <a:r>
-              <a:rPr lang="en-US" smtClean="0"/>
+              <a:rPr lang="en-US"/>
               <a:t>Fifth level</a:t>
             </a:r>
-            <a:endParaRPr lang="en-US"/>
           </a:p>
         </p:txBody>
       </p:sp>
@@ -4053,38 +3836,37 @@
           <a:p>
             <a:pPr lvl="0"/>
             <a:r>
-              <a:rPr lang="en-US" smtClean="0"/>
+              <a:rPr lang="en-US"/>
               <a:t>Click to edit Master text styles</a:t>
             </a:r>
           </a:p>
           <a:p>
             <a:pPr lvl="1"/>
             <a:r>
-              <a:rPr lang="en-US" smtClean="0"/>
+              <a:rPr lang="en-US"/>
               <a:t>Second level</a:t>
             </a:r>
           </a:p>
           <a:p>
             <a:pPr lvl="2"/>
             <a:r>
-              <a:rPr lang="en-US" smtClean="0"/>
+              <a:rPr lang="en-US"/>
               <a:t>Third level</a:t>
             </a:r>
           </a:p>
           <a:p>
             <a:pPr lvl="3"/>
             <a:r>
-              <a:rPr lang="en-US" smtClean="0"/>
+              <a:rPr lang="en-US"/>
               <a:t>Fourth level</a:t>
             </a:r>
           </a:p>
           <a:p>
             <a:pPr lvl="4"/>
             <a:r>
-              <a:rPr lang="en-US" smtClean="0"/>
+              <a:rPr lang="en-US"/>
               <a:t>Fifth level</a:t>
             </a:r>
-            <a:endParaRPr lang="en-US"/>
           </a:p>
         </p:txBody>
       </p:sp>
@@ -4105,7 +3887,7 @@
           <a:p>
             <a:fld id="{5BCAD085-E8A6-8845-BD4E-CB4CCA059FC4}" type="datetimeFigureOut">
               <a:rPr lang="en-US" smtClean="0"/>
-              <a:t>1/27/13</a:t>
+              <a:t>9/2/2026</a:t>
             </a:fld>
             <a:endParaRPr lang="en-US"/>
           </a:p>
@@ -4203,10 +3985,9 @@
           </a:lstStyle>
           <a:p>
             <a:r>
-              <a:rPr lang="en-US" smtClean="0"/>
+              <a:rPr lang="en-US"/>
               <a:t>Click to edit Master title style</a:t>
             </a:r>
-            <a:endParaRPr lang="en-US"/>
           </a:p>
         </p:txBody>
       </p:sp>
@@ -4269,7 +4050,7 @@
           <a:p>
             <a:pPr lvl="0"/>
             <a:r>
-              <a:rPr lang="en-US" smtClean="0"/>
+              <a:rPr lang="en-US"/>
               <a:t>Click to edit Master text styles</a:t>
             </a:r>
           </a:p>
@@ -4325,38 +4106,37 @@
           <a:p>
             <a:pPr lvl="0"/>
             <a:r>
-              <a:rPr lang="en-US" smtClean="0"/>
+              <a:rPr lang="en-US"/>
               <a:t>Click to edit Master text styles</a:t>
             </a:r>
           </a:p>
           <a:p>
             <a:pPr lvl="1"/>
             <a:r>
-              <a:rPr lang="en-US" smtClean="0"/>
+              <a:rPr lang="en-US"/>
               <a:t>Second level</a:t>
             </a:r>
           </a:p>
           <a:p>
             <a:pPr lvl="2"/>
             <a:r>
-              <a:rPr lang="en-US" smtClean="0"/>
+              <a:rPr lang="en-US"/>
               <a:t>Third level</a:t>
             </a:r>
           </a:p>
           <a:p>
             <a:pPr lvl="3"/>
             <a:r>
-              <a:rPr lang="en-US" smtClean="0"/>
+              <a:rPr lang="en-US"/>
               <a:t>Fourth level</a:t>
             </a:r>
           </a:p>
           <a:p>
             <a:pPr lvl="4"/>
             <a:r>
-              <a:rPr lang="en-US" smtClean="0"/>
+              <a:rPr lang="en-US"/>
               <a:t>Fifth level</a:t>
             </a:r>
-            <a:endParaRPr lang="en-US"/>
           </a:p>
         </p:txBody>
       </p:sp>
@@ -4419,7 +4199,7 @@
           <a:p>
             <a:pPr lvl="0"/>
             <a:r>
-              <a:rPr lang="en-US" smtClean="0"/>
+              <a:rPr lang="en-US"/>
               <a:t>Click to edit Master text styles</a:t>
             </a:r>
           </a:p>
@@ -4475,38 +4255,37 @@
           <a:p>
             <a:pPr lvl="0"/>
             <a:r>
-              <a:rPr lang="en-US" smtClean="0"/>
+              <a:rPr lang="en-US"/>
               <a:t>Click to edit Master text styles</a:t>
             </a:r>
           </a:p>
           <a:p>
             <a:pPr lvl="1"/>
             <a:r>
-              <a:rPr lang="en-US" smtClean="0"/>
+              <a:rPr lang="en-US"/>
               <a:t>Second level</a:t>
             </a:r>
           </a:p>
           <a:p>
             <a:pPr lvl="2"/>
             <a:r>
-              <a:rPr lang="en-US" smtClean="0"/>
+              <a:rPr lang="en-US"/>
               <a:t>Third level</a:t>
             </a:r>
           </a:p>
           <a:p>
             <a:pPr lvl="3"/>
             <a:r>
-              <a:rPr lang="en-US" smtClean="0"/>
+              <a:rPr lang="en-US"/>
               <a:t>Fourth level</a:t>
             </a:r>
           </a:p>
           <a:p>
             <a:pPr lvl="4"/>
             <a:r>
-              <a:rPr lang="en-US" smtClean="0"/>
+              <a:rPr lang="en-US"/>
               <a:t>Fifth level</a:t>
             </a:r>
-            <a:endParaRPr lang="en-US"/>
           </a:p>
         </p:txBody>
       </p:sp>
@@ -4527,7 +4306,7 @@
           <a:p>
             <a:fld id="{5BCAD085-E8A6-8845-BD4E-CB4CCA059FC4}" type="datetimeFigureOut">
               <a:rPr lang="en-US" smtClean="0"/>
-              <a:t>1/27/13</a:t>
+              <a:t>9/2/2026</a:t>
             </a:fld>
             <a:endParaRPr lang="en-US"/>
           </a:p>
@@ -4621,10 +4400,9 @@
           <a:lstStyle/>
           <a:p>
             <a:r>
-              <a:rPr lang="en-US" smtClean="0"/>
+              <a:rPr lang="en-US"/>
               <a:t>Click to edit Master title style</a:t>
             </a:r>
-            <a:endParaRPr lang="en-US"/>
           </a:p>
         </p:txBody>
       </p:sp>
@@ -4645,7 +4423,7 @@
           <a:p>
             <a:fld id="{5BCAD085-E8A6-8845-BD4E-CB4CCA059FC4}" type="datetimeFigureOut">
               <a:rPr lang="en-US" smtClean="0"/>
-              <a:t>1/27/13</a:t>
+              <a:t>9/2/2026</a:t>
             </a:fld>
             <a:endParaRPr lang="en-US"/>
           </a:p>
@@ -4740,7 +4518,7 @@
           <a:p>
             <a:fld id="{5BCAD085-E8A6-8845-BD4E-CB4CCA059FC4}" type="datetimeFigureOut">
               <a:rPr lang="en-US" smtClean="0"/>
-              <a:t>1/27/13</a:t>
+              <a:t>9/2/2026</a:t>
             </a:fld>
             <a:endParaRPr lang="en-US"/>
           </a:p>
@@ -4843,10 +4621,9 @@
           </a:lstStyle>
           <a:p>
             <a:r>
-              <a:rPr lang="en-US" smtClean="0"/>
+              <a:rPr lang="en-US"/>
               <a:t>Click to edit Master title style</a:t>
             </a:r>
-            <a:endParaRPr lang="en-US"/>
           </a:p>
         </p:txBody>
       </p:sp>
@@ -4900,38 +4677,37 @@
           <a:p>
             <a:pPr lvl="0"/>
             <a:r>
-              <a:rPr lang="en-US" smtClean="0"/>
+              <a:rPr lang="en-US"/>
               <a:t>Click to edit Master text styles</a:t>
             </a:r>
           </a:p>
           <a:p>
             <a:pPr lvl="1"/>
             <a:r>
-              <a:rPr lang="en-US" smtClean="0"/>
+              <a:rPr lang="en-US"/>
               <a:t>Second level</a:t>
             </a:r>
           </a:p>
           <a:p>
             <a:pPr lvl="2"/>
             <a:r>
-              <a:rPr lang="en-US" smtClean="0"/>
+              <a:rPr lang="en-US"/>
               <a:t>Third level</a:t>
             </a:r>
           </a:p>
           <a:p>
             <a:pPr lvl="3"/>
             <a:r>
-              <a:rPr lang="en-US" smtClean="0"/>
+              <a:rPr lang="en-US"/>
               <a:t>Fourth level</a:t>
             </a:r>
           </a:p>
           <a:p>
             <a:pPr lvl="4"/>
             <a:r>
-              <a:rPr lang="en-US" smtClean="0"/>
+              <a:rPr lang="en-US"/>
               <a:t>Fifth level</a:t>
             </a:r>
-            <a:endParaRPr lang="en-US"/>
           </a:p>
         </p:txBody>
       </p:sp>
@@ -4994,7 +4770,7 @@
           <a:p>
             <a:pPr lvl="0"/>
             <a:r>
-              <a:rPr lang="en-US" smtClean="0"/>
+              <a:rPr lang="en-US"/>
               <a:t>Click to edit Master text styles</a:t>
             </a:r>
           </a:p>
@@ -5017,7 +4793,7 @@
           <a:p>
             <a:fld id="{5BCAD085-E8A6-8845-BD4E-CB4CCA059FC4}" type="datetimeFigureOut">
               <a:rPr lang="en-US" smtClean="0"/>
-              <a:t>1/27/13</a:t>
+              <a:t>9/2/2026</a:t>
             </a:fld>
             <a:endParaRPr lang="en-US"/>
           </a:p>
@@ -5120,10 +4896,9 @@
           </a:lstStyle>
           <a:p>
             <a:r>
-              <a:rPr lang="en-US" smtClean="0"/>
+              <a:rPr lang="en-US"/>
               <a:t>Click to edit Master title style</a:t>
             </a:r>
-            <a:endParaRPr lang="en-US"/>
           </a:p>
         </p:txBody>
       </p:sp>
@@ -5247,7 +5022,7 @@
           <a:p>
             <a:pPr lvl="0"/>
             <a:r>
-              <a:rPr lang="en-US" smtClean="0"/>
+              <a:rPr lang="en-US"/>
               <a:t>Click to edit Master text styles</a:t>
             </a:r>
           </a:p>
@@ -5270,7 +5045,7 @@
           <a:p>
             <a:fld id="{5BCAD085-E8A6-8845-BD4E-CB4CCA059FC4}" type="datetimeFigureOut">
               <a:rPr lang="en-US" smtClean="0"/>
-              <a:t>1/27/13</a:t>
+              <a:t>9/2/2026</a:t>
             </a:fld>
             <a:endParaRPr lang="en-US"/>
           </a:p>
@@ -5379,10 +5154,9 @@
           <a:lstStyle/>
           <a:p>
             <a:r>
-              <a:rPr lang="en-US" smtClean="0"/>
+              <a:rPr lang="en-US"/>
               <a:t>Click to edit Master title style</a:t>
             </a:r>
-            <a:endParaRPr lang="en-US"/>
           </a:p>
         </p:txBody>
       </p:sp>
@@ -5413,38 +5187,37 @@
           <a:p>
             <a:pPr lvl="0"/>
             <a:r>
-              <a:rPr lang="en-US" smtClean="0"/>
+              <a:rPr lang="en-US"/>
               <a:t>Click to edit Master text styles</a:t>
             </a:r>
           </a:p>
           <a:p>
             <a:pPr lvl="1"/>
             <a:r>
-              <a:rPr lang="en-US" smtClean="0"/>
+              <a:rPr lang="en-US"/>
               <a:t>Second level</a:t>
             </a:r>
           </a:p>
           <a:p>
             <a:pPr lvl="2"/>
             <a:r>
-              <a:rPr lang="en-US" smtClean="0"/>
+              <a:rPr lang="en-US"/>
               <a:t>Third level</a:t>
             </a:r>
           </a:p>
           <a:p>
             <a:pPr lvl="3"/>
             <a:r>
-              <a:rPr lang="en-US" smtClean="0"/>
+              <a:rPr lang="en-US"/>
               <a:t>Fourth level</a:t>
             </a:r>
           </a:p>
           <a:p>
             <a:pPr lvl="4"/>
             <a:r>
-              <a:rPr lang="en-US" smtClean="0"/>
+              <a:rPr lang="en-US"/>
               <a:t>Fifth level</a:t>
             </a:r>
-            <a:endParaRPr lang="en-US"/>
           </a:p>
         </p:txBody>
       </p:sp>
@@ -5483,7 +5256,7 @@
           <a:p>
             <a:fld id="{5BCAD085-E8A6-8845-BD4E-CB4CCA059FC4}" type="datetimeFigureOut">
               <a:rPr lang="en-US" smtClean="0"/>
-              <a:t>1/27/13</a:t>
+              <a:t>9/2/2026</a:t>
             </a:fld>
             <a:endParaRPr lang="en-US"/>
           </a:p>
@@ -5842,7 +5615,7 @@
 </file>
 
 <file path=ppt/slides/slide1.xml><?xml version="1.0" encoding="utf-8"?>
-<p:sld xmlns:a="http://schemas.openxmlformats.org/drawingml/2006/main" xmlns:p="http://schemas.openxmlformats.org/presentationml/2006/main" xmlns:r="http://schemas.openxmlformats.org/officeDocument/2006/relationships">
+<p:sld xmlns:a="http://schemas.openxmlformats.org/drawingml/2006/main" xmlns:r="http://schemas.openxmlformats.org/officeDocument/2006/relationships" xmlns:p="http://schemas.openxmlformats.org/presentationml/2006/main">
   <p:cSld>
     <p:bg>
       <p:bgPr>
@@ -5858,7 +5631,14 @@
         <p:cNvGrpSpPr/>
         <p:nvPr/>
       </p:nvGrpSpPr>
-      <p:grpSpPr/>
+      <p:grpSpPr>
+        <a:xfrm>
+          <a:off x="0" y="0"/>
+          <a:ext cx="0" cy="0"/>
+          <a:chOff x="0" y="0"/>
+          <a:chExt cx="0" cy="0"/>
+        </a:xfrm>
+      </p:grpSpPr>
       <p:sp>
         <p:nvSpPr>
           <p:cNvPr id="2" name="TextBox 1"/>
@@ -5868,7 +5648,7 @@
         <p:spPr>
           <a:xfrm>
             <a:off x="822960" y="2011680"/>
-            <a:ext cx="10515600" cy="2377440"/>
+            <a:ext cx="10515600" cy="1508105"/>
           </a:xfrm>
           <a:prstGeom prst="rect">
             <a:avLst/>
@@ -5882,7 +5662,7 @@
           <a:lstStyle/>
           <a:p>
             <a:r>
-              <a:rPr sz="4800" b="1">
+              <a:rPr sz="4800" b="1" dirty="0">
                 <a:solidFill>
                   <a:srgbClr val="FFFFFF"/>
                 </a:solidFill>
@@ -5892,7 +5672,7 @@
           </a:p>
           <a:p>
             <a:r>
-              <a:rPr sz="2400">
+              <a:rPr sz="2400" dirty="0">
                 <a:solidFill>
                   <a:srgbClr val="2E7D5B"/>
                 </a:solidFill>
@@ -5902,23 +5682,18 @@
           </a:p>
           <a:p>
             <a:r>
-              <a:rPr sz="2000">
+              <a:rPr sz="2000" dirty="0" err="1">
                 <a:solidFill>
                   <a:srgbClr val="C9D3E0"/>
                 </a:solidFill>
               </a:rPr>
               <a:t>探索未知空間：GIS、開放資料與空間分析</a:t>
             </a:r>
-          </a:p>
-          <a:p>
-            <a:r>
-              <a:rPr sz="1500" i="1">
-                <a:solidFill>
-                  <a:srgbClr val="C9D3E0"/>
-                </a:solidFill>
-              </a:rPr>
-              <a:t>A 2-Hour Workshop for Architecture Graduates  ·  建築系畢業生兩小時工作坊</a:t>
-            </a:r>
+            <a:endParaRPr sz="2000" dirty="0">
+              <a:solidFill>
+                <a:srgbClr val="C9D3E0"/>
+              </a:solidFill>
+            </a:endParaRPr>
           </a:p>
         </p:txBody>
       </p:sp>
@@ -5931,7 +5706,7 @@
         <p:spPr>
           <a:xfrm>
             <a:off x="457200" y="6446520"/>
-            <a:ext cx="5486400" cy="320040"/>
+            <a:ext cx="6217920" cy="320040"/>
           </a:xfrm>
           <a:prstGeom prst="rect">
             <a:avLst/>
@@ -5947,10 +5722,10 @@
             <a:r>
               <a:rPr sz="1000">
                 <a:solidFill>
-                  <a:srgbClr val="6B6B6B"/>
-                </a:solidFill>
-              </a:rPr>
-              <a:t>Mapping the Unknown · 探索未知空間</a:t>
+                  <a:srgbClr val="FFFFFF"/>
+                </a:solidFill>
+              </a:rPr>
+              <a:t>國立陽明交通大學 建築研究所 資訊建築學研究室 碩士數位組 王誠安</a:t>
             </a:r>
           </a:p>
         </p:txBody>
@@ -5981,10 +5756,10 @@
             <a:r>
               <a:rPr sz="1000">
                 <a:solidFill>
-                  <a:srgbClr val="6B6B6B"/>
-                </a:solidFill>
-              </a:rPr>
-              <a:t>Welcome · 歡迎</a:t>
+                  <a:srgbClr val="FFFFFF"/>
+                </a:solidFill>
+              </a:rPr>
+              <a:t>MSc Cheng-An Wang, GIAAIL @NYCU</a:t>
             </a:r>
           </a:p>
         </p:txBody>
@@ -6015,7 +5790,7 @@
             <a:r>
               <a:rPr sz="1000">
                 <a:solidFill>
-                  <a:srgbClr val="6B6B6B"/>
+                  <a:srgbClr val="FFFFFF"/>
                 </a:solidFill>
               </a:rPr>
               <a:t>1</a:t>
@@ -6032,7 +5807,7 @@
 </file>
 
 <file path=ppt/slides/slide10.xml><?xml version="1.0" encoding="utf-8"?>
-<p:sld xmlns:a="http://schemas.openxmlformats.org/drawingml/2006/main" xmlns:p="http://schemas.openxmlformats.org/presentationml/2006/main" xmlns:r="http://schemas.openxmlformats.org/officeDocument/2006/relationships">
+<p:sld xmlns:a="http://schemas.openxmlformats.org/drawingml/2006/main" xmlns:r="http://schemas.openxmlformats.org/officeDocument/2006/relationships" xmlns:p="http://schemas.openxmlformats.org/presentationml/2006/main">
   <p:cSld>
     <p:bg>
       <p:bgPr>
@@ -6048,7 +5823,14 @@
         <p:cNvGrpSpPr/>
         <p:nvPr/>
       </p:nvGrpSpPr>
-      <p:grpSpPr/>
+      <p:grpSpPr>
+        <a:xfrm>
+          <a:off x="0" y="0"/>
+          <a:ext cx="0" cy="0"/>
+          <a:chOff x="0" y="0"/>
+          <a:chExt cx="0" cy="0"/>
+        </a:xfrm>
+      </p:grpSpPr>
       <p:sp>
         <p:nvSpPr>
           <p:cNvPr id="2" name="TextBox 1"/>
@@ -6166,6 +5948,7 @@
           <a:lstStyle/>
           <a:p>
             <a:pPr algn="ctr"/>
+            <a:endParaRPr/>
           </a:p>
         </p:txBody>
       </p:sp>
@@ -6381,10 +6164,11 @@
           </a:fontRef>
         </p:style>
         <p:txBody>
-          <a:bodyPr rtlCol="0" anchor="ctr" lIns="0" tIns="0"/>
+          <a:bodyPr lIns="0" tIns="0" rtlCol="0" anchor="ctr"/>
           <a:lstStyle/>
           <a:p>
             <a:pPr algn="ctr"/>
+            <a:endParaRPr/>
           </a:p>
         </p:txBody>
       </p:sp>
@@ -6429,6 +6213,7 @@
           <a:lstStyle/>
           <a:p>
             <a:pPr algn="ctr"/>
+            <a:endParaRPr/>
           </a:p>
         </p:txBody>
       </p:sp>
@@ -6596,6 +6381,7 @@
           <a:lstStyle/>
           <a:p>
             <a:pPr algn="ctr"/>
+            <a:endParaRPr/>
           </a:p>
         </p:txBody>
       </p:sp>
@@ -6685,6 +6471,7 @@
           <a:lstStyle/>
           <a:p>
             <a:pPr algn="ctr"/>
+            <a:endParaRPr/>
           </a:p>
         </p:txBody>
       </p:sp>
@@ -6696,8 +6483,8 @@
         </p:nvCxnSpPr>
         <p:spPr>
           <a:xfrm>
-            <a:off x="8214360.0" y="5212080"/>
-            <a:ext cx="0.0" cy="566928"/>
+            <a:off x="8214360" y="5212080"/>
+            <a:ext cx="0" cy="566928"/>
           </a:xfrm>
           <a:prstGeom prst="line">
             <a:avLst/>
@@ -6731,8 +6518,8 @@
         </p:nvCxnSpPr>
         <p:spPr>
           <a:xfrm>
-            <a:off x="8519160.0" y="5212080"/>
-            <a:ext cx="0.0" cy="566928"/>
+            <a:off x="8519160" y="5212080"/>
+            <a:ext cx="0" cy="566928"/>
           </a:xfrm>
           <a:prstGeom prst="line">
             <a:avLst/>
@@ -6766,8 +6553,8 @@
         </p:nvCxnSpPr>
         <p:spPr>
           <a:xfrm>
-            <a:off x="7909560.0" y="5401056.0"/>
-            <a:ext cx="914400.0" cy="0.0"/>
+            <a:off x="7909560" y="5401056"/>
+            <a:ext cx="914400" cy="0"/>
           </a:xfrm>
           <a:prstGeom prst="line">
             <a:avLst/>
@@ -6845,7 +6632,7 @@
         <p:spPr>
           <a:xfrm>
             <a:off x="457200" y="6446520"/>
-            <a:ext cx="5486400" cy="320040"/>
+            <a:ext cx="6217920" cy="320040"/>
           </a:xfrm>
           <a:prstGeom prst="rect">
             <a:avLst/>
@@ -6898,7 +6685,7 @@
                   <a:srgbClr val="6B6B6B"/>
                 </a:solidFill>
               </a:rPr>
-              <a:t>Module 02/8 · 15 min</a:t>
+              <a:t>Module 02/8</a:t>
             </a:r>
           </a:p>
         </p:txBody>
@@ -6946,7 +6733,7 @@
 </file>
 
 <file path=ppt/slides/slide11.xml><?xml version="1.0" encoding="utf-8"?>
-<p:sld xmlns:a="http://schemas.openxmlformats.org/drawingml/2006/main" xmlns:p="http://schemas.openxmlformats.org/presentationml/2006/main" xmlns:r="http://schemas.openxmlformats.org/officeDocument/2006/relationships">
+<p:sld xmlns:a="http://schemas.openxmlformats.org/drawingml/2006/main" xmlns:r="http://schemas.openxmlformats.org/officeDocument/2006/relationships" xmlns:p="http://schemas.openxmlformats.org/presentationml/2006/main">
   <p:cSld>
     <p:bg>
       <p:bgPr>
@@ -6962,7 +6749,14 @@
         <p:cNvGrpSpPr/>
         <p:nvPr/>
       </p:nvGrpSpPr>
-      <p:grpSpPr/>
+      <p:grpSpPr>
+        <a:xfrm>
+          <a:off x="0" y="0"/>
+          <a:ext cx="0" cy="0"/>
+          <a:chOff x="0" y="0"/>
+          <a:chExt cx="0" cy="0"/>
+        </a:xfrm>
+      </p:grpSpPr>
       <p:sp>
         <p:nvSpPr>
           <p:cNvPr id="2" name="TextBox 1"/>
@@ -7080,6 +6874,7 @@
           <a:lstStyle/>
           <a:p>
             <a:pPr algn="ctr"/>
+            <a:endParaRPr/>
           </a:p>
         </p:txBody>
       </p:sp>
@@ -7235,7 +7030,7 @@
         <p:spPr>
           <a:xfrm>
             <a:off x="457200" y="6446520"/>
-            <a:ext cx="5486400" cy="320040"/>
+            <a:ext cx="6217920" cy="320040"/>
           </a:xfrm>
           <a:prstGeom prst="rect">
             <a:avLst/>
@@ -7288,7 +7083,7 @@
                   <a:srgbClr val="6B6B6B"/>
                 </a:solidFill>
               </a:rPr>
-              <a:t>Module 02/8 · 15 min</a:t>
+              <a:t>Module 02/8</a:t>
             </a:r>
           </a:p>
         </p:txBody>
@@ -7336,7 +7131,7 @@
 </file>
 
 <file path=ppt/slides/slide12.xml><?xml version="1.0" encoding="utf-8"?>
-<p:sld xmlns:a="http://schemas.openxmlformats.org/drawingml/2006/main" xmlns:p="http://schemas.openxmlformats.org/presentationml/2006/main" xmlns:r="http://schemas.openxmlformats.org/officeDocument/2006/relationships">
+<p:sld xmlns:a="http://schemas.openxmlformats.org/drawingml/2006/main" xmlns:r="http://schemas.openxmlformats.org/officeDocument/2006/relationships" xmlns:p="http://schemas.openxmlformats.org/presentationml/2006/main">
   <p:cSld>
     <p:bg>
       <p:bgPr>
@@ -7352,7 +7147,14 @@
         <p:cNvGrpSpPr/>
         <p:nvPr/>
       </p:nvGrpSpPr>
-      <p:grpSpPr/>
+      <p:grpSpPr>
+        <a:xfrm>
+          <a:off x="0" y="0"/>
+          <a:ext cx="0" cy="0"/>
+          <a:chOff x="0" y="0"/>
+          <a:chExt cx="0" cy="0"/>
+        </a:xfrm>
+      </p:grpSpPr>
       <p:sp>
         <p:nvSpPr>
           <p:cNvPr id="2" name="TextBox 1"/>
@@ -7437,8 +7239,51 @@
         </p:nvSpPr>
         <p:spPr>
           <a:xfrm>
-            <a:off x="640080" y="4114800"/>
-            <a:ext cx="10881360" cy="457200"/>
+            <a:off x="640080" y="4206240"/>
+            <a:ext cx="10881360" cy="1280160"/>
+          </a:xfrm>
+          <a:prstGeom prst="rect">
+            <a:avLst/>
+          </a:prstGeom>
+          <a:noFill/>
+        </p:spPr>
+        <p:txBody>
+          <a:bodyPr wrap="square">
+            <a:spAutoFit/>
+          </a:bodyPr>
+          <a:lstStyle/>
+          <a:p>
+            <a:r>
+              <a:rPr sz="1600">
+                <a:solidFill>
+                  <a:srgbClr val="FFFFFF"/>
+                </a:solidFill>
+              </a:rPr>
+              <a:t>OpenStreetMap, government open data, APIs — worked backwards from your question.</a:t>
+            </a:r>
+          </a:p>
+          <a:p>
+            <a:r>
+              <a:rPr sz="1300">
+                <a:solidFill>
+                  <a:srgbClr val="C9D3E0"/>
+                </a:solidFill>
+              </a:rPr>
+              <a:t>OpenStreetMap、政府開放資料、API——從問題反推資料。</a:t>
+            </a:r>
+          </a:p>
+        </p:txBody>
+      </p:sp>
+      <p:sp>
+        <p:nvSpPr>
+          <p:cNvPr id="5" name="TextBox 4"/>
+          <p:cNvSpPr txBox="1"/>
+          <p:nvPr/>
+        </p:nvSpPr>
+        <p:spPr>
+          <a:xfrm>
+            <a:off x="457200" y="6446520"/>
+            <a:ext cx="6217920" cy="320040"/>
           </a:xfrm>
           <a:prstGeom prst="rect">
             <a:avLst/>
@@ -7452,55 +7297,12 @@
           <a:lstStyle/>
           <a:p>
             <a:r>
-              <a:rPr sz="1600">
-                <a:solidFill>
-                  <a:srgbClr val="2E7D5B"/>
-                </a:solidFill>
-              </a:rPr>
-              <a:t>15 minutes  ·  15 分鐘</a:t>
-            </a:r>
-          </a:p>
-        </p:txBody>
-      </p:sp>
-      <p:sp>
-        <p:nvSpPr>
-          <p:cNvPr id="5" name="TextBox 4"/>
-          <p:cNvSpPr txBox="1"/>
-          <p:nvPr/>
-        </p:nvSpPr>
-        <p:spPr>
-          <a:xfrm>
-            <a:off x="640080" y="4754880"/>
-            <a:ext cx="10881360" cy="1280160"/>
-          </a:xfrm>
-          <a:prstGeom prst="rect">
-            <a:avLst/>
-          </a:prstGeom>
-          <a:noFill/>
-        </p:spPr>
-        <p:txBody>
-          <a:bodyPr wrap="square">
-            <a:spAutoFit/>
-          </a:bodyPr>
-          <a:lstStyle/>
-          <a:p>
-            <a:r>
-              <a:rPr sz="1600">
-                <a:solidFill>
-                  <a:srgbClr val="FFFFFF"/>
-                </a:solidFill>
-              </a:rPr>
-              <a:t>OpenStreetMap, government open data, APIs — worked backwards from your question.</a:t>
-            </a:r>
-          </a:p>
-          <a:p>
-            <a:r>
-              <a:rPr sz="1300">
-                <a:solidFill>
-                  <a:srgbClr val="C9D3E0"/>
-                </a:solidFill>
-              </a:rPr>
-              <a:t>OpenStreetMap、政府開放資料、API——從問題反推資料。</a:t>
+              <a:rPr sz="1000">
+                <a:solidFill>
+                  <a:srgbClr val="6B6B6B"/>
+                </a:solidFill>
+              </a:rPr>
+              <a:t>Mapping the Unknown · 探索未知空間</a:t>
             </a:r>
           </a:p>
         </p:txBody>
@@ -7508,39 +7310,6 @@
       <p:sp>
         <p:nvSpPr>
           <p:cNvPr id="6" name="TextBox 5"/>
-          <p:cNvSpPr txBox="1"/>
-          <p:nvPr/>
-        </p:nvSpPr>
-        <p:spPr>
-          <a:xfrm>
-            <a:off x="457200" y="6446520"/>
-            <a:ext cx="5486400" cy="320040"/>
-          </a:xfrm>
-          <a:prstGeom prst="rect">
-            <a:avLst/>
-          </a:prstGeom>
-          <a:noFill/>
-        </p:spPr>
-        <p:txBody>
-          <a:bodyPr wrap="none">
-            <a:spAutoFit/>
-          </a:bodyPr>
-          <a:lstStyle/>
-          <a:p>
-            <a:r>
-              <a:rPr sz="1000">
-                <a:solidFill>
-                  <a:srgbClr val="6B6B6B"/>
-                </a:solidFill>
-              </a:rPr>
-              <a:t>Mapping the Unknown · 探索未知空間</a:t>
-            </a:r>
-          </a:p>
-        </p:txBody>
-      </p:sp>
-      <p:sp>
-        <p:nvSpPr>
-          <p:cNvPr id="7" name="TextBox 6"/>
           <p:cNvSpPr txBox="1"/>
           <p:nvPr/>
         </p:nvSpPr>
@@ -7567,14 +7336,14 @@
                   <a:srgbClr val="6B6B6B"/>
                 </a:solidFill>
               </a:rPr>
-              <a:t>Module 03/8 · 15 min</a:t>
-            </a:r>
-          </a:p>
-        </p:txBody>
-      </p:sp>
-      <p:sp>
-        <p:nvSpPr>
-          <p:cNvPr id="8" name="TextBox 7"/>
+              <a:t>Module 03/8</a:t>
+            </a:r>
+          </a:p>
+        </p:txBody>
+      </p:sp>
+      <p:sp>
+        <p:nvSpPr>
+          <p:cNvPr id="7" name="TextBox 6"/>
           <p:cNvSpPr txBox="1"/>
           <p:nvPr/>
         </p:nvSpPr>
@@ -7615,7 +7384,7 @@
 </file>
 
 <file path=ppt/slides/slide13.xml><?xml version="1.0" encoding="utf-8"?>
-<p:sld xmlns:a="http://schemas.openxmlformats.org/drawingml/2006/main" xmlns:p="http://schemas.openxmlformats.org/presentationml/2006/main" xmlns:r="http://schemas.openxmlformats.org/officeDocument/2006/relationships">
+<p:sld xmlns:a="http://schemas.openxmlformats.org/drawingml/2006/main" xmlns:r="http://schemas.openxmlformats.org/officeDocument/2006/relationships" xmlns:p="http://schemas.openxmlformats.org/presentationml/2006/main">
   <p:cSld>
     <p:bg>
       <p:bgPr>
@@ -7631,7 +7400,14 @@
         <p:cNvGrpSpPr/>
         <p:nvPr/>
       </p:nvGrpSpPr>
-      <p:grpSpPr/>
+      <p:grpSpPr>
+        <a:xfrm>
+          <a:off x="0" y="0"/>
+          <a:ext cx="0" cy="0"/>
+          <a:chOff x="0" y="0"/>
+          <a:chExt cx="0" cy="0"/>
+        </a:xfrm>
+      </p:grpSpPr>
       <p:sp>
         <p:nvSpPr>
           <p:cNvPr id="2" name="TextBox 1"/>
@@ -7749,6 +7525,7 @@
           <a:lstStyle/>
           <a:p>
             <a:pPr algn="ctr"/>
+            <a:endParaRPr/>
           </a:p>
         </p:txBody>
       </p:sp>
@@ -7964,7 +7741,7 @@
         <p:spPr>
           <a:xfrm>
             <a:off x="457200" y="6446520"/>
-            <a:ext cx="5486400" cy="320040"/>
+            <a:ext cx="6217920" cy="320040"/>
           </a:xfrm>
           <a:prstGeom prst="rect">
             <a:avLst/>
@@ -8017,7 +7794,7 @@
                   <a:srgbClr val="6B6B6B"/>
                 </a:solidFill>
               </a:rPr>
-              <a:t>Module 03/8 · 15 min</a:t>
+              <a:t>Module 03/8</a:t>
             </a:r>
           </a:p>
         </p:txBody>
@@ -8065,7 +7842,7 @@
 </file>
 
 <file path=ppt/slides/slide14.xml><?xml version="1.0" encoding="utf-8"?>
-<p:sld xmlns:a="http://schemas.openxmlformats.org/drawingml/2006/main" xmlns:p="http://schemas.openxmlformats.org/presentationml/2006/main" xmlns:r="http://schemas.openxmlformats.org/officeDocument/2006/relationships">
+<p:sld xmlns:a="http://schemas.openxmlformats.org/drawingml/2006/main" xmlns:r="http://schemas.openxmlformats.org/officeDocument/2006/relationships" xmlns:p="http://schemas.openxmlformats.org/presentationml/2006/main">
   <p:cSld>
     <p:bg>
       <p:bgPr>
@@ -8081,7 +7858,44 @@
         <p:cNvGrpSpPr/>
         <p:nvPr/>
       </p:nvGrpSpPr>
-      <p:grpSpPr/>
+      <p:grpSpPr>
+        <a:xfrm>
+          <a:off x="0" y="0"/>
+          <a:ext cx="0" cy="0"/>
+          <a:chOff x="0" y="0"/>
+          <a:chExt cx="0" cy="0"/>
+        </a:xfrm>
+      </p:grpSpPr>
+      <p:pic>
+        <p:nvPicPr>
+          <p:cNvPr id="12" name="Picture 11">
+            <a:extLst>
+              <a:ext uri="{FF2B5EF4-FFF2-40B4-BE49-F238E27FC236}">
+                <a16:creationId xmlns:a16="http://schemas.microsoft.com/office/drawing/2014/main" id="{59F21152-C661-53E1-EDDA-B98A460242BC}"/>
+              </a:ext>
+            </a:extLst>
+          </p:cNvPr>
+          <p:cNvPicPr>
+            <a:picLocks noChangeAspect="1"/>
+          </p:cNvPicPr>
+          <p:nvPr/>
+        </p:nvPicPr>
+        <p:blipFill>
+          <a:blip r:embed="rId3"/>
+          <a:stretch>
+            <a:fillRect/>
+          </a:stretch>
+        </p:blipFill>
+        <p:spPr>
+          <a:xfrm>
+            <a:off x="416472" y="5107502"/>
+            <a:ext cx="1734207" cy="1156138"/>
+          </a:xfrm>
+          <a:prstGeom prst="rect">
+            <a:avLst/>
+          </a:prstGeom>
+        </p:spPr>
+      </p:pic>
       <p:sp>
         <p:nvSpPr>
           <p:cNvPr id="2" name="TextBox 1"/>
@@ -8199,6 +8013,7 @@
           <a:lstStyle/>
           <a:p>
             <a:pPr algn="ctr"/>
+            <a:endParaRPr/>
           </a:p>
         </p:txBody>
       </p:sp>
@@ -8230,7 +8045,7 @@
               </a:spcAft>
             </a:pPr>
             <a:r>
-              <a:rPr sz="2000">
+              <a:rPr sz="2000" dirty="0">
                 <a:solidFill>
                   <a:srgbClr val="1B2A4A"/>
                 </a:solidFill>
@@ -8245,13 +8060,26 @@
               </a:spcAft>
             </a:pPr>
             <a:r>
-              <a:rPr sz="1300" i="1">
-                <a:solidFill>
-                  <a:srgbClr val="6B6B6B"/>
-                </a:solidFill>
-              </a:rPr>
-              <a:t>   OpenStreetMap——免費、可編輯、全球性；建築、道路、土地利用、興趣點</a:t>
-            </a:r>
+              <a:rPr sz="1300" i="1" dirty="0">
+                <a:solidFill>
+                  <a:srgbClr val="6B6B6B"/>
+                </a:solidFill>
+              </a:rPr>
+              <a:t>   OpenStreetMap——</a:t>
+            </a:r>
+            <a:r>
+              <a:rPr sz="1300" i="1" dirty="0" err="1">
+                <a:solidFill>
+                  <a:srgbClr val="6B6B6B"/>
+                </a:solidFill>
+              </a:rPr>
+              <a:t>免費、可編輯、全球性；建築、道路、土地利用、興趣點</a:t>
+            </a:r>
+            <a:endParaRPr sz="1300" i="1" dirty="0">
+              <a:solidFill>
+                <a:srgbClr val="6B6B6B"/>
+              </a:solidFill>
+            </a:endParaRPr>
           </a:p>
           <a:p>
             <a:pPr>
@@ -8260,7 +8088,7 @@
               </a:spcAft>
             </a:pPr>
             <a:r>
-              <a:rPr sz="2000">
+              <a:rPr sz="2000" dirty="0">
                 <a:solidFill>
                   <a:srgbClr val="1B2A4A"/>
                 </a:solidFill>
@@ -8275,13 +8103,42 @@
               </a:spcAft>
             </a:pPr>
             <a:r>
-              <a:rPr sz="1300" i="1">
-                <a:solidFill>
-                  <a:srgbClr val="6B6B6B"/>
-                </a:solidFill>
-              </a:rPr>
-              <a:t>   政府開放資料平台——市級／國家級資料集</a:t>
-            </a:r>
+              <a:rPr sz="1300" i="1" dirty="0">
+                <a:solidFill>
+                  <a:srgbClr val="6B6B6B"/>
+                </a:solidFill>
+              </a:rPr>
+              <a:t>   </a:t>
+            </a:r>
+            <a:r>
+              <a:rPr sz="1300" i="1" dirty="0" err="1">
+                <a:solidFill>
+                  <a:srgbClr val="6B6B6B"/>
+                </a:solidFill>
+              </a:rPr>
+              <a:t>政府開放資料平台</a:t>
+            </a:r>
+            <a:r>
+              <a:rPr sz="1300" i="1" dirty="0">
+                <a:solidFill>
+                  <a:srgbClr val="6B6B6B"/>
+                </a:solidFill>
+              </a:rPr>
+              <a:t>——</a:t>
+            </a:r>
+            <a:r>
+              <a:rPr sz="1300" i="1" dirty="0" err="1">
+                <a:solidFill>
+                  <a:srgbClr val="6B6B6B"/>
+                </a:solidFill>
+              </a:rPr>
+              <a:t>市級／國家級資料集</a:t>
+            </a:r>
+            <a:endParaRPr sz="1300" i="1" dirty="0">
+              <a:solidFill>
+                <a:srgbClr val="6B6B6B"/>
+              </a:solidFill>
+            </a:endParaRPr>
           </a:p>
           <a:p>
             <a:pPr>
@@ -8290,7 +8147,7 @@
               </a:spcAft>
             </a:pPr>
             <a:r>
-              <a:rPr sz="2000">
+              <a:rPr sz="2000" dirty="0">
                 <a:solidFill>
                   <a:srgbClr val="1B2A4A"/>
                 </a:solidFill>
@@ -8305,13 +8162,26 @@
               </a:spcAft>
             </a:pPr>
             <a:r>
-              <a:rPr sz="1300" i="1">
-                <a:solidFill>
-                  <a:srgbClr val="6B6B6B"/>
-                </a:solidFill>
-              </a:rPr>
-              <a:t>   API——以程式化方式存取即時或大型資料集</a:t>
-            </a:r>
+              <a:rPr sz="1300" i="1" dirty="0">
+                <a:solidFill>
+                  <a:srgbClr val="6B6B6B"/>
+                </a:solidFill>
+              </a:rPr>
+              <a:t>   API——</a:t>
+            </a:r>
+            <a:r>
+              <a:rPr sz="1300" i="1" dirty="0" err="1">
+                <a:solidFill>
+                  <a:srgbClr val="6B6B6B"/>
+                </a:solidFill>
+              </a:rPr>
+              <a:t>以程式化方式存取即時或大型資料集</a:t>
+            </a:r>
+            <a:endParaRPr sz="1300" i="1" dirty="0">
+              <a:solidFill>
+                <a:srgbClr val="6B6B6B"/>
+              </a:solidFill>
+            </a:endParaRPr>
           </a:p>
           <a:p>
             <a:pPr>
@@ -8320,7 +8190,7 @@
               </a:spcAft>
             </a:pPr>
             <a:r>
-              <a:rPr sz="2000">
+              <a:rPr sz="2000" dirty="0">
                 <a:solidFill>
                   <a:srgbClr val="1B2A4A"/>
                 </a:solidFill>
@@ -8335,13 +8205,26 @@
               </a:spcAft>
             </a:pPr>
             <a:r>
-              <a:rPr sz="1300" i="1">
-                <a:solidFill>
-                  <a:srgbClr val="6B6B6B"/>
-                </a:solidFill>
-              </a:rPr>
-              <a:t>   環境、交通與氣象資料來源</a:t>
-            </a:r>
+              <a:rPr sz="1300" i="1" dirty="0">
+                <a:solidFill>
+                  <a:srgbClr val="6B6B6B"/>
+                </a:solidFill>
+              </a:rPr>
+              <a:t>   </a:t>
+            </a:r>
+            <a:r>
+              <a:rPr sz="1300" i="1" dirty="0" err="1">
+                <a:solidFill>
+                  <a:srgbClr val="6B6B6B"/>
+                </a:solidFill>
+              </a:rPr>
+              <a:t>環境、交通與氣象資料來源</a:t>
+            </a:r>
+            <a:endParaRPr sz="1300" i="1" dirty="0">
+              <a:solidFill>
+                <a:srgbClr val="6B6B6B"/>
+              </a:solidFill>
+            </a:endParaRPr>
           </a:p>
         </p:txBody>
       </p:sp>
@@ -8354,7 +8237,7 @@
         <p:spPr>
           <a:xfrm>
             <a:off x="457200" y="6446520"/>
-            <a:ext cx="5486400" cy="320040"/>
+            <a:ext cx="6217920" cy="320040"/>
           </a:xfrm>
           <a:prstGeom prst="rect">
             <a:avLst/>
@@ -8407,7 +8290,7 @@
                   <a:srgbClr val="6B6B6B"/>
                 </a:solidFill>
               </a:rPr>
-              <a:t>Module 03/8 · 15 min</a:t>
+              <a:t>Module 03/8</a:t>
             </a:r>
           </a:p>
         </p:txBody>
@@ -8446,6 +8329,127 @@
           </a:p>
         </p:txBody>
       </p:sp>
+      <p:pic>
+        <p:nvPicPr>
+          <p:cNvPr id="10" name="Picture 9">
+            <a:extLst>
+              <a:ext uri="{FF2B5EF4-FFF2-40B4-BE49-F238E27FC236}">
+                <a16:creationId xmlns:a16="http://schemas.microsoft.com/office/drawing/2014/main" id="{DFC88D31-3C9A-A5D4-30AE-EEF76E0C5F01}"/>
+              </a:ext>
+            </a:extLst>
+          </p:cNvPr>
+          <p:cNvPicPr>
+            <a:picLocks noChangeAspect="1"/>
+          </p:cNvPicPr>
+          <p:nvPr/>
+        </p:nvPicPr>
+        <p:blipFill>
+          <a:blip r:embed="rId4"/>
+          <a:stretch>
+            <a:fillRect/>
+          </a:stretch>
+        </p:blipFill>
+        <p:spPr>
+          <a:xfrm>
+            <a:off x="2319994" y="5437921"/>
+            <a:ext cx="1571625" cy="495300"/>
+          </a:xfrm>
+          <a:prstGeom prst="rect">
+            <a:avLst/>
+          </a:prstGeom>
+        </p:spPr>
+      </p:pic>
+      <p:pic>
+        <p:nvPicPr>
+          <p:cNvPr id="13" name="Picture 12" descr="首頁｜ 政府資料開放平臺">
+            <a:extLst>
+              <a:ext uri="{FF2B5EF4-FFF2-40B4-BE49-F238E27FC236}">
+                <a16:creationId xmlns:a16="http://schemas.microsoft.com/office/drawing/2014/main" id="{25AFD6F9-89E2-2D71-8371-B5634CF8903D}"/>
+              </a:ext>
+            </a:extLst>
+          </p:cNvPr>
+          <p:cNvPicPr>
+            <a:picLocks noChangeAspect="1"/>
+          </p:cNvPicPr>
+          <p:nvPr/>
+        </p:nvPicPr>
+        <p:blipFill>
+          <a:blip r:embed="rId5"/>
+          <a:srcRect l="16200" t="31015" r="14908" b="32619"/>
+          <a:stretch>
+            <a:fillRect/>
+          </a:stretch>
+        </p:blipFill>
+        <p:spPr>
+          <a:xfrm>
+            <a:off x="4214649" y="5374860"/>
+            <a:ext cx="2222938" cy="616038"/>
+          </a:xfrm>
+          <a:prstGeom prst="rect">
+            <a:avLst/>
+          </a:prstGeom>
+        </p:spPr>
+      </p:pic>
+      <p:pic>
+        <p:nvPicPr>
+          <p:cNvPr id="15" name="Picture 14">
+            <a:extLst>
+              <a:ext uri="{FF2B5EF4-FFF2-40B4-BE49-F238E27FC236}">
+                <a16:creationId xmlns:a16="http://schemas.microsoft.com/office/drawing/2014/main" id="{6DCBB003-0D54-F9F7-F765-578314FE5E56}"/>
+              </a:ext>
+            </a:extLst>
+          </p:cNvPr>
+          <p:cNvPicPr>
+            <a:picLocks noChangeAspect="1"/>
+          </p:cNvPicPr>
+          <p:nvPr/>
+        </p:nvPicPr>
+        <p:blipFill>
+          <a:blip r:embed="rId6"/>
+          <a:stretch>
+            <a:fillRect/>
+          </a:stretch>
+        </p:blipFill>
+        <p:spPr>
+          <a:xfrm>
+            <a:off x="6675120" y="5432666"/>
+            <a:ext cx="2190750" cy="457200"/>
+          </a:xfrm>
+          <a:prstGeom prst="rect">
+            <a:avLst/>
+          </a:prstGeom>
+        </p:spPr>
+      </p:pic>
+      <p:pic>
+        <p:nvPicPr>
+          <p:cNvPr id="16" name="Picture 15" descr="電電數位| 專注於為永續生活愛好者提供智慧的出行解決方案充電地圖APP">
+            <a:extLst>
+              <a:ext uri="{FF2B5EF4-FFF2-40B4-BE49-F238E27FC236}">
+                <a16:creationId xmlns:a16="http://schemas.microsoft.com/office/drawing/2014/main" id="{46C1437D-8F96-4E98-5DC1-7A17980F9310}"/>
+              </a:ext>
+            </a:extLst>
+          </p:cNvPr>
+          <p:cNvPicPr>
+            <a:picLocks noChangeAspect="1"/>
+          </p:cNvPicPr>
+          <p:nvPr/>
+        </p:nvPicPr>
+        <p:blipFill>
+          <a:blip r:embed="rId7"/>
+          <a:stretch>
+            <a:fillRect/>
+          </a:stretch>
+        </p:blipFill>
+        <p:spPr>
+          <a:xfrm>
+            <a:off x="9275836" y="5154404"/>
+            <a:ext cx="2222938" cy="899086"/>
+          </a:xfrm>
+          <a:prstGeom prst="rect">
+            <a:avLst/>
+          </a:prstGeom>
+        </p:spPr>
+      </p:pic>
     </p:spTree>
   </p:cSld>
   <p:clrMapOvr>
@@ -8455,7 +8459,7 @@
 </file>
 
 <file path=ppt/slides/slide15.xml><?xml version="1.0" encoding="utf-8"?>
-<p:sld xmlns:a="http://schemas.openxmlformats.org/drawingml/2006/main" xmlns:p="http://schemas.openxmlformats.org/presentationml/2006/main" xmlns:r="http://schemas.openxmlformats.org/officeDocument/2006/relationships">
+<p:sld xmlns:a="http://schemas.openxmlformats.org/drawingml/2006/main" xmlns:r="http://schemas.openxmlformats.org/officeDocument/2006/relationships" xmlns:p="http://schemas.openxmlformats.org/presentationml/2006/main">
   <p:cSld>
     <p:bg>
       <p:bgPr>
@@ -8471,7 +8475,14 @@
         <p:cNvGrpSpPr/>
         <p:nvPr/>
       </p:nvGrpSpPr>
-      <p:grpSpPr/>
+      <p:grpSpPr>
+        <a:xfrm>
+          <a:off x="0" y="0"/>
+          <a:ext cx="0" cy="0"/>
+          <a:chOff x="0" y="0"/>
+          <a:chExt cx="0" cy="0"/>
+        </a:xfrm>
+      </p:grpSpPr>
       <p:sp>
         <p:nvSpPr>
           <p:cNvPr id="2" name="TextBox 1"/>
@@ -8556,8 +8567,51 @@
         </p:nvSpPr>
         <p:spPr>
           <a:xfrm>
-            <a:off x="640080" y="4114800"/>
-            <a:ext cx="10881360" cy="457200"/>
+            <a:off x="640080" y="4206240"/>
+            <a:ext cx="10881360" cy="1280160"/>
+          </a:xfrm>
+          <a:prstGeom prst="rect">
+            <a:avLst/>
+          </a:prstGeom>
+          <a:noFill/>
+        </p:spPr>
+        <p:txBody>
+          <a:bodyPr wrap="square">
+            <a:spAutoFit/>
+          </a:bodyPr>
+          <a:lstStyle/>
+          <a:p>
+            <a:r>
+              <a:rPr sz="1600">
+                <a:solidFill>
+                  <a:srgbClr val="FFFFFF"/>
+                </a:solidFill>
+              </a:rPr>
+              <a:t>Load, inspect, filter, buffer, spatial join, intersect, symbolize.</a:t>
+            </a:r>
+          </a:p>
+          <a:p>
+            <a:r>
+              <a:rPr sz="1300">
+                <a:solidFill>
+                  <a:srgbClr val="C9D3E0"/>
+                </a:solidFill>
+              </a:rPr>
+              <a:t>載入、檢視、篩選、緩衝區、空間 join、交集、符號化。</a:t>
+            </a:r>
+          </a:p>
+        </p:txBody>
+      </p:sp>
+      <p:sp>
+        <p:nvSpPr>
+          <p:cNvPr id="5" name="TextBox 4"/>
+          <p:cNvSpPr txBox="1"/>
+          <p:nvPr/>
+        </p:nvSpPr>
+        <p:spPr>
+          <a:xfrm>
+            <a:off x="457200" y="6446520"/>
+            <a:ext cx="6217920" cy="320040"/>
           </a:xfrm>
           <a:prstGeom prst="rect">
             <a:avLst/>
@@ -8571,55 +8625,12 @@
           <a:lstStyle/>
           <a:p>
             <a:r>
-              <a:rPr sz="1600">
-                <a:solidFill>
-                  <a:srgbClr val="2E7D5B"/>
-                </a:solidFill>
-              </a:rPr>
-              <a:t>20 minutes  ·  20 分鐘</a:t>
-            </a:r>
-          </a:p>
-        </p:txBody>
-      </p:sp>
-      <p:sp>
-        <p:nvSpPr>
-          <p:cNvPr id="5" name="TextBox 4"/>
-          <p:cNvSpPr txBox="1"/>
-          <p:nvPr/>
-        </p:nvSpPr>
-        <p:spPr>
-          <a:xfrm>
-            <a:off x="640080" y="4754880"/>
-            <a:ext cx="10881360" cy="1280160"/>
-          </a:xfrm>
-          <a:prstGeom prst="rect">
-            <a:avLst/>
-          </a:prstGeom>
-          <a:noFill/>
-        </p:spPr>
-        <p:txBody>
-          <a:bodyPr wrap="square">
-            <a:spAutoFit/>
-          </a:bodyPr>
-          <a:lstStyle/>
-          <a:p>
-            <a:r>
-              <a:rPr sz="1600">
-                <a:solidFill>
-                  <a:srgbClr val="FFFFFF"/>
-                </a:solidFill>
-              </a:rPr>
-              <a:t>Load, inspect, filter, buffer, spatial join, intersect, symbolize.</a:t>
-            </a:r>
-          </a:p>
-          <a:p>
-            <a:r>
-              <a:rPr sz="1300">
-                <a:solidFill>
-                  <a:srgbClr val="C9D3E0"/>
-                </a:solidFill>
-              </a:rPr>
-              <a:t>載入、檢視、篩選、緩衝區、空間 join、交集、符號化。</a:t>
+              <a:rPr sz="1000">
+                <a:solidFill>
+                  <a:srgbClr val="6B6B6B"/>
+                </a:solidFill>
+              </a:rPr>
+              <a:t>Mapping the Unknown · 探索未知空間</a:t>
             </a:r>
           </a:p>
         </p:txBody>
@@ -8627,39 +8638,6 @@
       <p:sp>
         <p:nvSpPr>
           <p:cNvPr id="6" name="TextBox 5"/>
-          <p:cNvSpPr txBox="1"/>
-          <p:nvPr/>
-        </p:nvSpPr>
-        <p:spPr>
-          <a:xfrm>
-            <a:off x="457200" y="6446520"/>
-            <a:ext cx="5486400" cy="320040"/>
-          </a:xfrm>
-          <a:prstGeom prst="rect">
-            <a:avLst/>
-          </a:prstGeom>
-          <a:noFill/>
-        </p:spPr>
-        <p:txBody>
-          <a:bodyPr wrap="none">
-            <a:spAutoFit/>
-          </a:bodyPr>
-          <a:lstStyle/>
-          <a:p>
-            <a:r>
-              <a:rPr sz="1000">
-                <a:solidFill>
-                  <a:srgbClr val="6B6B6B"/>
-                </a:solidFill>
-              </a:rPr>
-              <a:t>Mapping the Unknown · 探索未知空間</a:t>
-            </a:r>
-          </a:p>
-        </p:txBody>
-      </p:sp>
-      <p:sp>
-        <p:nvSpPr>
-          <p:cNvPr id="7" name="TextBox 6"/>
           <p:cNvSpPr txBox="1"/>
           <p:nvPr/>
         </p:nvSpPr>
@@ -8686,14 +8664,14 @@
                   <a:srgbClr val="6B6B6B"/>
                 </a:solidFill>
               </a:rPr>
-              <a:t>Module 04/8 · 20 min</a:t>
-            </a:r>
-          </a:p>
-        </p:txBody>
-      </p:sp>
-      <p:sp>
-        <p:nvSpPr>
-          <p:cNvPr id="8" name="TextBox 7"/>
+              <a:t>Module 04/8</a:t>
+            </a:r>
+          </a:p>
+        </p:txBody>
+      </p:sp>
+      <p:sp>
+        <p:nvSpPr>
+          <p:cNvPr id="7" name="TextBox 6"/>
           <p:cNvSpPr txBox="1"/>
           <p:nvPr/>
         </p:nvSpPr>
@@ -8734,7 +8712,7 @@
 </file>
 
 <file path=ppt/slides/slide16.xml><?xml version="1.0" encoding="utf-8"?>
-<p:sld xmlns:a="http://schemas.openxmlformats.org/drawingml/2006/main" xmlns:p="http://schemas.openxmlformats.org/presentationml/2006/main" xmlns:r="http://schemas.openxmlformats.org/officeDocument/2006/relationships">
+<p:sld xmlns:a="http://schemas.openxmlformats.org/drawingml/2006/main" xmlns:r="http://schemas.openxmlformats.org/officeDocument/2006/relationships" xmlns:p="http://schemas.openxmlformats.org/presentationml/2006/main">
   <p:cSld>
     <p:bg>
       <p:bgPr>
@@ -8750,7 +8728,14 @@
         <p:cNvGrpSpPr/>
         <p:nvPr/>
       </p:nvGrpSpPr>
-      <p:grpSpPr/>
+      <p:grpSpPr>
+        <a:xfrm>
+          <a:off x="0" y="0"/>
+          <a:ext cx="0" cy="0"/>
+          <a:chOff x="0" y="0"/>
+          <a:chExt cx="0" cy="0"/>
+        </a:xfrm>
+      </p:grpSpPr>
       <p:sp>
         <p:nvSpPr>
           <p:cNvPr id="2" name="TextBox 1"/>
@@ -8868,6 +8853,7 @@
           <a:lstStyle/>
           <a:p>
             <a:pPr algn="ctr"/>
+            <a:endParaRPr/>
           </a:p>
         </p:txBody>
       </p:sp>
@@ -9023,7 +9009,7 @@
         <p:spPr>
           <a:xfrm>
             <a:off x="457200" y="6446520"/>
-            <a:ext cx="5486400" cy="320040"/>
+            <a:ext cx="6217920" cy="320040"/>
           </a:xfrm>
           <a:prstGeom prst="rect">
             <a:avLst/>
@@ -9076,7 +9062,7 @@
                   <a:srgbClr val="6B6B6B"/>
                 </a:solidFill>
               </a:rPr>
-              <a:t>Module 04/8 · 20 min</a:t>
+              <a:t>Module 04/8</a:t>
             </a:r>
           </a:p>
         </p:txBody>
@@ -9115,6 +9101,36 @@
           </a:p>
         </p:txBody>
       </p:sp>
+      <p:pic>
+        <p:nvPicPr>
+          <p:cNvPr id="9" name="Picture 8">
+            <a:extLst>
+              <a:ext uri="{FF2B5EF4-FFF2-40B4-BE49-F238E27FC236}">
+                <a16:creationId xmlns:a16="http://schemas.microsoft.com/office/drawing/2014/main" id="{A886649D-314C-45E8-93D8-E29E71FE5824}"/>
+              </a:ext>
+            </a:extLst>
+          </p:cNvPr>
+          <p:cNvPicPr>
+            <a:picLocks noChangeAspect="1"/>
+          </p:cNvPicPr>
+          <p:nvPr/>
+        </p:nvPicPr>
+        <p:blipFill>
+          <a:blip r:embed="rId3"/>
+          <a:stretch>
+            <a:fillRect/>
+          </a:stretch>
+        </p:blipFill>
+        <p:spPr>
+          <a:xfrm>
+            <a:off x="8197547" y="3315981"/>
+            <a:ext cx="3415333" cy="2618199"/>
+          </a:xfrm>
+          <a:prstGeom prst="rect">
+            <a:avLst/>
+          </a:prstGeom>
+        </p:spPr>
+      </p:pic>
     </p:spTree>
   </p:cSld>
   <p:clrMapOvr>
@@ -9124,7 +9140,7 @@
 </file>
 
 <file path=ppt/slides/slide17.xml><?xml version="1.0" encoding="utf-8"?>
-<p:sld xmlns:a="http://schemas.openxmlformats.org/drawingml/2006/main" xmlns:p="http://schemas.openxmlformats.org/presentationml/2006/main" xmlns:r="http://schemas.openxmlformats.org/officeDocument/2006/relationships">
+<p:sld xmlns:a="http://schemas.openxmlformats.org/drawingml/2006/main" xmlns:r="http://schemas.openxmlformats.org/officeDocument/2006/relationships" xmlns:p="http://schemas.openxmlformats.org/presentationml/2006/main">
   <p:cSld>
     <p:bg>
       <p:bgPr>
@@ -9140,7 +9156,14 @@
         <p:cNvGrpSpPr/>
         <p:nvPr/>
       </p:nvGrpSpPr>
-      <p:grpSpPr/>
+      <p:grpSpPr>
+        <a:xfrm>
+          <a:off x="0" y="0"/>
+          <a:ext cx="0" cy="0"/>
+          <a:chOff x="0" y="0"/>
+          <a:chExt cx="0" cy="0"/>
+        </a:xfrm>
+      </p:grpSpPr>
       <p:sp>
         <p:nvSpPr>
           <p:cNvPr id="2" name="TextBox 1"/>
@@ -9258,6 +9281,7 @@
           <a:lstStyle/>
           <a:p>
             <a:pPr algn="ctr"/>
+            <a:endParaRPr/>
           </a:p>
         </p:txBody>
       </p:sp>
@@ -9289,7 +9313,7 @@
               </a:spcAft>
             </a:pPr>
             <a:r>
-              <a:rPr sz="2000">
+              <a:rPr sz="2000" dirty="0">
                 <a:solidFill>
                   <a:srgbClr val="1B2A4A"/>
                 </a:solidFill>
@@ -9304,13 +9328,42 @@
               </a:spcAft>
             </a:pPr>
             <a:r>
-              <a:rPr sz="1300" i="1">
-                <a:solidFill>
-                  <a:srgbClr val="6B6B6B"/>
-                </a:solidFill>
-              </a:rPr>
-              <a:t>   4. 篩選——篩出與問題相關的要素</a:t>
-            </a:r>
+              <a:rPr sz="1300" i="1" dirty="0">
+                <a:solidFill>
+                  <a:srgbClr val="6B6B6B"/>
+                </a:solidFill>
+              </a:rPr>
+              <a:t>   4. </a:t>
+            </a:r>
+            <a:r>
+              <a:rPr sz="1300" i="1" dirty="0" err="1">
+                <a:solidFill>
+                  <a:srgbClr val="6B6B6B"/>
+                </a:solidFill>
+              </a:rPr>
+              <a:t>篩選</a:t>
+            </a:r>
+            <a:r>
+              <a:rPr sz="1300" i="1" dirty="0">
+                <a:solidFill>
+                  <a:srgbClr val="6B6B6B"/>
+                </a:solidFill>
+              </a:rPr>
+              <a:t>——</a:t>
+            </a:r>
+            <a:r>
+              <a:rPr sz="1300" i="1" dirty="0" err="1">
+                <a:solidFill>
+                  <a:srgbClr val="6B6B6B"/>
+                </a:solidFill>
+              </a:rPr>
+              <a:t>篩出與問題相關的要素</a:t>
+            </a:r>
+            <a:endParaRPr sz="1300" i="1" dirty="0">
+              <a:solidFill>
+                <a:srgbClr val="6B6B6B"/>
+              </a:solidFill>
+            </a:endParaRPr>
           </a:p>
           <a:p>
             <a:pPr>
@@ -9319,7 +9372,7 @@
               </a:spcAft>
             </a:pPr>
             <a:r>
-              <a:rPr sz="2000">
+              <a:rPr sz="2000" dirty="0">
                 <a:solidFill>
                   <a:srgbClr val="1B2A4A"/>
                 </a:solidFill>
@@ -9334,13 +9387,74 @@
               </a:spcAft>
             </a:pPr>
             <a:r>
-              <a:rPr sz="1300" i="1">
-                <a:solidFill>
-                  <a:srgbClr val="6B6B6B"/>
-                </a:solidFill>
-              </a:rPr>
-              <a:t>   5. 緩衝區——將距離問題（「10 公尺內」）轉換為形狀</a:t>
-            </a:r>
+              <a:rPr sz="1300" i="1" dirty="0">
+                <a:solidFill>
+                  <a:srgbClr val="6B6B6B"/>
+                </a:solidFill>
+              </a:rPr>
+              <a:t>   5. </a:t>
+            </a:r>
+            <a:r>
+              <a:rPr sz="1300" i="1" dirty="0" err="1">
+                <a:solidFill>
+                  <a:srgbClr val="6B6B6B"/>
+                </a:solidFill>
+              </a:rPr>
+              <a:t>緩衝區</a:t>
+            </a:r>
+            <a:r>
+              <a:rPr sz="1300" i="1" dirty="0">
+                <a:solidFill>
+                  <a:srgbClr val="6B6B6B"/>
+                </a:solidFill>
+              </a:rPr>
+              <a:t>——</a:t>
+            </a:r>
+            <a:r>
+              <a:rPr sz="1300" i="1" dirty="0" err="1">
+                <a:solidFill>
+                  <a:srgbClr val="6B6B6B"/>
+                </a:solidFill>
+              </a:rPr>
+              <a:t>將距離問題</a:t>
+            </a:r>
+            <a:r>
+              <a:rPr sz="1300" i="1" dirty="0">
+                <a:solidFill>
+                  <a:srgbClr val="6B6B6B"/>
+                </a:solidFill>
+              </a:rPr>
+              <a:t>（「10 </a:t>
+            </a:r>
+            <a:r>
+              <a:rPr sz="1300" i="1" dirty="0" err="1">
+                <a:solidFill>
+                  <a:srgbClr val="6B6B6B"/>
+                </a:solidFill>
+              </a:rPr>
+              <a:t>公尺內</a:t>
+            </a:r>
+            <a:r>
+              <a:rPr sz="1300" i="1" dirty="0">
+                <a:solidFill>
+                  <a:srgbClr val="6B6B6B"/>
+                </a:solidFill>
+              </a:rPr>
+              <a:t>」）</a:t>
+            </a:r>
+            <a:r>
+              <a:rPr sz="1300" i="1" dirty="0" err="1">
+                <a:solidFill>
+                  <a:srgbClr val="6B6B6B"/>
+                </a:solidFill>
+              </a:rPr>
+              <a:t>轉換為形狀</a:t>
+            </a:r>
+            <a:endParaRPr sz="1300" i="1" dirty="0">
+              <a:solidFill>
+                <a:srgbClr val="6B6B6B"/>
+              </a:solidFill>
+            </a:endParaRPr>
           </a:p>
           <a:p>
             <a:pPr>
@@ -9349,7 +9463,7 @@
               </a:spcAft>
             </a:pPr>
             <a:r>
-              <a:rPr sz="2000">
+              <a:rPr sz="2000" dirty="0">
                 <a:solidFill>
                   <a:srgbClr val="1B2A4A"/>
                 </a:solidFill>
@@ -9364,13 +9478,42 @@
               </a:spcAft>
             </a:pPr>
             <a:r>
-              <a:rPr sz="1300" i="1">
-                <a:solidFill>
-                  <a:srgbClr val="6B6B6B"/>
-                </a:solidFill>
-              </a:rPr>
-              <a:t>   6. 空間 Join——依位置將一圖層的屬性附加到另一圖層</a:t>
-            </a:r>
+              <a:rPr sz="1300" i="1" dirty="0">
+                <a:solidFill>
+                  <a:srgbClr val="6B6B6B"/>
+                </a:solidFill>
+              </a:rPr>
+              <a:t>   6. </a:t>
+            </a:r>
+            <a:r>
+              <a:rPr sz="1300" i="1" dirty="0" err="1">
+                <a:solidFill>
+                  <a:srgbClr val="6B6B6B"/>
+                </a:solidFill>
+              </a:rPr>
+              <a:t>空間</a:t>
+            </a:r>
+            <a:r>
+              <a:rPr sz="1300" i="1" dirty="0">
+                <a:solidFill>
+                  <a:srgbClr val="6B6B6B"/>
+                </a:solidFill>
+              </a:rPr>
+              <a:t> Join——</a:t>
+            </a:r>
+            <a:r>
+              <a:rPr sz="1300" i="1" dirty="0" err="1">
+                <a:solidFill>
+                  <a:srgbClr val="6B6B6B"/>
+                </a:solidFill>
+              </a:rPr>
+              <a:t>依位置將一圖層的屬性附加到另一圖層</a:t>
+            </a:r>
+            <a:endParaRPr sz="1300" i="1" dirty="0">
+              <a:solidFill>
+                <a:srgbClr val="6B6B6B"/>
+              </a:solidFill>
+            </a:endParaRPr>
           </a:p>
           <a:p>
             <a:pPr>
@@ -9379,7 +9522,7 @@
               </a:spcAft>
             </a:pPr>
             <a:r>
-              <a:rPr sz="2000">
+              <a:rPr sz="2000" dirty="0">
                 <a:solidFill>
                   <a:srgbClr val="1B2A4A"/>
                 </a:solidFill>
@@ -9394,13 +9537,42 @@
               </a:spcAft>
             </a:pPr>
             <a:r>
-              <a:rPr sz="1300" i="1">
-                <a:solidFill>
-                  <a:srgbClr val="6B6B6B"/>
-                </a:solidFill>
-              </a:rPr>
-              <a:t>   7. 交集——找出兩圖層間精確的重疊範圍</a:t>
-            </a:r>
+              <a:rPr sz="1300" i="1" dirty="0">
+                <a:solidFill>
+                  <a:srgbClr val="6B6B6B"/>
+                </a:solidFill>
+              </a:rPr>
+              <a:t>   7. </a:t>
+            </a:r>
+            <a:r>
+              <a:rPr sz="1300" i="1" dirty="0" err="1">
+                <a:solidFill>
+                  <a:srgbClr val="6B6B6B"/>
+                </a:solidFill>
+              </a:rPr>
+              <a:t>交集</a:t>
+            </a:r>
+            <a:r>
+              <a:rPr sz="1300" i="1" dirty="0">
+                <a:solidFill>
+                  <a:srgbClr val="6B6B6B"/>
+                </a:solidFill>
+              </a:rPr>
+              <a:t>——</a:t>
+            </a:r>
+            <a:r>
+              <a:rPr sz="1300" i="1" dirty="0" err="1">
+                <a:solidFill>
+                  <a:srgbClr val="6B6B6B"/>
+                </a:solidFill>
+              </a:rPr>
+              <a:t>找出兩圖層間精確的重疊範圍</a:t>
+            </a:r>
+            <a:endParaRPr sz="1300" i="1" dirty="0">
+              <a:solidFill>
+                <a:srgbClr val="6B6B6B"/>
+              </a:solidFill>
+            </a:endParaRPr>
           </a:p>
         </p:txBody>
       </p:sp>
@@ -9413,7 +9585,7 @@
         <p:spPr>
           <a:xfrm>
             <a:off x="457200" y="6446520"/>
-            <a:ext cx="5486400" cy="320040"/>
+            <a:ext cx="6217920" cy="320040"/>
           </a:xfrm>
           <a:prstGeom prst="rect">
             <a:avLst/>
@@ -9466,7 +9638,7 @@
                   <a:srgbClr val="6B6B6B"/>
                 </a:solidFill>
               </a:rPr>
-              <a:t>Module 04/8 · 20 min</a:t>
+              <a:t>Module 04/8</a:t>
             </a:r>
           </a:p>
         </p:txBody>
@@ -9505,6 +9677,68 @@
           </a:p>
         </p:txBody>
       </p:sp>
+      <p:pic>
+        <p:nvPicPr>
+          <p:cNvPr id="9" name="Picture 8" descr="Geo-processing Tools in ArcMap ┆ Buffer_Clip_Merge_Intersect_Dissolve_Union  in ArcGIS">
+            <a:extLst>
+              <a:ext uri="{FF2B5EF4-FFF2-40B4-BE49-F238E27FC236}">
+                <a16:creationId xmlns:a16="http://schemas.microsoft.com/office/drawing/2014/main" id="{643FF35E-0D3A-8357-569E-394C6B5A1D00}"/>
+              </a:ext>
+            </a:extLst>
+          </p:cNvPr>
+          <p:cNvPicPr>
+            <a:picLocks noChangeAspect="1"/>
+          </p:cNvPicPr>
+          <p:nvPr/>
+        </p:nvPicPr>
+        <p:blipFill>
+          <a:blip r:embed="rId3"/>
+          <a:srcRect t="2834" b="2819"/>
+          <a:stretch>
+            <a:fillRect/>
+          </a:stretch>
+        </p:blipFill>
+        <p:spPr>
+          <a:xfrm>
+            <a:off x="7431495" y="4139400"/>
+            <a:ext cx="4211865" cy="2236000"/>
+          </a:xfrm>
+          <a:prstGeom prst="rect">
+            <a:avLst/>
+          </a:prstGeom>
+        </p:spPr>
+      </p:pic>
+      <p:pic>
+        <p:nvPicPr>
+          <p:cNvPr id="10" name="Picture 9" descr="Spatial operation functions for ST_Geometry—ArcMap | Documentation">
+            <a:extLst>
+              <a:ext uri="{FF2B5EF4-FFF2-40B4-BE49-F238E27FC236}">
+                <a16:creationId xmlns:a16="http://schemas.microsoft.com/office/drawing/2014/main" id="{17093023-64E5-7CBF-2FF2-662EC483559B}"/>
+              </a:ext>
+            </a:extLst>
+          </p:cNvPr>
+          <p:cNvPicPr>
+            <a:picLocks noChangeAspect="1"/>
+          </p:cNvPicPr>
+          <p:nvPr/>
+        </p:nvPicPr>
+        <p:blipFill>
+          <a:blip r:embed="rId4"/>
+          <a:srcRect l="2675" t="2133" r="2554" b="4056"/>
+          <a:stretch>
+            <a:fillRect/>
+          </a:stretch>
+        </p:blipFill>
+        <p:spPr>
+          <a:xfrm>
+            <a:off x="9159892" y="1854200"/>
+            <a:ext cx="2317406" cy="2173440"/>
+          </a:xfrm>
+          <a:prstGeom prst="rect">
+            <a:avLst/>
+          </a:prstGeom>
+        </p:spPr>
+      </p:pic>
     </p:spTree>
   </p:cSld>
   <p:clrMapOvr>
@@ -9514,7 +9748,7 @@
 </file>
 
 <file path=ppt/slides/slide18.xml><?xml version="1.0" encoding="utf-8"?>
-<p:sld xmlns:a="http://schemas.openxmlformats.org/drawingml/2006/main" xmlns:p="http://schemas.openxmlformats.org/presentationml/2006/main" xmlns:r="http://schemas.openxmlformats.org/officeDocument/2006/relationships">
+<p:sld xmlns:a="http://schemas.openxmlformats.org/drawingml/2006/main" xmlns:r="http://schemas.openxmlformats.org/officeDocument/2006/relationships" xmlns:p="http://schemas.openxmlformats.org/presentationml/2006/main">
   <p:cSld>
     <p:bg>
       <p:bgPr>
@@ -9530,7 +9764,14 @@
         <p:cNvGrpSpPr/>
         <p:nvPr/>
       </p:nvGrpSpPr>
-      <p:grpSpPr/>
+      <p:grpSpPr>
+        <a:xfrm>
+          <a:off x="0" y="0"/>
+          <a:ext cx="0" cy="0"/>
+          <a:chOff x="0" y="0"/>
+          <a:chExt cx="0" cy="0"/>
+        </a:xfrm>
+      </p:grpSpPr>
       <p:sp>
         <p:nvSpPr>
           <p:cNvPr id="2" name="TextBox 1"/>
@@ -9648,6 +9889,7 @@
           <a:lstStyle/>
           <a:p>
             <a:pPr algn="ctr"/>
+            <a:endParaRPr/>
           </a:p>
         </p:txBody>
       </p:sp>
@@ -9863,7 +10105,7 @@
         <p:spPr>
           <a:xfrm>
             <a:off x="457200" y="6446520"/>
-            <a:ext cx="5486400" cy="320040"/>
+            <a:ext cx="6217920" cy="320040"/>
           </a:xfrm>
           <a:prstGeom prst="rect">
             <a:avLst/>
@@ -9916,7 +10158,7 @@
                   <a:srgbClr val="6B6B6B"/>
                 </a:solidFill>
               </a:rPr>
-              <a:t>Module 04/8 · 20 min</a:t>
+              <a:t>Module 04/8</a:t>
             </a:r>
           </a:p>
         </p:txBody>
@@ -9964,7 +10206,7 @@
 </file>
 
 <file path=ppt/slides/slide19.xml><?xml version="1.0" encoding="utf-8"?>
-<p:sld xmlns:a="http://schemas.openxmlformats.org/drawingml/2006/main" xmlns:p="http://schemas.openxmlformats.org/presentationml/2006/main" xmlns:r="http://schemas.openxmlformats.org/officeDocument/2006/relationships">
+<p:sld xmlns:a="http://schemas.openxmlformats.org/drawingml/2006/main" xmlns:r="http://schemas.openxmlformats.org/officeDocument/2006/relationships" xmlns:p="http://schemas.openxmlformats.org/presentationml/2006/main">
   <p:cSld>
     <p:bg>
       <p:bgPr>
@@ -9980,7 +10222,14 @@
         <p:cNvGrpSpPr/>
         <p:nvPr/>
       </p:nvGrpSpPr>
-      <p:grpSpPr/>
+      <p:grpSpPr>
+        <a:xfrm>
+          <a:off x="0" y="0"/>
+          <a:ext cx="0" cy="0"/>
+          <a:chOff x="0" y="0"/>
+          <a:chExt cx="0" cy="0"/>
+        </a:xfrm>
+      </p:grpSpPr>
       <p:sp>
         <p:nvSpPr>
           <p:cNvPr id="2" name="TextBox 1"/>
@@ -10065,8 +10314,51 @@
         </p:nvSpPr>
         <p:spPr>
           <a:xfrm>
-            <a:off x="640080" y="4114800"/>
-            <a:ext cx="10881360" cy="457200"/>
+            <a:off x="640080" y="4206240"/>
+            <a:ext cx="10881360" cy="1280160"/>
+          </a:xfrm>
+          <a:prstGeom prst="rect">
+            <a:avLst/>
+          </a:prstGeom>
+          <a:noFill/>
+        </p:spPr>
+        <p:txBody>
+          <a:bodyPr wrap="square">
+            <a:spAutoFit/>
+          </a:bodyPr>
+          <a:lstStyle/>
+          <a:p>
+            <a:r>
+              <a:rPr sz="1600">
+                <a:solidFill>
+                  <a:srgbClr val="FFFFFF"/>
+                </a:solidFill>
+              </a:rPr>
+              <a:t>Python, GeoPandas, Shapely, Matplotlib — the same operations, reproducibly.</a:t>
+            </a:r>
+          </a:p>
+          <a:p>
+            <a:r>
+              <a:rPr sz="1300">
+                <a:solidFill>
+                  <a:srgbClr val="C9D3E0"/>
+                </a:solidFill>
+              </a:rPr>
+              <a:t>Python、GeoPandas、Shapely、Matplotlib——相同操作，但可重現。</a:t>
+            </a:r>
+          </a:p>
+        </p:txBody>
+      </p:sp>
+      <p:sp>
+        <p:nvSpPr>
+          <p:cNvPr id="5" name="TextBox 4"/>
+          <p:cNvSpPr txBox="1"/>
+          <p:nvPr/>
+        </p:nvSpPr>
+        <p:spPr>
+          <a:xfrm>
+            <a:off x="457200" y="6446520"/>
+            <a:ext cx="6217920" cy="320040"/>
           </a:xfrm>
           <a:prstGeom prst="rect">
             <a:avLst/>
@@ -10080,55 +10372,12 @@
           <a:lstStyle/>
           <a:p>
             <a:r>
-              <a:rPr sz="1600">
-                <a:solidFill>
-                  <a:srgbClr val="2E7D5B"/>
-                </a:solidFill>
-              </a:rPr>
-              <a:t>20 minutes  ·  20 分鐘</a:t>
-            </a:r>
-          </a:p>
-        </p:txBody>
-      </p:sp>
-      <p:sp>
-        <p:nvSpPr>
-          <p:cNvPr id="5" name="TextBox 4"/>
-          <p:cNvSpPr txBox="1"/>
-          <p:nvPr/>
-        </p:nvSpPr>
-        <p:spPr>
-          <a:xfrm>
-            <a:off x="640080" y="4754880"/>
-            <a:ext cx="10881360" cy="1280160"/>
-          </a:xfrm>
-          <a:prstGeom prst="rect">
-            <a:avLst/>
-          </a:prstGeom>
-          <a:noFill/>
-        </p:spPr>
-        <p:txBody>
-          <a:bodyPr wrap="square">
-            <a:spAutoFit/>
-          </a:bodyPr>
-          <a:lstStyle/>
-          <a:p>
-            <a:r>
-              <a:rPr sz="1600">
-                <a:solidFill>
-                  <a:srgbClr val="FFFFFF"/>
-                </a:solidFill>
-              </a:rPr>
-              <a:t>Python, GeoPandas, Shapely, Matplotlib — the same operations, reproducibly.</a:t>
-            </a:r>
-          </a:p>
-          <a:p>
-            <a:r>
-              <a:rPr sz="1300">
-                <a:solidFill>
-                  <a:srgbClr val="C9D3E0"/>
-                </a:solidFill>
-              </a:rPr>
-              <a:t>Python、GeoPandas、Shapely、Matplotlib——相同操作，但可重現。</a:t>
+              <a:rPr sz="1000">
+                <a:solidFill>
+                  <a:srgbClr val="6B6B6B"/>
+                </a:solidFill>
+              </a:rPr>
+              <a:t>Mapping the Unknown · 探索未知空間</a:t>
             </a:r>
           </a:p>
         </p:txBody>
@@ -10136,39 +10385,6 @@
       <p:sp>
         <p:nvSpPr>
           <p:cNvPr id="6" name="TextBox 5"/>
-          <p:cNvSpPr txBox="1"/>
-          <p:nvPr/>
-        </p:nvSpPr>
-        <p:spPr>
-          <a:xfrm>
-            <a:off x="457200" y="6446520"/>
-            <a:ext cx="5486400" cy="320040"/>
-          </a:xfrm>
-          <a:prstGeom prst="rect">
-            <a:avLst/>
-          </a:prstGeom>
-          <a:noFill/>
-        </p:spPr>
-        <p:txBody>
-          <a:bodyPr wrap="none">
-            <a:spAutoFit/>
-          </a:bodyPr>
-          <a:lstStyle/>
-          <a:p>
-            <a:r>
-              <a:rPr sz="1000">
-                <a:solidFill>
-                  <a:srgbClr val="6B6B6B"/>
-                </a:solidFill>
-              </a:rPr>
-              <a:t>Mapping the Unknown · 探索未知空間</a:t>
-            </a:r>
-          </a:p>
-        </p:txBody>
-      </p:sp>
-      <p:sp>
-        <p:nvSpPr>
-          <p:cNvPr id="7" name="TextBox 6"/>
           <p:cNvSpPr txBox="1"/>
           <p:nvPr/>
         </p:nvSpPr>
@@ -10195,14 +10411,14 @@
                   <a:srgbClr val="6B6B6B"/>
                 </a:solidFill>
               </a:rPr>
-              <a:t>Module 05/8 · 20 min</a:t>
-            </a:r>
-          </a:p>
-        </p:txBody>
-      </p:sp>
-      <p:sp>
-        <p:nvSpPr>
-          <p:cNvPr id="8" name="TextBox 7"/>
+              <a:t>Module 05/8</a:t>
+            </a:r>
+          </a:p>
+        </p:txBody>
+      </p:sp>
+      <p:sp>
+        <p:nvSpPr>
+          <p:cNvPr id="7" name="TextBox 6"/>
           <p:cNvSpPr txBox="1"/>
           <p:nvPr/>
         </p:nvSpPr>
@@ -10243,7 +10459,7 @@
 </file>
 
 <file path=ppt/slides/slide2.xml><?xml version="1.0" encoding="utf-8"?>
-<p:sld xmlns:a="http://schemas.openxmlformats.org/drawingml/2006/main" xmlns:p="http://schemas.openxmlformats.org/presentationml/2006/main" xmlns:r="http://schemas.openxmlformats.org/officeDocument/2006/relationships">
+<p:sld xmlns:a="http://schemas.openxmlformats.org/drawingml/2006/main" xmlns:r="http://schemas.openxmlformats.org/officeDocument/2006/relationships" xmlns:p="http://schemas.openxmlformats.org/presentationml/2006/main">
   <p:cSld>
     <p:bg>
       <p:bgPr>
@@ -10259,7 +10475,14 @@
         <p:cNvGrpSpPr/>
         <p:nvPr/>
       </p:nvGrpSpPr>
-      <p:grpSpPr/>
+      <p:grpSpPr>
+        <a:xfrm>
+          <a:off x="0" y="0"/>
+          <a:ext cx="0" cy="0"/>
+          <a:chOff x="0" y="0"/>
+          <a:chExt cx="0" cy="0"/>
+        </a:xfrm>
+      </p:grpSpPr>
       <p:sp>
         <p:nvSpPr>
           <p:cNvPr id="2" name="TextBox 1"/>
@@ -10377,6 +10600,7 @@
           <a:lstStyle/>
           <a:p>
             <a:pPr algn="ctr"/>
+            <a:endParaRPr/>
           </a:p>
         </p:txBody>
       </p:sp>
@@ -10502,7 +10726,7 @@
         <p:spPr>
           <a:xfrm>
             <a:off x="457200" y="6446520"/>
-            <a:ext cx="5486400" cy="320040"/>
+            <a:ext cx="6217920" cy="320040"/>
           </a:xfrm>
           <a:prstGeom prst="rect">
             <a:avLst/>
@@ -10569,7 +10793,7 @@
 </file>
 
 <file path=ppt/slides/slide20.xml><?xml version="1.0" encoding="utf-8"?>
-<p:sld xmlns:a="http://schemas.openxmlformats.org/drawingml/2006/main" xmlns:p="http://schemas.openxmlformats.org/presentationml/2006/main" xmlns:r="http://schemas.openxmlformats.org/officeDocument/2006/relationships">
+<p:sld xmlns:a="http://schemas.openxmlformats.org/drawingml/2006/main" xmlns:r="http://schemas.openxmlformats.org/officeDocument/2006/relationships" xmlns:p="http://schemas.openxmlformats.org/presentationml/2006/main">
   <p:cSld>
     <p:bg>
       <p:bgPr>
@@ -10585,7 +10809,14 @@
         <p:cNvGrpSpPr/>
         <p:nvPr/>
       </p:nvGrpSpPr>
-      <p:grpSpPr/>
+      <p:grpSpPr>
+        <a:xfrm>
+          <a:off x="0" y="0"/>
+          <a:ext cx="0" cy="0"/>
+          <a:chOff x="0" y="0"/>
+          <a:chExt cx="0" cy="0"/>
+        </a:xfrm>
+      </p:grpSpPr>
       <p:sp>
         <p:nvSpPr>
           <p:cNvPr id="2" name="TextBox 1"/>
@@ -10703,6 +10934,7 @@
           <a:lstStyle/>
           <a:p>
             <a:pPr algn="ctr"/>
+            <a:endParaRPr/>
           </a:p>
         </p:txBody>
       </p:sp>
@@ -10858,7 +11090,7 @@
         <p:spPr>
           <a:xfrm>
             <a:off x="457200" y="6446520"/>
-            <a:ext cx="5486400" cy="320040"/>
+            <a:ext cx="6217920" cy="320040"/>
           </a:xfrm>
           <a:prstGeom prst="rect">
             <a:avLst/>
@@ -10911,7 +11143,7 @@
                   <a:srgbClr val="6B6B6B"/>
                 </a:solidFill>
               </a:rPr>
-              <a:t>Module 05/8 · 20 min</a:t>
+              <a:t>Module 05/8</a:t>
             </a:r>
           </a:p>
         </p:txBody>
@@ -10959,7 +11191,7 @@
 </file>
 
 <file path=ppt/slides/slide21.xml><?xml version="1.0" encoding="utf-8"?>
-<p:sld xmlns:a="http://schemas.openxmlformats.org/drawingml/2006/main" xmlns:p="http://schemas.openxmlformats.org/presentationml/2006/main" xmlns:r="http://schemas.openxmlformats.org/officeDocument/2006/relationships">
+<p:sld xmlns:a="http://schemas.openxmlformats.org/drawingml/2006/main" xmlns:r="http://schemas.openxmlformats.org/officeDocument/2006/relationships" xmlns:p="http://schemas.openxmlformats.org/presentationml/2006/main">
   <p:cSld>
     <p:bg>
       <p:bgPr>
@@ -10975,7 +11207,14 @@
         <p:cNvGrpSpPr/>
         <p:nvPr/>
       </p:nvGrpSpPr>
-      <p:grpSpPr/>
+      <p:grpSpPr>
+        <a:xfrm>
+          <a:off x="0" y="0"/>
+          <a:ext cx="0" cy="0"/>
+          <a:chOff x="0" y="0"/>
+          <a:chExt cx="0" cy="0"/>
+        </a:xfrm>
+      </p:grpSpPr>
       <p:sp>
         <p:nvSpPr>
           <p:cNvPr id="2" name="TextBox 1"/>
@@ -11093,6 +11332,7 @@
           <a:lstStyle/>
           <a:p>
             <a:pPr algn="ctr"/>
+            <a:endParaRPr/>
           </a:p>
         </p:txBody>
       </p:sp>
@@ -11248,7 +11488,7 @@
         <p:spPr>
           <a:xfrm>
             <a:off x="457200" y="6446520"/>
-            <a:ext cx="5486400" cy="320040"/>
+            <a:ext cx="6217920" cy="320040"/>
           </a:xfrm>
           <a:prstGeom prst="rect">
             <a:avLst/>
@@ -11301,7 +11541,7 @@
                   <a:srgbClr val="6B6B6B"/>
                 </a:solidFill>
               </a:rPr>
-              <a:t>Module 05/8 · 20 min</a:t>
+              <a:t>Module 05/8</a:t>
             </a:r>
           </a:p>
         </p:txBody>
@@ -11349,7 +11589,7 @@
 </file>
 
 <file path=ppt/slides/slide22.xml><?xml version="1.0" encoding="utf-8"?>
-<p:sld xmlns:a="http://schemas.openxmlformats.org/drawingml/2006/main" xmlns:p="http://schemas.openxmlformats.org/presentationml/2006/main" xmlns:r="http://schemas.openxmlformats.org/officeDocument/2006/relationships">
+<p:sld xmlns:a="http://schemas.openxmlformats.org/drawingml/2006/main" xmlns:r="http://schemas.openxmlformats.org/officeDocument/2006/relationships" xmlns:p="http://schemas.openxmlformats.org/presentationml/2006/main">
   <p:cSld>
     <p:bg>
       <p:bgPr>
@@ -11365,7 +11605,14 @@
         <p:cNvGrpSpPr/>
         <p:nvPr/>
       </p:nvGrpSpPr>
-      <p:grpSpPr/>
+      <p:grpSpPr>
+        <a:xfrm>
+          <a:off x="0" y="0"/>
+          <a:ext cx="0" cy="0"/>
+          <a:chOff x="0" y="0"/>
+          <a:chExt cx="0" cy="0"/>
+        </a:xfrm>
+      </p:grpSpPr>
       <p:sp>
         <p:nvSpPr>
           <p:cNvPr id="2" name="TextBox 1"/>
@@ -11483,6 +11730,7 @@
           <a:lstStyle/>
           <a:p>
             <a:pPr algn="ctr"/>
+            <a:endParaRPr/>
           </a:p>
         </p:txBody>
       </p:sp>
@@ -11638,7 +11886,7 @@
         <p:spPr>
           <a:xfrm>
             <a:off x="457200" y="6446520"/>
-            <a:ext cx="5486400" cy="320040"/>
+            <a:ext cx="6217920" cy="320040"/>
           </a:xfrm>
           <a:prstGeom prst="rect">
             <a:avLst/>
@@ -11691,7 +11939,7 @@
                   <a:srgbClr val="6B6B6B"/>
                 </a:solidFill>
               </a:rPr>
-              <a:t>Module 05/8 · 20 min</a:t>
+              <a:t>Module 05/8</a:t>
             </a:r>
           </a:p>
         </p:txBody>
@@ -11739,7 +11987,7 @@
 </file>
 
 <file path=ppt/slides/slide23.xml><?xml version="1.0" encoding="utf-8"?>
-<p:sld xmlns:a="http://schemas.openxmlformats.org/drawingml/2006/main" xmlns:p="http://schemas.openxmlformats.org/presentationml/2006/main" xmlns:r="http://schemas.openxmlformats.org/officeDocument/2006/relationships">
+<p:sld xmlns:a="http://schemas.openxmlformats.org/drawingml/2006/main" xmlns:r="http://schemas.openxmlformats.org/officeDocument/2006/relationships" xmlns:p="http://schemas.openxmlformats.org/presentationml/2006/main">
   <p:cSld>
     <p:bg>
       <p:bgPr>
@@ -11755,7 +12003,14 @@
         <p:cNvGrpSpPr/>
         <p:nvPr/>
       </p:nvGrpSpPr>
-      <p:grpSpPr/>
+      <p:grpSpPr>
+        <a:xfrm>
+          <a:off x="0" y="0"/>
+          <a:ext cx="0" cy="0"/>
+          <a:chOff x="0" y="0"/>
+          <a:chExt cx="0" cy="0"/>
+        </a:xfrm>
+      </p:grpSpPr>
       <p:sp>
         <p:nvSpPr>
           <p:cNvPr id="2" name="TextBox 1"/>
@@ -11840,8 +12095,51 @@
         </p:nvSpPr>
         <p:spPr>
           <a:xfrm>
-            <a:off x="640080" y="4114800"/>
-            <a:ext cx="10881360" cy="457200"/>
+            <a:off x="640080" y="4206240"/>
+            <a:ext cx="10881360" cy="1280160"/>
+          </a:xfrm>
+          <a:prstGeom prst="rect">
+            <a:avLst/>
+          </a:prstGeom>
+          <a:noFill/>
+        </p:spPr>
+        <p:txBody>
+          <a:bodyPr wrap="square">
+            <a:spAutoFit/>
+          </a:bodyPr>
+          <a:lstStyle/>
+          <a:p>
+            <a:r>
+              <a:rPr sz="1600">
+                <a:solidFill>
+                  <a:srgbClr val="FFFFFF"/>
+                </a:solidFill>
+              </a:rPr>
+              <a:t>A computed result is not an insight. What? Where? Why? So what?</a:t>
+            </a:r>
+          </a:p>
+          <a:p>
+            <a:r>
+              <a:rPr sz="1300">
+                <a:solidFill>
+                  <a:srgbClr val="C9D3E0"/>
+                </a:solidFill>
+              </a:rPr>
+              <a:t>運算結果不是洞見。是什麼？在哪裡？為什麼？所以呢？</a:t>
+            </a:r>
+          </a:p>
+        </p:txBody>
+      </p:sp>
+      <p:sp>
+        <p:nvSpPr>
+          <p:cNvPr id="5" name="TextBox 4"/>
+          <p:cNvSpPr txBox="1"/>
+          <p:nvPr/>
+        </p:nvSpPr>
+        <p:spPr>
+          <a:xfrm>
+            <a:off x="457200" y="6446520"/>
+            <a:ext cx="6217920" cy="320040"/>
           </a:xfrm>
           <a:prstGeom prst="rect">
             <a:avLst/>
@@ -11855,55 +12153,12 @@
           <a:lstStyle/>
           <a:p>
             <a:r>
-              <a:rPr sz="1600">
-                <a:solidFill>
-                  <a:srgbClr val="2E7D5B"/>
-                </a:solidFill>
-              </a:rPr>
-              <a:t>15 minutes  ·  15 分鐘</a:t>
-            </a:r>
-          </a:p>
-        </p:txBody>
-      </p:sp>
-      <p:sp>
-        <p:nvSpPr>
-          <p:cNvPr id="5" name="TextBox 4"/>
-          <p:cNvSpPr txBox="1"/>
-          <p:nvPr/>
-        </p:nvSpPr>
-        <p:spPr>
-          <a:xfrm>
-            <a:off x="640080" y="4754880"/>
-            <a:ext cx="10881360" cy="1280160"/>
-          </a:xfrm>
-          <a:prstGeom prst="rect">
-            <a:avLst/>
-          </a:prstGeom>
-          <a:noFill/>
-        </p:spPr>
-        <p:txBody>
-          <a:bodyPr wrap="square">
-            <a:spAutoFit/>
-          </a:bodyPr>
-          <a:lstStyle/>
-          <a:p>
-            <a:r>
-              <a:rPr sz="1600">
-                <a:solidFill>
-                  <a:srgbClr val="FFFFFF"/>
-                </a:solidFill>
-              </a:rPr>
-              <a:t>A computed result is not an insight. What? Where? Why? So what?</a:t>
-            </a:r>
-          </a:p>
-          <a:p>
-            <a:r>
-              <a:rPr sz="1300">
-                <a:solidFill>
-                  <a:srgbClr val="C9D3E0"/>
-                </a:solidFill>
-              </a:rPr>
-              <a:t>運算結果不是洞見。是什麼？在哪裡？為什麼？所以呢？</a:t>
+              <a:rPr sz="1000">
+                <a:solidFill>
+                  <a:srgbClr val="6B6B6B"/>
+                </a:solidFill>
+              </a:rPr>
+              <a:t>Mapping the Unknown · 探索未知空間</a:t>
             </a:r>
           </a:p>
         </p:txBody>
@@ -11911,39 +12166,6 @@
       <p:sp>
         <p:nvSpPr>
           <p:cNvPr id="6" name="TextBox 5"/>
-          <p:cNvSpPr txBox="1"/>
-          <p:nvPr/>
-        </p:nvSpPr>
-        <p:spPr>
-          <a:xfrm>
-            <a:off x="457200" y="6446520"/>
-            <a:ext cx="5486400" cy="320040"/>
-          </a:xfrm>
-          <a:prstGeom prst="rect">
-            <a:avLst/>
-          </a:prstGeom>
-          <a:noFill/>
-        </p:spPr>
-        <p:txBody>
-          <a:bodyPr wrap="none">
-            <a:spAutoFit/>
-          </a:bodyPr>
-          <a:lstStyle/>
-          <a:p>
-            <a:r>
-              <a:rPr sz="1000">
-                <a:solidFill>
-                  <a:srgbClr val="6B6B6B"/>
-                </a:solidFill>
-              </a:rPr>
-              <a:t>Mapping the Unknown · 探索未知空間</a:t>
-            </a:r>
-          </a:p>
-        </p:txBody>
-      </p:sp>
-      <p:sp>
-        <p:nvSpPr>
-          <p:cNvPr id="7" name="TextBox 6"/>
           <p:cNvSpPr txBox="1"/>
           <p:nvPr/>
         </p:nvSpPr>
@@ -11970,14 +12192,14 @@
                   <a:srgbClr val="6B6B6B"/>
                 </a:solidFill>
               </a:rPr>
-              <a:t>Module 06/8 · 15 min</a:t>
-            </a:r>
-          </a:p>
-        </p:txBody>
-      </p:sp>
-      <p:sp>
-        <p:nvSpPr>
-          <p:cNvPr id="8" name="TextBox 7"/>
+              <a:t>Module 06/8</a:t>
+            </a:r>
+          </a:p>
+        </p:txBody>
+      </p:sp>
+      <p:sp>
+        <p:nvSpPr>
+          <p:cNvPr id="7" name="TextBox 6"/>
           <p:cNvSpPr txBox="1"/>
           <p:nvPr/>
         </p:nvSpPr>
@@ -12018,7 +12240,7 @@
 </file>
 
 <file path=ppt/slides/slide24.xml><?xml version="1.0" encoding="utf-8"?>
-<p:sld xmlns:a="http://schemas.openxmlformats.org/drawingml/2006/main" xmlns:p="http://schemas.openxmlformats.org/presentationml/2006/main" xmlns:r="http://schemas.openxmlformats.org/officeDocument/2006/relationships">
+<p:sld xmlns:a="http://schemas.openxmlformats.org/drawingml/2006/main" xmlns:r="http://schemas.openxmlformats.org/officeDocument/2006/relationships" xmlns:p="http://schemas.openxmlformats.org/presentationml/2006/main">
   <p:cSld>
     <p:bg>
       <p:bgPr>
@@ -12034,7 +12256,14 @@
         <p:cNvGrpSpPr/>
         <p:nvPr/>
       </p:nvGrpSpPr>
-      <p:grpSpPr/>
+      <p:grpSpPr>
+        <a:xfrm>
+          <a:off x="0" y="0"/>
+          <a:ext cx="0" cy="0"/>
+          <a:chOff x="0" y="0"/>
+          <a:chExt cx="0" cy="0"/>
+        </a:xfrm>
+      </p:grpSpPr>
       <p:sp>
         <p:nvSpPr>
           <p:cNvPr id="2" name="TextBox 1"/>
@@ -12152,6 +12381,7 @@
           <a:lstStyle/>
           <a:p>
             <a:pPr algn="ctr"/>
+            <a:endParaRPr/>
           </a:p>
         </p:txBody>
       </p:sp>
@@ -12277,7 +12507,7 @@
         <p:spPr>
           <a:xfrm>
             <a:off x="457200" y="6446520"/>
-            <a:ext cx="5486400" cy="320040"/>
+            <a:ext cx="6217920" cy="320040"/>
           </a:xfrm>
           <a:prstGeom prst="rect">
             <a:avLst/>
@@ -12330,7 +12560,7 @@
                   <a:srgbClr val="6B6B6B"/>
                 </a:solidFill>
               </a:rPr>
-              <a:t>Module 06/8 · 15 min</a:t>
+              <a:t>Module 06/8</a:t>
             </a:r>
           </a:p>
         </p:txBody>
@@ -12378,7 +12608,7 @@
 </file>
 
 <file path=ppt/slides/slide25.xml><?xml version="1.0" encoding="utf-8"?>
-<p:sld xmlns:a="http://schemas.openxmlformats.org/drawingml/2006/main" xmlns:p="http://schemas.openxmlformats.org/presentationml/2006/main" xmlns:r="http://schemas.openxmlformats.org/officeDocument/2006/relationships">
+<p:sld xmlns:a="http://schemas.openxmlformats.org/drawingml/2006/main" xmlns:r="http://schemas.openxmlformats.org/officeDocument/2006/relationships" xmlns:p="http://schemas.openxmlformats.org/presentationml/2006/main">
   <p:cSld>
     <p:bg>
       <p:bgPr>
@@ -12394,7 +12624,14 @@
         <p:cNvGrpSpPr/>
         <p:nvPr/>
       </p:nvGrpSpPr>
-      <p:grpSpPr/>
+      <p:grpSpPr>
+        <a:xfrm>
+          <a:off x="0" y="0"/>
+          <a:ext cx="0" cy="0"/>
+          <a:chOff x="0" y="0"/>
+          <a:chExt cx="0" cy="0"/>
+        </a:xfrm>
+      </p:grpSpPr>
       <p:sp>
         <p:nvSpPr>
           <p:cNvPr id="2" name="TextBox 1"/>
@@ -12512,6 +12749,7 @@
           <a:lstStyle/>
           <a:p>
             <a:pPr algn="ctr"/>
+            <a:endParaRPr/>
           </a:p>
         </p:txBody>
       </p:sp>
@@ -12697,7 +12935,7 @@
         <p:spPr>
           <a:xfrm>
             <a:off x="457200" y="6446520"/>
-            <a:ext cx="5486400" cy="320040"/>
+            <a:ext cx="6217920" cy="320040"/>
           </a:xfrm>
           <a:prstGeom prst="rect">
             <a:avLst/>
@@ -12750,7 +12988,7 @@
                   <a:srgbClr val="6B6B6B"/>
                 </a:solidFill>
               </a:rPr>
-              <a:t>Module 06/8 · 15 min</a:t>
+              <a:t>Module 06/8</a:t>
             </a:r>
           </a:p>
         </p:txBody>
@@ -12798,7 +13036,7 @@
 </file>
 
 <file path=ppt/slides/slide26.xml><?xml version="1.0" encoding="utf-8"?>
-<p:sld xmlns:a="http://schemas.openxmlformats.org/drawingml/2006/main" xmlns:p="http://schemas.openxmlformats.org/presentationml/2006/main" xmlns:r="http://schemas.openxmlformats.org/officeDocument/2006/relationships">
+<p:sld xmlns:a="http://schemas.openxmlformats.org/drawingml/2006/main" xmlns:r="http://schemas.openxmlformats.org/officeDocument/2006/relationships" xmlns:p="http://schemas.openxmlformats.org/presentationml/2006/main">
   <p:cSld>
     <p:bg>
       <p:bgPr>
@@ -12814,7 +13052,14 @@
         <p:cNvGrpSpPr/>
         <p:nvPr/>
       </p:nvGrpSpPr>
-      <p:grpSpPr/>
+      <p:grpSpPr>
+        <a:xfrm>
+          <a:off x="0" y="0"/>
+          <a:ext cx="0" cy="0"/>
+          <a:chOff x="0" y="0"/>
+          <a:chExt cx="0" cy="0"/>
+        </a:xfrm>
+      </p:grpSpPr>
       <p:sp>
         <p:nvSpPr>
           <p:cNvPr id="2" name="TextBox 1"/>
@@ -12899,8 +13144,51 @@
         </p:nvSpPr>
         <p:spPr>
           <a:xfrm>
-            <a:off x="640080" y="4114800"/>
-            <a:ext cx="10881360" cy="457200"/>
+            <a:off x="640080" y="4206240"/>
+            <a:ext cx="10881360" cy="1280160"/>
+          </a:xfrm>
+          <a:prstGeom prst="rect">
+            <a:avLst/>
+          </a:prstGeom>
+          <a:noFill/>
+        </p:spPr>
+        <p:txBody>
+          <a:bodyPr wrap="square">
+            <a:spAutoFit/>
+          </a:bodyPr>
+          <a:lstStyle/>
+          <a:p>
+            <a:r>
+              <a:rPr sz="1600">
+                <a:solidFill>
+                  <a:srgbClr val="FFFFFF"/>
+                </a:solidFill>
+              </a:rPr>
+              <a:t>Hierarchy, figure-ground, color, typography, annotation, composition.</a:t>
+            </a:r>
+          </a:p>
+          <a:p>
+            <a:r>
+              <a:rPr sz="1300">
+                <a:solidFill>
+                  <a:srgbClr val="C9D3E0"/>
+                </a:solidFill>
+              </a:rPr>
+              <a:t>層級、圖底關係、色彩、字體排印、註記、構圖。</a:t>
+            </a:r>
+          </a:p>
+        </p:txBody>
+      </p:sp>
+      <p:sp>
+        <p:nvSpPr>
+          <p:cNvPr id="5" name="TextBox 4"/>
+          <p:cNvSpPr txBox="1"/>
+          <p:nvPr/>
+        </p:nvSpPr>
+        <p:spPr>
+          <a:xfrm>
+            <a:off x="457200" y="6446520"/>
+            <a:ext cx="6217920" cy="320040"/>
           </a:xfrm>
           <a:prstGeom prst="rect">
             <a:avLst/>
@@ -12914,55 +13202,12 @@
           <a:lstStyle/>
           <a:p>
             <a:r>
-              <a:rPr sz="1600">
-                <a:solidFill>
-                  <a:srgbClr val="2E7D5B"/>
-                </a:solidFill>
-              </a:rPr>
-              <a:t>20 minutes  ·  20 分鐘</a:t>
-            </a:r>
-          </a:p>
-        </p:txBody>
-      </p:sp>
-      <p:sp>
-        <p:nvSpPr>
-          <p:cNvPr id="5" name="TextBox 4"/>
-          <p:cNvSpPr txBox="1"/>
-          <p:nvPr/>
-        </p:nvSpPr>
-        <p:spPr>
-          <a:xfrm>
-            <a:off x="640080" y="4754880"/>
-            <a:ext cx="10881360" cy="1280160"/>
-          </a:xfrm>
-          <a:prstGeom prst="rect">
-            <a:avLst/>
-          </a:prstGeom>
-          <a:noFill/>
-        </p:spPr>
-        <p:txBody>
-          <a:bodyPr wrap="square">
-            <a:spAutoFit/>
-          </a:bodyPr>
-          <a:lstStyle/>
-          <a:p>
-            <a:r>
-              <a:rPr sz="1600">
-                <a:solidFill>
-                  <a:srgbClr val="FFFFFF"/>
-                </a:solidFill>
-              </a:rPr>
-              <a:t>Hierarchy, figure-ground, color, typography, annotation, composition.</a:t>
-            </a:r>
-          </a:p>
-          <a:p>
-            <a:r>
-              <a:rPr sz="1300">
-                <a:solidFill>
-                  <a:srgbClr val="C9D3E0"/>
-                </a:solidFill>
-              </a:rPr>
-              <a:t>層級、圖底關係、色彩、字體排印、註記、構圖。</a:t>
+              <a:rPr sz="1000">
+                <a:solidFill>
+                  <a:srgbClr val="6B6B6B"/>
+                </a:solidFill>
+              </a:rPr>
+              <a:t>Mapping the Unknown · 探索未知空間</a:t>
             </a:r>
           </a:p>
         </p:txBody>
@@ -12970,39 +13215,6 @@
       <p:sp>
         <p:nvSpPr>
           <p:cNvPr id="6" name="TextBox 5"/>
-          <p:cNvSpPr txBox="1"/>
-          <p:nvPr/>
-        </p:nvSpPr>
-        <p:spPr>
-          <a:xfrm>
-            <a:off x="457200" y="6446520"/>
-            <a:ext cx="5486400" cy="320040"/>
-          </a:xfrm>
-          <a:prstGeom prst="rect">
-            <a:avLst/>
-          </a:prstGeom>
-          <a:noFill/>
-        </p:spPr>
-        <p:txBody>
-          <a:bodyPr wrap="none">
-            <a:spAutoFit/>
-          </a:bodyPr>
-          <a:lstStyle/>
-          <a:p>
-            <a:r>
-              <a:rPr sz="1000">
-                <a:solidFill>
-                  <a:srgbClr val="6B6B6B"/>
-                </a:solidFill>
-              </a:rPr>
-              <a:t>Mapping the Unknown · 探索未知空間</a:t>
-            </a:r>
-          </a:p>
-        </p:txBody>
-      </p:sp>
-      <p:sp>
-        <p:nvSpPr>
-          <p:cNvPr id="7" name="TextBox 6"/>
           <p:cNvSpPr txBox="1"/>
           <p:nvPr/>
         </p:nvSpPr>
@@ -13029,14 +13241,14 @@
                   <a:srgbClr val="6B6B6B"/>
                 </a:solidFill>
               </a:rPr>
-              <a:t>Module 07/8 · 20 min</a:t>
-            </a:r>
-          </a:p>
-        </p:txBody>
-      </p:sp>
-      <p:sp>
-        <p:nvSpPr>
-          <p:cNvPr id="8" name="TextBox 7"/>
+              <a:t>Module 07/8</a:t>
+            </a:r>
+          </a:p>
+        </p:txBody>
+      </p:sp>
+      <p:sp>
+        <p:nvSpPr>
+          <p:cNvPr id="7" name="TextBox 6"/>
           <p:cNvSpPr txBox="1"/>
           <p:nvPr/>
         </p:nvSpPr>
@@ -13077,7 +13289,7 @@
 </file>
 
 <file path=ppt/slides/slide27.xml><?xml version="1.0" encoding="utf-8"?>
-<p:sld xmlns:a="http://schemas.openxmlformats.org/drawingml/2006/main" xmlns:p="http://schemas.openxmlformats.org/presentationml/2006/main" xmlns:r="http://schemas.openxmlformats.org/officeDocument/2006/relationships">
+<p:sld xmlns:a="http://schemas.openxmlformats.org/drawingml/2006/main" xmlns:r="http://schemas.openxmlformats.org/officeDocument/2006/relationships" xmlns:p="http://schemas.openxmlformats.org/presentationml/2006/main">
   <p:cSld>
     <p:bg>
       <p:bgPr>
@@ -13093,7 +13305,14 @@
         <p:cNvGrpSpPr/>
         <p:nvPr/>
       </p:nvGrpSpPr>
-      <p:grpSpPr/>
+      <p:grpSpPr>
+        <a:xfrm>
+          <a:off x="0" y="0"/>
+          <a:ext cx="0" cy="0"/>
+          <a:chOff x="0" y="0"/>
+          <a:chExt cx="0" cy="0"/>
+        </a:xfrm>
+      </p:grpSpPr>
       <p:sp>
         <p:nvSpPr>
           <p:cNvPr id="2" name="TextBox 1"/>
@@ -13211,6 +13430,7 @@
           <a:lstStyle/>
           <a:p>
             <a:pPr algn="ctr"/>
+            <a:endParaRPr/>
           </a:p>
         </p:txBody>
       </p:sp>
@@ -13396,7 +13616,7 @@
         <p:spPr>
           <a:xfrm>
             <a:off x="457200" y="6446520"/>
-            <a:ext cx="5486400" cy="320040"/>
+            <a:ext cx="6217920" cy="320040"/>
           </a:xfrm>
           <a:prstGeom prst="rect">
             <a:avLst/>
@@ -13449,7 +13669,7 @@
                   <a:srgbClr val="6B6B6B"/>
                 </a:solidFill>
               </a:rPr>
-              <a:t>Module 07/8 · 20 min</a:t>
+              <a:t>Module 07/8</a:t>
             </a:r>
           </a:p>
         </p:txBody>
@@ -13497,7 +13717,7 @@
 </file>
 
 <file path=ppt/slides/slide28.xml><?xml version="1.0" encoding="utf-8"?>
-<p:sld xmlns:a="http://schemas.openxmlformats.org/drawingml/2006/main" xmlns:p="http://schemas.openxmlformats.org/presentationml/2006/main" xmlns:r="http://schemas.openxmlformats.org/officeDocument/2006/relationships">
+<p:sld xmlns:a="http://schemas.openxmlformats.org/drawingml/2006/main" xmlns:r="http://schemas.openxmlformats.org/officeDocument/2006/relationships" xmlns:p="http://schemas.openxmlformats.org/presentationml/2006/main">
   <p:cSld>
     <p:bg>
       <p:bgPr>
@@ -13513,7 +13733,14 @@
         <p:cNvGrpSpPr/>
         <p:nvPr/>
       </p:nvGrpSpPr>
-      <p:grpSpPr/>
+      <p:grpSpPr>
+        <a:xfrm>
+          <a:off x="0" y="0"/>
+          <a:ext cx="0" cy="0"/>
+          <a:chOff x="0" y="0"/>
+          <a:chExt cx="0" cy="0"/>
+        </a:xfrm>
+      </p:grpSpPr>
       <p:sp>
         <p:nvSpPr>
           <p:cNvPr id="2" name="TextBox 1"/>
@@ -13631,6 +13858,7 @@
           <a:lstStyle/>
           <a:p>
             <a:pPr algn="ctr"/>
+            <a:endParaRPr/>
           </a:p>
         </p:txBody>
       </p:sp>
@@ -13786,7 +14014,7 @@
         <p:spPr>
           <a:xfrm>
             <a:off x="457200" y="6446520"/>
-            <a:ext cx="5486400" cy="320040"/>
+            <a:ext cx="6217920" cy="320040"/>
           </a:xfrm>
           <a:prstGeom prst="rect">
             <a:avLst/>
@@ -13839,7 +14067,7 @@
                   <a:srgbClr val="6B6B6B"/>
                 </a:solidFill>
               </a:rPr>
-              <a:t>Module 07/8 · 20 min</a:t>
+              <a:t>Module 07/8</a:t>
             </a:r>
           </a:p>
         </p:txBody>
@@ -13887,7 +14115,7 @@
 </file>
 
 <file path=ppt/slides/slide29.xml><?xml version="1.0" encoding="utf-8"?>
-<p:sld xmlns:a="http://schemas.openxmlformats.org/drawingml/2006/main" xmlns:p="http://schemas.openxmlformats.org/presentationml/2006/main" xmlns:r="http://schemas.openxmlformats.org/officeDocument/2006/relationships">
+<p:sld xmlns:a="http://schemas.openxmlformats.org/drawingml/2006/main" xmlns:r="http://schemas.openxmlformats.org/officeDocument/2006/relationships" xmlns:p="http://schemas.openxmlformats.org/presentationml/2006/main">
   <p:cSld>
     <p:bg>
       <p:bgPr>
@@ -13903,7 +14131,14 @@
         <p:cNvGrpSpPr/>
         <p:nvPr/>
       </p:nvGrpSpPr>
-      <p:grpSpPr/>
+      <p:grpSpPr>
+        <a:xfrm>
+          <a:off x="0" y="0"/>
+          <a:ext cx="0" cy="0"/>
+          <a:chOff x="0" y="0"/>
+          <a:chExt cx="0" cy="0"/>
+        </a:xfrm>
+      </p:grpSpPr>
       <p:sp>
         <p:nvSpPr>
           <p:cNvPr id="2" name="TextBox 1"/>
@@ -14021,6 +14256,7 @@
           <a:lstStyle/>
           <a:p>
             <a:pPr algn="ctr"/>
+            <a:endParaRPr/>
           </a:p>
         </p:txBody>
       </p:sp>
@@ -14176,7 +14412,7 @@
         <p:spPr>
           <a:xfrm>
             <a:off x="457200" y="6446520"/>
-            <a:ext cx="5486400" cy="320040"/>
+            <a:ext cx="6217920" cy="320040"/>
           </a:xfrm>
           <a:prstGeom prst="rect">
             <a:avLst/>
@@ -14229,7 +14465,7 @@
                   <a:srgbClr val="6B6B6B"/>
                 </a:solidFill>
               </a:rPr>
-              <a:t>Module 07/8 · 20 min</a:t>
+              <a:t>Module 07/8</a:t>
             </a:r>
           </a:p>
         </p:txBody>
@@ -14277,7 +14513,7 @@
 </file>
 
 <file path=ppt/slides/slide3.xml><?xml version="1.0" encoding="utf-8"?>
-<p:sld xmlns:a="http://schemas.openxmlformats.org/drawingml/2006/main" xmlns:p="http://schemas.openxmlformats.org/presentationml/2006/main" xmlns:r="http://schemas.openxmlformats.org/officeDocument/2006/relationships">
+<p:sld xmlns:a="http://schemas.openxmlformats.org/drawingml/2006/main" xmlns:r="http://schemas.openxmlformats.org/officeDocument/2006/relationships" xmlns:p="http://schemas.openxmlformats.org/presentationml/2006/main">
   <p:cSld>
     <p:bg>
       <p:bgPr>
@@ -14293,7 +14529,14 @@
         <p:cNvGrpSpPr/>
         <p:nvPr/>
       </p:nvGrpSpPr>
-      <p:grpSpPr/>
+      <p:grpSpPr>
+        <a:xfrm>
+          <a:off x="0" y="0"/>
+          <a:ext cx="0" cy="0"/>
+          <a:chOff x="0" y="0"/>
+          <a:chExt cx="0" cy="0"/>
+        </a:xfrm>
+      </p:grpSpPr>
       <p:sp>
         <p:nvSpPr>
           <p:cNvPr id="2" name="TextBox 1"/>
@@ -14355,7 +14598,7 @@
                   <a:srgbClr val="1B2A4A"/>
                 </a:solidFill>
               </a:rPr>
-              <a:t>2-Hour Schedule</a:t>
+              <a:t>Workshop Schedule</a:t>
             </a:r>
           </a:p>
           <a:p>
@@ -14365,7 +14608,7 @@
                   <a:srgbClr val="6B6B6B"/>
                 </a:solidFill>
               </a:rPr>
-              <a:t>兩小時課程時程</a:t>
+              <a:t>工作坊課程時程</a:t>
             </a:r>
           </a:p>
         </p:txBody>
@@ -14411,6 +14654,7 @@
           <a:lstStyle/>
           <a:p>
             <a:pPr algn="ctr"/>
+            <a:endParaRPr/>
           </a:p>
         </p:txBody>
       </p:sp>
@@ -14422,8 +14666,8 @@
         </p:nvSpPr>
         <p:spPr>
           <a:xfrm>
-            <a:off x="548640" y="2057400"/>
-            <a:ext cx="11064240" cy="4206240"/>
+            <a:off x="548640" y="2103120"/>
+            <a:ext cx="5349240" cy="1042415"/>
           </a:xfrm>
           <a:prstGeom prst="rect">
             <a:avLst/>
@@ -14436,257 +14680,338 @@
           </a:bodyPr>
           <a:lstStyle/>
           <a:p>
-            <a:pPr>
-              <a:spcAft>
-                <a:spcPts val="1000"/>
-              </a:spcAft>
-            </a:pPr>
-            <a:r>
-              <a:rPr sz="2000">
+            <a:r>
+              <a:rPr sz="1800" b="1">
                 <a:solidFill>
                   <a:srgbClr val="1B2A4A"/>
                 </a:solidFill>
               </a:rPr>
-              <a:t>● 01  Mapping the Unknown — 10 min</a:t>
-            </a:r>
-          </a:p>
-          <a:p>
-            <a:pPr>
-              <a:spcAft>
-                <a:spcPts val="1000"/>
-              </a:spcAft>
-            </a:pPr>
+              <a:t>01   Mapping the Unknown</a:t>
+            </a:r>
+          </a:p>
+          <a:p>
             <a:r>
               <a:rPr sz="1300" i="1">
                 <a:solidFill>
                   <a:srgbClr val="6B6B6B"/>
                 </a:solidFill>
               </a:rPr>
-              <a:t>   探索未知空間</a:t>
-            </a:r>
-          </a:p>
-          <a:p>
-            <a:pPr>
-              <a:spcAft>
-                <a:spcPts val="1000"/>
-              </a:spcAft>
-            </a:pPr>
-            <a:r>
-              <a:rPr sz="2000">
+              <a:t>        探索未知空間</a:t>
+            </a:r>
+          </a:p>
+        </p:txBody>
+      </p:sp>
+      <p:sp>
+        <p:nvSpPr>
+          <p:cNvPr id="6" name="TextBox 5"/>
+          <p:cNvSpPr txBox="1"/>
+          <p:nvPr/>
+        </p:nvSpPr>
+        <p:spPr>
+          <a:xfrm>
+            <a:off x="548640" y="3145535"/>
+            <a:ext cx="5349240" cy="1042415"/>
+          </a:xfrm>
+          <a:prstGeom prst="rect">
+            <a:avLst/>
+          </a:prstGeom>
+          <a:noFill/>
+        </p:spPr>
+        <p:txBody>
+          <a:bodyPr wrap="square">
+            <a:spAutoFit/>
+          </a:bodyPr>
+          <a:lstStyle/>
+          <a:p>
+            <a:r>
+              <a:rPr sz="1800" b="1">
                 <a:solidFill>
                   <a:srgbClr val="1B2A4A"/>
                 </a:solidFill>
               </a:rPr>
-              <a:t>● 02  From Space to Data — 15 min</a:t>
-            </a:r>
-          </a:p>
-          <a:p>
-            <a:pPr>
-              <a:spcAft>
-                <a:spcPts val="1000"/>
-              </a:spcAft>
-            </a:pPr>
+              <a:t>02   From Space to Data</a:t>
+            </a:r>
+          </a:p>
+          <a:p>
             <a:r>
               <a:rPr sz="1300" i="1">
                 <a:solidFill>
                   <a:srgbClr val="6B6B6B"/>
                 </a:solidFill>
               </a:rPr>
-              <a:t>   從空間到資料</a:t>
-            </a:r>
-          </a:p>
-          <a:p>
-            <a:pPr>
-              <a:spcAft>
-                <a:spcPts val="1000"/>
-              </a:spcAft>
-            </a:pPr>
-            <a:r>
-              <a:rPr sz="2000">
+              <a:t>        從空間到資料</a:t>
+            </a:r>
+          </a:p>
+        </p:txBody>
+      </p:sp>
+      <p:sp>
+        <p:nvSpPr>
+          <p:cNvPr id="7" name="TextBox 6"/>
+          <p:cNvSpPr txBox="1"/>
+          <p:nvPr/>
+        </p:nvSpPr>
+        <p:spPr>
+          <a:xfrm>
+            <a:off x="548640" y="4187950"/>
+            <a:ext cx="5349240" cy="1042415"/>
+          </a:xfrm>
+          <a:prstGeom prst="rect">
+            <a:avLst/>
+          </a:prstGeom>
+          <a:noFill/>
+        </p:spPr>
+        <p:txBody>
+          <a:bodyPr wrap="square">
+            <a:spAutoFit/>
+          </a:bodyPr>
+          <a:lstStyle/>
+          <a:p>
+            <a:r>
+              <a:rPr sz="1800" b="1">
                 <a:solidFill>
                   <a:srgbClr val="1B2A4A"/>
                 </a:solidFill>
               </a:rPr>
-              <a:t>● 03  Finding Open Geospatial Data — 15 min</a:t>
-            </a:r>
-          </a:p>
-          <a:p>
-            <a:pPr>
-              <a:spcAft>
-                <a:spcPts val="1000"/>
-              </a:spcAft>
-            </a:pPr>
+              <a:t>03   Finding Open Geospatial Data</a:t>
+            </a:r>
+          </a:p>
+          <a:p>
             <a:r>
               <a:rPr sz="1300" i="1">
                 <a:solidFill>
                   <a:srgbClr val="6B6B6B"/>
                 </a:solidFill>
               </a:rPr>
-              <a:t>   尋找開放地理資料</a:t>
-            </a:r>
-          </a:p>
-          <a:p>
-            <a:pPr>
-              <a:spcAft>
-                <a:spcPts val="1000"/>
-              </a:spcAft>
-            </a:pPr>
-            <a:r>
-              <a:rPr sz="2000">
+              <a:t>        尋找開放地理資料</a:t>
+            </a:r>
+          </a:p>
+        </p:txBody>
+      </p:sp>
+      <p:sp>
+        <p:nvSpPr>
+          <p:cNvPr id="8" name="TextBox 7"/>
+          <p:cNvSpPr txBox="1"/>
+          <p:nvPr/>
+        </p:nvSpPr>
+        <p:spPr>
+          <a:xfrm>
+            <a:off x="548640" y="5230365"/>
+            <a:ext cx="5349240" cy="1042415"/>
+          </a:xfrm>
+          <a:prstGeom prst="rect">
+            <a:avLst/>
+          </a:prstGeom>
+          <a:noFill/>
+        </p:spPr>
+        <p:txBody>
+          <a:bodyPr wrap="square">
+            <a:spAutoFit/>
+          </a:bodyPr>
+          <a:lstStyle/>
+          <a:p>
+            <a:r>
+              <a:rPr sz="1800" b="1">
                 <a:solidFill>
                   <a:srgbClr val="1B2A4A"/>
                 </a:solidFill>
               </a:rPr>
-              <a:t>● 04  QGIS Basics — 20 min</a:t>
-            </a:r>
-          </a:p>
-          <a:p>
-            <a:pPr>
-              <a:spcAft>
-                <a:spcPts val="1000"/>
-              </a:spcAft>
-            </a:pPr>
+              <a:t>04   QGIS Basics</a:t>
+            </a:r>
+          </a:p>
+          <a:p>
             <a:r>
               <a:rPr sz="1300" i="1">
                 <a:solidFill>
                   <a:srgbClr val="6B6B6B"/>
                 </a:solidFill>
               </a:rPr>
-              <a:t>   QGIS 基礎</a:t>
-            </a:r>
-          </a:p>
-          <a:p>
-            <a:pPr>
-              <a:spcAft>
-                <a:spcPts val="1000"/>
-              </a:spcAft>
-            </a:pPr>
-            <a:r>
-              <a:rPr sz="2000">
+              <a:t>        QGIS 基礎</a:t>
+            </a:r>
+          </a:p>
+        </p:txBody>
+      </p:sp>
+      <p:sp>
+        <p:nvSpPr>
+          <p:cNvPr id="9" name="TextBox 8"/>
+          <p:cNvSpPr txBox="1"/>
+          <p:nvPr/>
+        </p:nvSpPr>
+        <p:spPr>
+          <a:xfrm>
+            <a:off x="6263640" y="2103120"/>
+            <a:ext cx="5349240" cy="1042415"/>
+          </a:xfrm>
+          <a:prstGeom prst="rect">
+            <a:avLst/>
+          </a:prstGeom>
+          <a:noFill/>
+        </p:spPr>
+        <p:txBody>
+          <a:bodyPr wrap="square">
+            <a:spAutoFit/>
+          </a:bodyPr>
+          <a:lstStyle/>
+          <a:p>
+            <a:r>
+              <a:rPr sz="1800" b="1">
                 <a:solidFill>
                   <a:srgbClr val="1B2A4A"/>
                 </a:solidFill>
               </a:rPr>
-              <a:t>● 05  Computational GIS with Google Colab — 20 min</a:t>
-            </a:r>
-          </a:p>
-          <a:p>
-            <a:pPr>
-              <a:spcAft>
-                <a:spcPts val="1000"/>
-              </a:spcAft>
-            </a:pPr>
+              <a:t>05   Computational GIS with Google Colab</a:t>
+            </a:r>
+          </a:p>
+          <a:p>
             <a:r>
               <a:rPr sz="1300" i="1">
                 <a:solidFill>
                   <a:srgbClr val="6B6B6B"/>
                 </a:solidFill>
               </a:rPr>
-              <a:t>   使用 Google Colab 的運算式 GIS</a:t>
-            </a:r>
-          </a:p>
-          <a:p>
-            <a:pPr>
-              <a:spcAft>
-                <a:spcPts val="1000"/>
-              </a:spcAft>
-            </a:pPr>
-            <a:r>
-              <a:rPr sz="2000">
+              <a:t>        使用 Google Colab 的運算式 GIS</a:t>
+            </a:r>
+          </a:p>
+        </p:txBody>
+      </p:sp>
+      <p:sp>
+        <p:nvSpPr>
+          <p:cNvPr id="10" name="TextBox 9"/>
+          <p:cNvSpPr txBox="1"/>
+          <p:nvPr/>
+        </p:nvSpPr>
+        <p:spPr>
+          <a:xfrm>
+            <a:off x="6263640" y="3145535"/>
+            <a:ext cx="5349240" cy="1042415"/>
+          </a:xfrm>
+          <a:prstGeom prst="rect">
+            <a:avLst/>
+          </a:prstGeom>
+          <a:noFill/>
+        </p:spPr>
+        <p:txBody>
+          <a:bodyPr wrap="square">
+            <a:spAutoFit/>
+          </a:bodyPr>
+          <a:lstStyle/>
+          <a:p>
+            <a:r>
+              <a:rPr sz="1800" b="1">
                 <a:solidFill>
                   <a:srgbClr val="1B2A4A"/>
                 </a:solidFill>
               </a:rPr>
-              <a:t>● 06  From Data to Spatial Insight — 15 min</a:t>
-            </a:r>
-          </a:p>
-          <a:p>
-            <a:pPr>
-              <a:spcAft>
-                <a:spcPts val="1000"/>
-              </a:spcAft>
-            </a:pPr>
+              <a:t>06   From Data to Spatial Insight</a:t>
+            </a:r>
+          </a:p>
+          <a:p>
             <a:r>
               <a:rPr sz="1300" i="1">
                 <a:solidFill>
                   <a:srgbClr val="6B6B6B"/>
                 </a:solidFill>
               </a:rPr>
-              <a:t>   從資料到空間洞察</a:t>
-            </a:r>
-          </a:p>
-          <a:p>
-            <a:pPr>
-              <a:spcAft>
-                <a:spcPts val="1000"/>
-              </a:spcAft>
-            </a:pPr>
-            <a:r>
-              <a:rPr sz="2000">
+              <a:t>        從資料到空間洞察</a:t>
+            </a:r>
+          </a:p>
+        </p:txBody>
+      </p:sp>
+      <p:sp>
+        <p:nvSpPr>
+          <p:cNvPr id="11" name="TextBox 10"/>
+          <p:cNvSpPr txBox="1"/>
+          <p:nvPr/>
+        </p:nvSpPr>
+        <p:spPr>
+          <a:xfrm>
+            <a:off x="6263640" y="4187950"/>
+            <a:ext cx="5349240" cy="1042415"/>
+          </a:xfrm>
+          <a:prstGeom prst="rect">
+            <a:avLst/>
+          </a:prstGeom>
+          <a:noFill/>
+        </p:spPr>
+        <p:txBody>
+          <a:bodyPr wrap="square">
+            <a:spAutoFit/>
+          </a:bodyPr>
+          <a:lstStyle/>
+          <a:p>
+            <a:r>
+              <a:rPr sz="1800" b="1">
                 <a:solidFill>
                   <a:srgbClr val="1B2A4A"/>
                 </a:solidFill>
               </a:rPr>
-              <a:t>● 07  Research Map Design — 20 min</a:t>
-            </a:r>
-          </a:p>
-          <a:p>
-            <a:pPr>
-              <a:spcAft>
-                <a:spcPts val="1000"/>
-              </a:spcAft>
-            </a:pPr>
+              <a:t>07   Research Map Design</a:t>
+            </a:r>
+          </a:p>
+          <a:p>
             <a:r>
               <a:rPr sz="1300" i="1">
                 <a:solidFill>
                   <a:srgbClr val="6B6B6B"/>
                 </a:solidFill>
               </a:rPr>
-              <a:t>   研究地圖設計</a:t>
-            </a:r>
-          </a:p>
-          <a:p>
-            <a:pPr>
-              <a:spcAft>
-                <a:spcPts val="1000"/>
-              </a:spcAft>
-            </a:pPr>
-            <a:r>
-              <a:rPr sz="2000">
+              <a:t>        研究地圖設計</a:t>
+            </a:r>
+          </a:p>
+        </p:txBody>
+      </p:sp>
+      <p:sp>
+        <p:nvSpPr>
+          <p:cNvPr id="12" name="TextBox 11"/>
+          <p:cNvSpPr txBox="1"/>
+          <p:nvPr/>
+        </p:nvSpPr>
+        <p:spPr>
+          <a:xfrm>
+            <a:off x="6263640" y="5230365"/>
+            <a:ext cx="5349240" cy="1042415"/>
+          </a:xfrm>
+          <a:prstGeom prst="rect">
+            <a:avLst/>
+          </a:prstGeom>
+          <a:noFill/>
+        </p:spPr>
+        <p:txBody>
+          <a:bodyPr wrap="square">
+            <a:spAutoFit/>
+          </a:bodyPr>
+          <a:lstStyle/>
+          <a:p>
+            <a:r>
+              <a:rPr sz="1800" b="1">
                 <a:solidFill>
                   <a:srgbClr val="1B2A4A"/>
                 </a:solidFill>
               </a:rPr>
-              <a:t>● 08  One Map Challenge — 5 min</a:t>
-            </a:r>
-          </a:p>
-          <a:p>
-            <a:pPr>
-              <a:spcAft>
-                <a:spcPts val="1000"/>
-              </a:spcAft>
-            </a:pPr>
+              <a:t>08   One Map Challenge</a:t>
+            </a:r>
+          </a:p>
+          <a:p>
             <a:r>
               <a:rPr sz="1300" i="1">
                 <a:solidFill>
                   <a:srgbClr val="6B6B6B"/>
                 </a:solidFill>
               </a:rPr>
-              <a:t>   一張地圖挑戰</a:t>
-            </a:r>
-          </a:p>
-        </p:txBody>
-      </p:sp>
-      <p:sp>
-        <p:nvSpPr>
-          <p:cNvPr id="6" name="TextBox 5"/>
+              <a:t>        一張地圖挑戰</a:t>
+            </a:r>
+          </a:p>
+        </p:txBody>
+      </p:sp>
+      <p:sp>
+        <p:nvSpPr>
+          <p:cNvPr id="13" name="TextBox 12"/>
           <p:cNvSpPr txBox="1"/>
           <p:nvPr/>
         </p:nvSpPr>
         <p:spPr>
           <a:xfrm>
             <a:off x="457200" y="6446520"/>
-            <a:ext cx="5486400" cy="320040"/>
+            <a:ext cx="6217920" cy="320040"/>
           </a:xfrm>
           <a:prstGeom prst="rect">
             <a:avLst/>
@@ -14712,7 +15037,7 @@
       </p:sp>
       <p:sp>
         <p:nvSpPr>
-          <p:cNvPr id="7" name="TextBox 6"/>
+          <p:cNvPr id="14" name="TextBox 13"/>
           <p:cNvSpPr txBox="1"/>
           <p:nvPr/>
         </p:nvSpPr>
@@ -14753,7 +15078,7 @@
 </file>
 
 <file path=ppt/slides/slide30.xml><?xml version="1.0" encoding="utf-8"?>
-<p:sld xmlns:a="http://schemas.openxmlformats.org/drawingml/2006/main" xmlns:p="http://schemas.openxmlformats.org/presentationml/2006/main" xmlns:r="http://schemas.openxmlformats.org/officeDocument/2006/relationships">
+<p:sld xmlns:a="http://schemas.openxmlformats.org/drawingml/2006/main" xmlns:r="http://schemas.openxmlformats.org/officeDocument/2006/relationships" xmlns:p="http://schemas.openxmlformats.org/presentationml/2006/main">
   <p:cSld>
     <p:bg>
       <p:bgPr>
@@ -14769,7 +15094,14 @@
         <p:cNvGrpSpPr/>
         <p:nvPr/>
       </p:nvGrpSpPr>
-      <p:grpSpPr/>
+      <p:grpSpPr>
+        <a:xfrm>
+          <a:off x="0" y="0"/>
+          <a:ext cx="0" cy="0"/>
+          <a:chOff x="0" y="0"/>
+          <a:chExt cx="0" cy="0"/>
+        </a:xfrm>
+      </p:grpSpPr>
       <p:sp>
         <p:nvSpPr>
           <p:cNvPr id="2" name="TextBox 1"/>
@@ -14887,6 +15219,7 @@
           <a:lstStyle/>
           <a:p>
             <a:pPr algn="ctr"/>
+            <a:endParaRPr/>
           </a:p>
         </p:txBody>
       </p:sp>
@@ -15072,7 +15405,7 @@
         <p:spPr>
           <a:xfrm>
             <a:off x="457200" y="6446520"/>
-            <a:ext cx="5486400" cy="320040"/>
+            <a:ext cx="6217920" cy="320040"/>
           </a:xfrm>
           <a:prstGeom prst="rect">
             <a:avLst/>
@@ -15125,7 +15458,7 @@
                   <a:srgbClr val="6B6B6B"/>
                 </a:solidFill>
               </a:rPr>
-              <a:t>Module 07/8 · 20 min</a:t>
+              <a:t>Module 07/8</a:t>
             </a:r>
           </a:p>
         </p:txBody>
@@ -15173,7 +15506,7 @@
 </file>
 
 <file path=ppt/slides/slide31.xml><?xml version="1.0" encoding="utf-8"?>
-<p:sld xmlns:a="http://schemas.openxmlformats.org/drawingml/2006/main" xmlns:p="http://schemas.openxmlformats.org/presentationml/2006/main" xmlns:r="http://schemas.openxmlformats.org/officeDocument/2006/relationships">
+<p:sld xmlns:a="http://schemas.openxmlformats.org/drawingml/2006/main" xmlns:r="http://schemas.openxmlformats.org/officeDocument/2006/relationships" xmlns:p="http://schemas.openxmlformats.org/presentationml/2006/main">
   <p:cSld>
     <p:bg>
       <p:bgPr>
@@ -15189,7 +15522,14 @@
         <p:cNvGrpSpPr/>
         <p:nvPr/>
       </p:nvGrpSpPr>
-      <p:grpSpPr/>
+      <p:grpSpPr>
+        <a:xfrm>
+          <a:off x="0" y="0"/>
+          <a:ext cx="0" cy="0"/>
+          <a:chOff x="0" y="0"/>
+          <a:chExt cx="0" cy="0"/>
+        </a:xfrm>
+      </p:grpSpPr>
       <p:sp>
         <p:nvSpPr>
           <p:cNvPr id="2" name="TextBox 1"/>
@@ -15274,8 +15614,51 @@
         </p:nvSpPr>
         <p:spPr>
           <a:xfrm>
-            <a:off x="640080" y="4114800"/>
-            <a:ext cx="10881360" cy="457200"/>
+            <a:off x="640080" y="4206240"/>
+            <a:ext cx="10881360" cy="1280160"/>
+          </a:xfrm>
+          <a:prstGeom prst="rect">
+            <a:avLst/>
+          </a:prstGeom>
+          <a:noFill/>
+        </p:spPr>
+        <p:txBody>
+          <a:bodyPr wrap="square">
+            <a:spAutoFit/>
+          </a:bodyPr>
+          <a:lstStyle/>
+          <a:p>
+            <a:r>
+              <a:rPr sz="1600">
+                <a:solidFill>
+                  <a:srgbClr val="FFFFFF"/>
+                </a:solidFill>
+              </a:rPr>
+              <a:t>1 Research Question + 1 Spatial Analysis + 1 Research Map + 1 Spatial Insight.</a:t>
+            </a:r>
+          </a:p>
+          <a:p>
+            <a:r>
+              <a:rPr sz="1300">
+                <a:solidFill>
+                  <a:srgbClr val="C9D3E0"/>
+                </a:solidFill>
+              </a:rPr>
+              <a:t>1 個研究問題 ＋ 1 項空間分析 ＋ 1 張研究地圖 ＋ 1 個空間洞察。</a:t>
+            </a:r>
+          </a:p>
+        </p:txBody>
+      </p:sp>
+      <p:sp>
+        <p:nvSpPr>
+          <p:cNvPr id="5" name="TextBox 4"/>
+          <p:cNvSpPr txBox="1"/>
+          <p:nvPr/>
+        </p:nvSpPr>
+        <p:spPr>
+          <a:xfrm>
+            <a:off x="457200" y="6446520"/>
+            <a:ext cx="6217920" cy="320040"/>
           </a:xfrm>
           <a:prstGeom prst="rect">
             <a:avLst/>
@@ -15289,55 +15672,12 @@
           <a:lstStyle/>
           <a:p>
             <a:r>
-              <a:rPr sz="1600">
-                <a:solidFill>
-                  <a:srgbClr val="2E7D5B"/>
-                </a:solidFill>
-              </a:rPr>
-              <a:t>5 minutes  ·  5 分鐘</a:t>
-            </a:r>
-          </a:p>
-        </p:txBody>
-      </p:sp>
-      <p:sp>
-        <p:nvSpPr>
-          <p:cNvPr id="5" name="TextBox 4"/>
-          <p:cNvSpPr txBox="1"/>
-          <p:nvPr/>
-        </p:nvSpPr>
-        <p:spPr>
-          <a:xfrm>
-            <a:off x="640080" y="4754880"/>
-            <a:ext cx="10881360" cy="1280160"/>
-          </a:xfrm>
-          <a:prstGeom prst="rect">
-            <a:avLst/>
-          </a:prstGeom>
-          <a:noFill/>
-        </p:spPr>
-        <p:txBody>
-          <a:bodyPr wrap="square">
-            <a:spAutoFit/>
-          </a:bodyPr>
-          <a:lstStyle/>
-          <a:p>
-            <a:r>
-              <a:rPr sz="1600">
-                <a:solidFill>
-                  <a:srgbClr val="FFFFFF"/>
-                </a:solidFill>
-              </a:rPr>
-              <a:t>1 Research Question + 1 Spatial Analysis + 1 Research Map + 1 Spatial Insight.</a:t>
-            </a:r>
-          </a:p>
-          <a:p>
-            <a:r>
-              <a:rPr sz="1300">
-                <a:solidFill>
-                  <a:srgbClr val="C9D3E0"/>
-                </a:solidFill>
-              </a:rPr>
-              <a:t>1 個研究問題 ＋ 1 項空間分析 ＋ 1 張研究地圖 ＋ 1 個空間洞察。</a:t>
+              <a:rPr sz="1000">
+                <a:solidFill>
+                  <a:srgbClr val="6B6B6B"/>
+                </a:solidFill>
+              </a:rPr>
+              <a:t>Mapping the Unknown · 探索未知空間</a:t>
             </a:r>
           </a:p>
         </p:txBody>
@@ -15345,39 +15685,6 @@
       <p:sp>
         <p:nvSpPr>
           <p:cNvPr id="6" name="TextBox 5"/>
-          <p:cNvSpPr txBox="1"/>
-          <p:nvPr/>
-        </p:nvSpPr>
-        <p:spPr>
-          <a:xfrm>
-            <a:off x="457200" y="6446520"/>
-            <a:ext cx="5486400" cy="320040"/>
-          </a:xfrm>
-          <a:prstGeom prst="rect">
-            <a:avLst/>
-          </a:prstGeom>
-          <a:noFill/>
-        </p:spPr>
-        <p:txBody>
-          <a:bodyPr wrap="none">
-            <a:spAutoFit/>
-          </a:bodyPr>
-          <a:lstStyle/>
-          <a:p>
-            <a:r>
-              <a:rPr sz="1000">
-                <a:solidFill>
-                  <a:srgbClr val="6B6B6B"/>
-                </a:solidFill>
-              </a:rPr>
-              <a:t>Mapping the Unknown · 探索未知空間</a:t>
-            </a:r>
-          </a:p>
-        </p:txBody>
-      </p:sp>
-      <p:sp>
-        <p:nvSpPr>
-          <p:cNvPr id="7" name="TextBox 6"/>
           <p:cNvSpPr txBox="1"/>
           <p:nvPr/>
         </p:nvSpPr>
@@ -15404,14 +15711,14 @@
                   <a:srgbClr val="6B6B6B"/>
                 </a:solidFill>
               </a:rPr>
-              <a:t>Module 08/8 · 5 min</a:t>
-            </a:r>
-          </a:p>
-        </p:txBody>
-      </p:sp>
-      <p:sp>
-        <p:nvSpPr>
-          <p:cNvPr id="8" name="TextBox 7"/>
+              <a:t>Module 08/8</a:t>
+            </a:r>
+          </a:p>
+        </p:txBody>
+      </p:sp>
+      <p:sp>
+        <p:nvSpPr>
+          <p:cNvPr id="7" name="TextBox 6"/>
           <p:cNvSpPr txBox="1"/>
           <p:nvPr/>
         </p:nvSpPr>
@@ -15452,7 +15759,7 @@
 </file>
 
 <file path=ppt/slides/slide32.xml><?xml version="1.0" encoding="utf-8"?>
-<p:sld xmlns:a="http://schemas.openxmlformats.org/drawingml/2006/main" xmlns:p="http://schemas.openxmlformats.org/presentationml/2006/main" xmlns:r="http://schemas.openxmlformats.org/officeDocument/2006/relationships">
+<p:sld xmlns:a="http://schemas.openxmlformats.org/drawingml/2006/main" xmlns:r="http://schemas.openxmlformats.org/officeDocument/2006/relationships" xmlns:p="http://schemas.openxmlformats.org/presentationml/2006/main">
   <p:cSld>
     <p:bg>
       <p:bgPr>
@@ -15468,7 +15775,14 @@
         <p:cNvGrpSpPr/>
         <p:nvPr/>
       </p:nvGrpSpPr>
-      <p:grpSpPr/>
+      <p:grpSpPr>
+        <a:xfrm>
+          <a:off x="0" y="0"/>
+          <a:ext cx="0" cy="0"/>
+          <a:chOff x="0" y="0"/>
+          <a:chExt cx="0" cy="0"/>
+        </a:xfrm>
+      </p:grpSpPr>
       <p:sp>
         <p:nvSpPr>
           <p:cNvPr id="2" name="TextBox 1"/>
@@ -15586,6 +15900,7 @@
           <a:lstStyle/>
           <a:p>
             <a:pPr algn="ctr"/>
+            <a:endParaRPr/>
           </a:p>
         </p:txBody>
       </p:sp>
@@ -15771,7 +16086,7 @@
         <p:spPr>
           <a:xfrm>
             <a:off x="457200" y="6446520"/>
-            <a:ext cx="5486400" cy="320040"/>
+            <a:ext cx="6217920" cy="320040"/>
           </a:xfrm>
           <a:prstGeom prst="rect">
             <a:avLst/>
@@ -15824,7 +16139,7 @@
                   <a:srgbClr val="6B6B6B"/>
                 </a:solidFill>
               </a:rPr>
-              <a:t>Module 08/8 · 5 min</a:t>
+              <a:t>Module 08/8</a:t>
             </a:r>
           </a:p>
         </p:txBody>
@@ -15872,7 +16187,7 @@
 </file>
 
 <file path=ppt/slides/slide33.xml><?xml version="1.0" encoding="utf-8"?>
-<p:sld xmlns:a="http://schemas.openxmlformats.org/drawingml/2006/main" xmlns:p="http://schemas.openxmlformats.org/presentationml/2006/main" xmlns:r="http://schemas.openxmlformats.org/officeDocument/2006/relationships">
+<p:sld xmlns:a="http://schemas.openxmlformats.org/drawingml/2006/main" xmlns:r="http://schemas.openxmlformats.org/officeDocument/2006/relationships" xmlns:p="http://schemas.openxmlformats.org/presentationml/2006/main">
   <p:cSld>
     <p:bg>
       <p:bgPr>
@@ -15888,7 +16203,14 @@
         <p:cNvGrpSpPr/>
         <p:nvPr/>
       </p:nvGrpSpPr>
-      <p:grpSpPr/>
+      <p:grpSpPr>
+        <a:xfrm>
+          <a:off x="0" y="0"/>
+          <a:ext cx="0" cy="0"/>
+          <a:chOff x="0" y="0"/>
+          <a:chExt cx="0" cy="0"/>
+        </a:xfrm>
+      </p:grpSpPr>
       <p:sp>
         <p:nvSpPr>
           <p:cNvPr id="2" name="TextBox 1"/>
@@ -16006,6 +16328,7 @@
           <a:lstStyle/>
           <a:p>
             <a:pPr algn="ctr"/>
+            <a:endParaRPr/>
           </a:p>
         </p:txBody>
       </p:sp>
@@ -16161,7 +16484,7 @@
         <p:spPr>
           <a:xfrm>
             <a:off x="457200" y="6446520"/>
-            <a:ext cx="5486400" cy="320040"/>
+            <a:ext cx="6217920" cy="320040"/>
           </a:xfrm>
           <a:prstGeom prst="rect">
             <a:avLst/>
@@ -16228,7 +16551,7 @@
 </file>
 
 <file path=ppt/slides/slide34.xml><?xml version="1.0" encoding="utf-8"?>
-<p:sld xmlns:a="http://schemas.openxmlformats.org/drawingml/2006/main" xmlns:p="http://schemas.openxmlformats.org/presentationml/2006/main" xmlns:r="http://schemas.openxmlformats.org/officeDocument/2006/relationships">
+<p:sld xmlns:a="http://schemas.openxmlformats.org/drawingml/2006/main" xmlns:r="http://schemas.openxmlformats.org/officeDocument/2006/relationships" xmlns:p="http://schemas.openxmlformats.org/presentationml/2006/main">
   <p:cSld>
     <p:bg>
       <p:bgPr>
@@ -16244,7 +16567,14 @@
         <p:cNvGrpSpPr/>
         <p:nvPr/>
       </p:nvGrpSpPr>
-      <p:grpSpPr/>
+      <p:grpSpPr>
+        <a:xfrm>
+          <a:off x="0" y="0"/>
+          <a:ext cx="0" cy="0"/>
+          <a:chOff x="0" y="0"/>
+          <a:chExt cx="0" cy="0"/>
+        </a:xfrm>
+      </p:grpSpPr>
       <p:sp>
         <p:nvSpPr>
           <p:cNvPr id="2" name="TextBox 1"/>
@@ -16322,7 +16652,7 @@
         <p:spPr>
           <a:xfrm>
             <a:off x="457200" y="6446520"/>
-            <a:ext cx="5486400" cy="320040"/>
+            <a:ext cx="6217920" cy="320040"/>
           </a:xfrm>
           <a:prstGeom prst="rect">
             <a:avLst/>
@@ -16423,7 +16753,7 @@
 </file>
 
 <file path=ppt/slides/slide4.xml><?xml version="1.0" encoding="utf-8"?>
-<p:sld xmlns:a="http://schemas.openxmlformats.org/drawingml/2006/main" xmlns:p="http://schemas.openxmlformats.org/presentationml/2006/main" xmlns:r="http://schemas.openxmlformats.org/officeDocument/2006/relationships">
+<p:sld xmlns:a="http://schemas.openxmlformats.org/drawingml/2006/main" xmlns:r="http://schemas.openxmlformats.org/officeDocument/2006/relationships" xmlns:p="http://schemas.openxmlformats.org/presentationml/2006/main">
   <p:cSld>
     <p:bg>
       <p:bgPr>
@@ -16439,7 +16769,14 @@
         <p:cNvGrpSpPr/>
         <p:nvPr/>
       </p:nvGrpSpPr>
-      <p:grpSpPr/>
+      <p:grpSpPr>
+        <a:xfrm>
+          <a:off x="0" y="0"/>
+          <a:ext cx="0" cy="0"/>
+          <a:chOff x="0" y="0"/>
+          <a:chExt cx="0" cy="0"/>
+        </a:xfrm>
+      </p:grpSpPr>
       <p:sp>
         <p:nvSpPr>
           <p:cNvPr id="2" name="TextBox 1"/>
@@ -16557,6 +16894,7 @@
           <a:lstStyle/>
           <a:p>
             <a:pPr algn="ctr"/>
+            <a:endParaRPr/>
           </a:p>
         </p:txBody>
       </p:sp>
@@ -16712,7 +17050,7 @@
         <p:spPr>
           <a:xfrm>
             <a:off x="457200" y="6446520"/>
-            <a:ext cx="5486400" cy="320040"/>
+            <a:ext cx="6217920" cy="320040"/>
           </a:xfrm>
           <a:prstGeom prst="rect">
             <a:avLst/>
@@ -16779,7 +17117,7 @@
 </file>
 
 <file path=ppt/slides/slide5.xml><?xml version="1.0" encoding="utf-8"?>
-<p:sld xmlns:a="http://schemas.openxmlformats.org/drawingml/2006/main" xmlns:p="http://schemas.openxmlformats.org/presentationml/2006/main" xmlns:r="http://schemas.openxmlformats.org/officeDocument/2006/relationships">
+<p:sld xmlns:a="http://schemas.openxmlformats.org/drawingml/2006/main" xmlns:r="http://schemas.openxmlformats.org/officeDocument/2006/relationships" xmlns:p="http://schemas.openxmlformats.org/presentationml/2006/main">
   <p:cSld>
     <p:bg>
       <p:bgPr>
@@ -16795,7 +17133,14 @@
         <p:cNvGrpSpPr/>
         <p:nvPr/>
       </p:nvGrpSpPr>
-      <p:grpSpPr/>
+      <p:grpSpPr>
+        <a:xfrm>
+          <a:off x="0" y="0"/>
+          <a:ext cx="0" cy="0"/>
+          <a:chOff x="0" y="0"/>
+          <a:chExt cx="0" cy="0"/>
+        </a:xfrm>
+      </p:grpSpPr>
       <p:sp>
         <p:nvSpPr>
           <p:cNvPr id="2" name="TextBox 1"/>
@@ -16880,8 +17225,51 @@
         </p:nvSpPr>
         <p:spPr>
           <a:xfrm>
-            <a:off x="640080" y="4114800"/>
-            <a:ext cx="10881360" cy="457200"/>
+            <a:off x="640080" y="4206240"/>
+            <a:ext cx="10881360" cy="1280160"/>
+          </a:xfrm>
+          <a:prstGeom prst="rect">
+            <a:avLst/>
+          </a:prstGeom>
+          <a:noFill/>
+        </p:spPr>
+        <p:txBody>
+          <a:bodyPr wrap="square">
+            <a:spAutoFit/>
+          </a:bodyPr>
+          <a:lstStyle/>
+          <a:p>
+            <a:r>
+              <a:rPr sz="1600">
+                <a:solidFill>
+                  <a:srgbClr val="FFFFFF"/>
+                </a:solidFill>
+              </a:rPr>
+              <a:t>What is GIS? What is spatial thinking? GIS as a research method.</a:t>
+            </a:r>
+          </a:p>
+          <a:p>
+            <a:r>
+              <a:rPr sz="1300">
+                <a:solidFill>
+                  <a:srgbClr val="C9D3E0"/>
+                </a:solidFill>
+              </a:rPr>
+              <a:t>什麼是 GIS？什麼是空間思考？GIS 作為研究方法。</a:t>
+            </a:r>
+          </a:p>
+        </p:txBody>
+      </p:sp>
+      <p:sp>
+        <p:nvSpPr>
+          <p:cNvPr id="5" name="TextBox 4"/>
+          <p:cNvSpPr txBox="1"/>
+          <p:nvPr/>
+        </p:nvSpPr>
+        <p:spPr>
+          <a:xfrm>
+            <a:off x="457200" y="6446520"/>
+            <a:ext cx="6217920" cy="320040"/>
           </a:xfrm>
           <a:prstGeom prst="rect">
             <a:avLst/>
@@ -16895,55 +17283,12 @@
           <a:lstStyle/>
           <a:p>
             <a:r>
-              <a:rPr sz="1600">
-                <a:solidFill>
-                  <a:srgbClr val="2E7D5B"/>
-                </a:solidFill>
-              </a:rPr>
-              <a:t>10 minutes  ·  10 分鐘</a:t>
-            </a:r>
-          </a:p>
-        </p:txBody>
-      </p:sp>
-      <p:sp>
-        <p:nvSpPr>
-          <p:cNvPr id="5" name="TextBox 4"/>
-          <p:cNvSpPr txBox="1"/>
-          <p:nvPr/>
-        </p:nvSpPr>
-        <p:spPr>
-          <a:xfrm>
-            <a:off x="640080" y="4754880"/>
-            <a:ext cx="10881360" cy="1280160"/>
-          </a:xfrm>
-          <a:prstGeom prst="rect">
-            <a:avLst/>
-          </a:prstGeom>
-          <a:noFill/>
-        </p:spPr>
-        <p:txBody>
-          <a:bodyPr wrap="square">
-            <a:spAutoFit/>
-          </a:bodyPr>
-          <a:lstStyle/>
-          <a:p>
-            <a:r>
-              <a:rPr sz="1600">
-                <a:solidFill>
-                  <a:srgbClr val="FFFFFF"/>
-                </a:solidFill>
-              </a:rPr>
-              <a:t>What is GIS? What is spatial thinking? GIS as a research method.</a:t>
-            </a:r>
-          </a:p>
-          <a:p>
-            <a:r>
-              <a:rPr sz="1300">
-                <a:solidFill>
-                  <a:srgbClr val="C9D3E0"/>
-                </a:solidFill>
-              </a:rPr>
-              <a:t>什麼是 GIS？什麼是空間思考？GIS 作為研究方法。</a:t>
+              <a:rPr sz="1000">
+                <a:solidFill>
+                  <a:srgbClr val="6B6B6B"/>
+                </a:solidFill>
+              </a:rPr>
+              <a:t>Mapping the Unknown · 探索未知空間</a:t>
             </a:r>
           </a:p>
         </p:txBody>
@@ -16951,39 +17296,6 @@
       <p:sp>
         <p:nvSpPr>
           <p:cNvPr id="6" name="TextBox 5"/>
-          <p:cNvSpPr txBox="1"/>
-          <p:nvPr/>
-        </p:nvSpPr>
-        <p:spPr>
-          <a:xfrm>
-            <a:off x="457200" y="6446520"/>
-            <a:ext cx="5486400" cy="320040"/>
-          </a:xfrm>
-          <a:prstGeom prst="rect">
-            <a:avLst/>
-          </a:prstGeom>
-          <a:noFill/>
-        </p:spPr>
-        <p:txBody>
-          <a:bodyPr wrap="none">
-            <a:spAutoFit/>
-          </a:bodyPr>
-          <a:lstStyle/>
-          <a:p>
-            <a:r>
-              <a:rPr sz="1000">
-                <a:solidFill>
-                  <a:srgbClr val="6B6B6B"/>
-                </a:solidFill>
-              </a:rPr>
-              <a:t>Mapping the Unknown · 探索未知空間</a:t>
-            </a:r>
-          </a:p>
-        </p:txBody>
-      </p:sp>
-      <p:sp>
-        <p:nvSpPr>
-          <p:cNvPr id="7" name="TextBox 6"/>
           <p:cNvSpPr txBox="1"/>
           <p:nvPr/>
         </p:nvSpPr>
@@ -17010,14 +17322,14 @@
                   <a:srgbClr val="6B6B6B"/>
                 </a:solidFill>
               </a:rPr>
-              <a:t>Module 01/8 · 10 min</a:t>
-            </a:r>
-          </a:p>
-        </p:txBody>
-      </p:sp>
-      <p:sp>
-        <p:nvSpPr>
-          <p:cNvPr id="8" name="TextBox 7"/>
+              <a:t>Module 01/8</a:t>
+            </a:r>
+          </a:p>
+        </p:txBody>
+      </p:sp>
+      <p:sp>
+        <p:nvSpPr>
+          <p:cNvPr id="7" name="TextBox 6"/>
           <p:cNvSpPr txBox="1"/>
           <p:nvPr/>
         </p:nvSpPr>
@@ -17058,7 +17370,7 @@
 </file>
 
 <file path=ppt/slides/slide6.xml><?xml version="1.0" encoding="utf-8"?>
-<p:sld xmlns:a="http://schemas.openxmlformats.org/drawingml/2006/main" xmlns:p="http://schemas.openxmlformats.org/presentationml/2006/main" xmlns:r="http://schemas.openxmlformats.org/officeDocument/2006/relationships">
+<p:sld xmlns:a="http://schemas.openxmlformats.org/drawingml/2006/main" xmlns:r="http://schemas.openxmlformats.org/officeDocument/2006/relationships" xmlns:p="http://schemas.openxmlformats.org/presentationml/2006/main">
   <p:cSld>
     <p:bg>
       <p:bgPr>
@@ -17074,7 +17386,14 @@
         <p:cNvGrpSpPr/>
         <p:nvPr/>
       </p:nvGrpSpPr>
-      <p:grpSpPr/>
+      <p:grpSpPr>
+        <a:xfrm>
+          <a:off x="0" y="0"/>
+          <a:ext cx="0" cy="0"/>
+          <a:chOff x="0" y="0"/>
+          <a:chExt cx="0" cy="0"/>
+        </a:xfrm>
+      </p:grpSpPr>
       <p:sp>
         <p:nvSpPr>
           <p:cNvPr id="2" name="TextBox 1"/>
@@ -17192,6 +17511,7 @@
           <a:lstStyle/>
           <a:p>
             <a:pPr algn="ctr"/>
+            <a:endParaRPr/>
           </a:p>
         </p:txBody>
       </p:sp>
@@ -17347,7 +17667,7 @@
         <p:spPr>
           <a:xfrm>
             <a:off x="457200" y="6446520"/>
-            <a:ext cx="5486400" cy="320040"/>
+            <a:ext cx="6217920" cy="320040"/>
           </a:xfrm>
           <a:prstGeom prst="rect">
             <a:avLst/>
@@ -17400,7 +17720,7 @@
                   <a:srgbClr val="6B6B6B"/>
                 </a:solidFill>
               </a:rPr>
-              <a:t>Module 01/8 · 10 min</a:t>
+              <a:t>Module 01/8</a:t>
             </a:r>
           </a:p>
         </p:txBody>
@@ -17448,7 +17768,7 @@
 </file>
 
 <file path=ppt/slides/slide7.xml><?xml version="1.0" encoding="utf-8"?>
-<p:sld xmlns:a="http://schemas.openxmlformats.org/drawingml/2006/main" xmlns:p="http://schemas.openxmlformats.org/presentationml/2006/main" xmlns:r="http://schemas.openxmlformats.org/officeDocument/2006/relationships">
+<p:sld xmlns:a="http://schemas.openxmlformats.org/drawingml/2006/main" xmlns:r="http://schemas.openxmlformats.org/officeDocument/2006/relationships" xmlns:p="http://schemas.openxmlformats.org/presentationml/2006/main">
   <p:cSld>
     <p:bg>
       <p:bgPr>
@@ -17464,7 +17784,14 @@
         <p:cNvGrpSpPr/>
         <p:nvPr/>
       </p:nvGrpSpPr>
-      <p:grpSpPr/>
+      <p:grpSpPr>
+        <a:xfrm>
+          <a:off x="0" y="0"/>
+          <a:ext cx="0" cy="0"/>
+          <a:chOff x="0" y="0"/>
+          <a:chExt cx="0" cy="0"/>
+        </a:xfrm>
+      </p:grpSpPr>
       <p:sp>
         <p:nvSpPr>
           <p:cNvPr id="2" name="TextBox 1"/>
@@ -17582,6 +17909,7 @@
           <a:lstStyle/>
           <a:p>
             <a:pPr algn="ctr"/>
+            <a:endParaRPr/>
           </a:p>
         </p:txBody>
       </p:sp>
@@ -17767,7 +18095,7 @@
         <p:spPr>
           <a:xfrm>
             <a:off x="457200" y="6446520"/>
-            <a:ext cx="5486400" cy="320040"/>
+            <a:ext cx="6217920" cy="320040"/>
           </a:xfrm>
           <a:prstGeom prst="rect">
             <a:avLst/>
@@ -17820,7 +18148,7 @@
                   <a:srgbClr val="6B6B6B"/>
                 </a:solidFill>
               </a:rPr>
-              <a:t>Module 01/8 · 10 min</a:t>
+              <a:t>Module 01/8</a:t>
             </a:r>
           </a:p>
         </p:txBody>
@@ -17868,7 +18196,7 @@
 </file>
 
 <file path=ppt/slides/slide8.xml><?xml version="1.0" encoding="utf-8"?>
-<p:sld xmlns:a="http://schemas.openxmlformats.org/drawingml/2006/main" xmlns:p="http://schemas.openxmlformats.org/presentationml/2006/main" xmlns:r="http://schemas.openxmlformats.org/officeDocument/2006/relationships">
+<p:sld xmlns:a="http://schemas.openxmlformats.org/drawingml/2006/main" xmlns:r="http://schemas.openxmlformats.org/officeDocument/2006/relationships" xmlns:p="http://schemas.openxmlformats.org/presentationml/2006/main">
   <p:cSld>
     <p:bg>
       <p:bgPr>
@@ -17884,7 +18212,14 @@
         <p:cNvGrpSpPr/>
         <p:nvPr/>
       </p:nvGrpSpPr>
-      <p:grpSpPr/>
+      <p:grpSpPr>
+        <a:xfrm>
+          <a:off x="0" y="0"/>
+          <a:ext cx="0" cy="0"/>
+          <a:chOff x="0" y="0"/>
+          <a:chExt cx="0" cy="0"/>
+        </a:xfrm>
+      </p:grpSpPr>
       <p:sp>
         <p:nvSpPr>
           <p:cNvPr id="2" name="TextBox 1"/>
@@ -17969,8 +18304,51 @@
         </p:nvSpPr>
         <p:spPr>
           <a:xfrm>
-            <a:off x="640080" y="4114800"/>
-            <a:ext cx="10881360" cy="457200"/>
+            <a:off x="640080" y="4206240"/>
+            <a:ext cx="10881360" cy="1280160"/>
+          </a:xfrm>
+          <a:prstGeom prst="rect">
+            <a:avLst/>
+          </a:prstGeom>
+          <a:noFill/>
+        </p:spPr>
+        <p:txBody>
+          <a:bodyPr wrap="square">
+            <a:spAutoFit/>
+          </a:bodyPr>
+          <a:lstStyle/>
+          <a:p>
+            <a:r>
+              <a:rPr sz="1600">
+                <a:solidFill>
+                  <a:srgbClr val="FFFFFF"/>
+                </a:solidFill>
+              </a:rPr>
+              <a:t>Vector vs raster, point/line/polygon, attributes, coordinates, CRS.</a:t>
+            </a:r>
+          </a:p>
+          <a:p>
+            <a:r>
+              <a:rPr sz="1300">
+                <a:solidFill>
+                  <a:srgbClr val="C9D3E0"/>
+                </a:solidFill>
+              </a:rPr>
+              <a:t>向量與網格、點線面、屬性資料、座標、CRS。</a:t>
+            </a:r>
+          </a:p>
+        </p:txBody>
+      </p:sp>
+      <p:sp>
+        <p:nvSpPr>
+          <p:cNvPr id="5" name="TextBox 4"/>
+          <p:cNvSpPr txBox="1"/>
+          <p:nvPr/>
+        </p:nvSpPr>
+        <p:spPr>
+          <a:xfrm>
+            <a:off x="457200" y="6446520"/>
+            <a:ext cx="6217920" cy="320040"/>
           </a:xfrm>
           <a:prstGeom prst="rect">
             <a:avLst/>
@@ -17984,55 +18362,12 @@
           <a:lstStyle/>
           <a:p>
             <a:r>
-              <a:rPr sz="1600">
-                <a:solidFill>
-                  <a:srgbClr val="2E7D5B"/>
-                </a:solidFill>
-              </a:rPr>
-              <a:t>15 minutes  ·  15 分鐘</a:t>
-            </a:r>
-          </a:p>
-        </p:txBody>
-      </p:sp>
-      <p:sp>
-        <p:nvSpPr>
-          <p:cNvPr id="5" name="TextBox 4"/>
-          <p:cNvSpPr txBox="1"/>
-          <p:nvPr/>
-        </p:nvSpPr>
-        <p:spPr>
-          <a:xfrm>
-            <a:off x="640080" y="4754880"/>
-            <a:ext cx="10881360" cy="1280160"/>
-          </a:xfrm>
-          <a:prstGeom prst="rect">
-            <a:avLst/>
-          </a:prstGeom>
-          <a:noFill/>
-        </p:spPr>
-        <p:txBody>
-          <a:bodyPr wrap="square">
-            <a:spAutoFit/>
-          </a:bodyPr>
-          <a:lstStyle/>
-          <a:p>
-            <a:r>
-              <a:rPr sz="1600">
-                <a:solidFill>
-                  <a:srgbClr val="FFFFFF"/>
-                </a:solidFill>
-              </a:rPr>
-              <a:t>Vector vs raster, point/line/polygon, attributes, coordinates, CRS.</a:t>
-            </a:r>
-          </a:p>
-          <a:p>
-            <a:r>
-              <a:rPr sz="1300">
-                <a:solidFill>
-                  <a:srgbClr val="C9D3E0"/>
-                </a:solidFill>
-              </a:rPr>
-              <a:t>向量與網格、點線面、屬性資料、座標、CRS。</a:t>
+              <a:rPr sz="1000">
+                <a:solidFill>
+                  <a:srgbClr val="6B6B6B"/>
+                </a:solidFill>
+              </a:rPr>
+              <a:t>Mapping the Unknown · 探索未知空間</a:t>
             </a:r>
           </a:p>
         </p:txBody>
@@ -18040,39 +18375,6 @@
       <p:sp>
         <p:nvSpPr>
           <p:cNvPr id="6" name="TextBox 5"/>
-          <p:cNvSpPr txBox="1"/>
-          <p:nvPr/>
-        </p:nvSpPr>
-        <p:spPr>
-          <a:xfrm>
-            <a:off x="457200" y="6446520"/>
-            <a:ext cx="5486400" cy="320040"/>
-          </a:xfrm>
-          <a:prstGeom prst="rect">
-            <a:avLst/>
-          </a:prstGeom>
-          <a:noFill/>
-        </p:spPr>
-        <p:txBody>
-          <a:bodyPr wrap="none">
-            <a:spAutoFit/>
-          </a:bodyPr>
-          <a:lstStyle/>
-          <a:p>
-            <a:r>
-              <a:rPr sz="1000">
-                <a:solidFill>
-                  <a:srgbClr val="6B6B6B"/>
-                </a:solidFill>
-              </a:rPr>
-              <a:t>Mapping the Unknown · 探索未知空間</a:t>
-            </a:r>
-          </a:p>
-        </p:txBody>
-      </p:sp>
-      <p:sp>
-        <p:nvSpPr>
-          <p:cNvPr id="7" name="TextBox 6"/>
           <p:cNvSpPr txBox="1"/>
           <p:nvPr/>
         </p:nvSpPr>
@@ -18099,14 +18401,14 @@
                   <a:srgbClr val="6B6B6B"/>
                 </a:solidFill>
               </a:rPr>
-              <a:t>Module 02/8 · 15 min</a:t>
-            </a:r>
-          </a:p>
-        </p:txBody>
-      </p:sp>
-      <p:sp>
-        <p:nvSpPr>
-          <p:cNvPr id="8" name="TextBox 7"/>
+              <a:t>Module 02/8</a:t>
+            </a:r>
+          </a:p>
+        </p:txBody>
+      </p:sp>
+      <p:sp>
+        <p:nvSpPr>
+          <p:cNvPr id="7" name="TextBox 6"/>
           <p:cNvSpPr txBox="1"/>
           <p:nvPr/>
         </p:nvSpPr>
@@ -18147,7 +18449,7 @@
 </file>
 
 <file path=ppt/slides/slide9.xml><?xml version="1.0" encoding="utf-8"?>
-<p:sld xmlns:a="http://schemas.openxmlformats.org/drawingml/2006/main" xmlns:p="http://schemas.openxmlformats.org/presentationml/2006/main" xmlns:r="http://schemas.openxmlformats.org/officeDocument/2006/relationships">
+<p:sld xmlns:a="http://schemas.openxmlformats.org/drawingml/2006/main" xmlns:r="http://schemas.openxmlformats.org/officeDocument/2006/relationships" xmlns:p="http://schemas.openxmlformats.org/presentationml/2006/main">
   <p:cSld>
     <p:bg>
       <p:bgPr>
@@ -18163,7 +18465,14 @@
         <p:cNvGrpSpPr/>
         <p:nvPr/>
       </p:nvGrpSpPr>
-      <p:grpSpPr/>
+      <p:grpSpPr>
+        <a:xfrm>
+          <a:off x="0" y="0"/>
+          <a:ext cx="0" cy="0"/>
+          <a:chOff x="0" y="0"/>
+          <a:chExt cx="0" cy="0"/>
+        </a:xfrm>
+      </p:grpSpPr>
       <p:sp>
         <p:nvSpPr>
           <p:cNvPr id="2" name="TextBox 1"/>
@@ -18281,6 +18590,7 @@
           <a:lstStyle/>
           <a:p>
             <a:pPr algn="ctr"/>
+            <a:endParaRPr/>
           </a:p>
         </p:txBody>
       </p:sp>
@@ -18466,7 +18776,7 @@
         <p:spPr>
           <a:xfrm>
             <a:off x="457200" y="6446520"/>
-            <a:ext cx="5486400" cy="320040"/>
+            <a:ext cx="6217920" cy="320040"/>
           </a:xfrm>
           <a:prstGeom prst="rect">
             <a:avLst/>
@@ -18519,7 +18829,7 @@
                   <a:srgbClr val="6B6B6B"/>
                 </a:solidFill>
               </a:rPr>
-              <a:t>Module 02/8 · 15 min</a:t>
+              <a:t>Module 02/8</a:t>
             </a:r>
           </a:p>
         </p:txBody>
@@ -18897,44 +19207,44 @@
         <a:sysClr val="window" lastClr="FFFFFF"/>
       </a:lt1>
       <a:dk2>
-        <a:srgbClr val="1F497D"/>
+        <a:srgbClr val="0E2841"/>
       </a:dk2>
       <a:lt2>
-        <a:srgbClr val="EEECE1"/>
+        <a:srgbClr val="E8E8E8"/>
       </a:lt2>
       <a:accent1>
-        <a:srgbClr val="4F81BD"/>
+        <a:srgbClr val="156082"/>
       </a:accent1>
       <a:accent2>
-        <a:srgbClr val="C0504D"/>
+        <a:srgbClr val="E97132"/>
       </a:accent2>
       <a:accent3>
-        <a:srgbClr val="9BBB59"/>
+        <a:srgbClr val="196B24"/>
       </a:accent3>
       <a:accent4>
-        <a:srgbClr val="8064A2"/>
+        <a:srgbClr val="0F9ED5"/>
       </a:accent4>
       <a:accent5>
-        <a:srgbClr val="4BACC6"/>
+        <a:srgbClr val="A02B93"/>
       </a:accent5>
       <a:accent6>
-        <a:srgbClr val="F79646"/>
+        <a:srgbClr val="4EA72E"/>
       </a:accent6>
       <a:hlink>
-        <a:srgbClr val="0000FF"/>
+        <a:srgbClr val="467886"/>
       </a:hlink>
       <a:folHlink>
-        <a:srgbClr val="800080"/>
+        <a:srgbClr val="96607D"/>
       </a:folHlink>
     </a:clrScheme>
     <a:fontScheme name="Office">
       <a:majorFont>
-        <a:latin typeface="Calibri"/>
+        <a:latin typeface="Aptos Display" panose="02110004020202020204"/>
         <a:ea typeface=""/>
         <a:cs typeface=""/>
-        <a:font script="Jpan" typeface="ＭＳ Ｐゴシック"/>
+        <a:font script="Jpan" typeface="游ゴシック Light"/>
         <a:font script="Hang" typeface="맑은 고딕"/>
-        <a:font script="Hans" typeface="宋体"/>
+        <a:font script="Hans" typeface="等线 Light"/>
         <a:font script="Hant" typeface="新細明體"/>
         <a:font script="Arab" typeface="Times New Roman"/>
         <a:font script="Hebr" typeface="Times New Roman"/>
@@ -18962,14 +19272,31 @@
         <a:font script="Viet" typeface="Times New Roman"/>
         <a:font script="Uigh" typeface="Microsoft Uighur"/>
         <a:font script="Geor" typeface="Sylfaen"/>
+        <a:font script="Armn" typeface="Arial"/>
+        <a:font script="Bugi" typeface="Leelawadee UI"/>
+        <a:font script="Bopo" typeface="Microsoft JhengHei"/>
+        <a:font script="Java" typeface="Javanese Text"/>
+        <a:font script="Lisu" typeface="Segoe UI"/>
+        <a:font script="Mymr" typeface="Myanmar Text"/>
+        <a:font script="Nkoo" typeface="Ebrima"/>
+        <a:font script="Olck" typeface="Nirmala UI"/>
+        <a:font script="Osma" typeface="Ebrima"/>
+        <a:font script="Phag" typeface="Phagspa"/>
+        <a:font script="Syrn" typeface="Estrangelo Edessa"/>
+        <a:font script="Syrj" typeface="Estrangelo Edessa"/>
+        <a:font script="Syre" typeface="Estrangelo Edessa"/>
+        <a:font script="Sora" typeface="Nirmala UI"/>
+        <a:font script="Tale" typeface="Microsoft Tai Le"/>
+        <a:font script="Talu" typeface="Microsoft New Tai Lue"/>
+        <a:font script="Tfng" typeface="Ebrima"/>
       </a:majorFont>
       <a:minorFont>
-        <a:latin typeface="Calibri"/>
+        <a:latin typeface="Aptos" panose="02110004020202020204"/>
         <a:ea typeface=""/>
         <a:cs typeface=""/>
-        <a:font script="Jpan" typeface="ＭＳ Ｐゴシック"/>
+        <a:font script="Jpan" typeface="游ゴシック"/>
         <a:font script="Hang" typeface="맑은 고딕"/>
-        <a:font script="Hans" typeface="宋体"/>
+        <a:font script="Hans" typeface="等线"/>
         <a:font script="Hant" typeface="新細明體"/>
         <a:font script="Arab" typeface="Arial"/>
         <a:font script="Hebr" typeface="Arial"/>
@@ -18997,6 +19324,23 @@
         <a:font script="Viet" typeface="Arial"/>
         <a:font script="Uigh" typeface="Microsoft Uighur"/>
         <a:font script="Geor" typeface="Sylfaen"/>
+        <a:font script="Armn" typeface="Arial"/>
+        <a:font script="Bugi" typeface="Leelawadee UI"/>
+        <a:font script="Bopo" typeface="Microsoft JhengHei"/>
+        <a:font script="Java" typeface="Javanese Text"/>
+        <a:font script="Lisu" typeface="Segoe UI"/>
+        <a:font script="Mymr" typeface="Myanmar Text"/>
+        <a:font script="Nkoo" typeface="Ebrima"/>
+        <a:font script="Olck" typeface="Nirmala UI"/>
+        <a:font script="Osma" typeface="Ebrima"/>
+        <a:font script="Phag" typeface="Phagspa"/>
+        <a:font script="Syrn" typeface="Estrangelo Edessa"/>
+        <a:font script="Syrj" typeface="Estrangelo Edessa"/>
+        <a:font script="Syre" typeface="Estrangelo Edessa"/>
+        <a:font script="Sora" typeface="Nirmala UI"/>
+        <a:font script="Tale" typeface="Microsoft Tai Le"/>
+        <a:font script="Talu" typeface="Microsoft New Tai Lue"/>
+        <a:font script="Tfng" typeface="Ebrima"/>
       </a:minorFont>
     </a:fontScheme>
     <a:fmtScheme name="Office">
@@ -19008,180 +19352,136 @@
           <a:gsLst>
             <a:gs pos="0">
               <a:schemeClr val="phClr">
-                <a:tint val="50000"/>
-                <a:satMod val="300000"/>
+                <a:lumMod val="110000"/>
+                <a:satMod val="105000"/>
+                <a:tint val="67000"/>
               </a:schemeClr>
             </a:gs>
-            <a:gs pos="35000">
+            <a:gs pos="50000">
               <a:schemeClr val="phClr">
-                <a:tint val="37000"/>
-                <a:satMod val="300000"/>
+                <a:lumMod val="105000"/>
+                <a:satMod val="103000"/>
+                <a:tint val="73000"/>
               </a:schemeClr>
             </a:gs>
             <a:gs pos="100000">
               <a:schemeClr val="phClr">
-                <a:tint val="15000"/>
-                <a:satMod val="350000"/>
+                <a:lumMod val="105000"/>
+                <a:satMod val="109000"/>
+                <a:tint val="81000"/>
               </a:schemeClr>
             </a:gs>
           </a:gsLst>
-          <a:lin ang="16200000" scaled="1"/>
+          <a:lin ang="5400000" scaled="0"/>
         </a:gradFill>
         <a:gradFill rotWithShape="1">
           <a:gsLst>
             <a:gs pos="0">
               <a:schemeClr val="phClr">
-                <a:tint val="100000"/>
+                <a:satMod val="103000"/>
+                <a:lumMod val="102000"/>
+                <a:tint val="94000"/>
+              </a:schemeClr>
+            </a:gs>
+            <a:gs pos="50000">
+              <a:schemeClr val="phClr">
+                <a:satMod val="110000"/>
+                <a:lumMod val="100000"/>
                 <a:shade val="100000"/>
-                <a:satMod val="130000"/>
               </a:schemeClr>
             </a:gs>
             <a:gs pos="100000">
               <a:schemeClr val="phClr">
-                <a:tint val="50000"/>
-                <a:shade val="100000"/>
-                <a:satMod val="350000"/>
+                <a:lumMod val="99000"/>
+                <a:satMod val="120000"/>
+                <a:shade val="78000"/>
               </a:schemeClr>
             </a:gs>
           </a:gsLst>
-          <a:lin ang="16200000" scaled="0"/>
+          <a:lin ang="5400000" scaled="0"/>
         </a:gradFill>
       </a:fillStyleLst>
       <a:lnStyleLst>
-        <a:ln w="9525" cap="flat" cmpd="sng" algn="ctr">
+        <a:ln w="12700" cap="flat" cmpd="sng" algn="ctr">
           <a:solidFill>
-            <a:schemeClr val="phClr">
-              <a:shade val="95000"/>
-              <a:satMod val="105000"/>
-            </a:schemeClr>
+            <a:schemeClr val="phClr"/>
           </a:solidFill>
           <a:prstDash val="solid"/>
+          <a:miter lim="800000"/>
+        </a:ln>
+        <a:ln w="19050" cap="flat" cmpd="sng" algn="ctr">
+          <a:solidFill>
+            <a:schemeClr val="phClr"/>
+          </a:solidFill>
+          <a:prstDash val="solid"/>
+          <a:miter lim="800000"/>
         </a:ln>
         <a:ln w="25400" cap="flat" cmpd="sng" algn="ctr">
           <a:solidFill>
             <a:schemeClr val="phClr"/>
           </a:solidFill>
           <a:prstDash val="solid"/>
-        </a:ln>
-        <a:ln w="38100" cap="flat" cmpd="sng" algn="ctr">
-          <a:solidFill>
-            <a:schemeClr val="phClr"/>
-          </a:solidFill>
-          <a:prstDash val="solid"/>
+          <a:miter lim="800000"/>
         </a:ln>
       </a:lnStyleLst>
       <a:effectStyleLst>
         <a:effectStyle>
+          <a:effectLst/>
+        </a:effectStyle>
+        <a:effectStyle>
+          <a:effectLst/>
+        </a:effectStyle>
+        <a:effectStyle>
           <a:effectLst>
-            <a:outerShdw blurRad="40000" dist="20000" dir="5400000" rotWithShape="0">
+            <a:outerShdw blurRad="57150" dist="19050" dir="5400000" algn="ctr" rotWithShape="0">
               <a:srgbClr val="000000">
-                <a:alpha val="38000"/>
+                <a:alpha val="63000"/>
               </a:srgbClr>
             </a:outerShdw>
           </a:effectLst>
-        </a:effectStyle>
-        <a:effectStyle>
-          <a:effectLst>
-            <a:outerShdw blurRad="40000" dist="23000" dir="5400000" rotWithShape="0">
-              <a:srgbClr val="000000">
-                <a:alpha val="35000"/>
-              </a:srgbClr>
-            </a:outerShdw>
-          </a:effectLst>
-        </a:effectStyle>
-        <a:effectStyle>
-          <a:effectLst>
-            <a:outerShdw blurRad="40000" dist="23000" dir="5400000" rotWithShape="0">
-              <a:srgbClr val="000000">
-                <a:alpha val="35000"/>
-              </a:srgbClr>
-            </a:outerShdw>
-          </a:effectLst>
-          <a:scene3d>
-            <a:camera prst="orthographicFront">
-              <a:rot lat="0" lon="0" rev="0"/>
-            </a:camera>
-            <a:lightRig rig="threePt" dir="t">
-              <a:rot lat="0" lon="0" rev="1200000"/>
-            </a:lightRig>
-          </a:scene3d>
-          <a:sp3d>
-            <a:bevelT w="63500" h="25400"/>
-          </a:sp3d>
         </a:effectStyle>
       </a:effectStyleLst>
       <a:bgFillStyleLst>
         <a:solidFill>
           <a:schemeClr val="phClr"/>
         </a:solidFill>
+        <a:solidFill>
+          <a:schemeClr val="phClr">
+            <a:tint val="95000"/>
+            <a:satMod val="170000"/>
+          </a:schemeClr>
+        </a:solidFill>
         <a:gradFill rotWithShape="1">
           <a:gsLst>
             <a:gs pos="0">
               <a:schemeClr val="phClr">
-                <a:tint val="40000"/>
-                <a:satMod val="350000"/>
+                <a:tint val="93000"/>
+                <a:satMod val="150000"/>
+                <a:shade val="98000"/>
+                <a:lumMod val="102000"/>
               </a:schemeClr>
             </a:gs>
-            <a:gs pos="40000">
+            <a:gs pos="50000">
               <a:schemeClr val="phClr">
-                <a:tint val="45000"/>
-                <a:shade val="99000"/>
-                <a:satMod val="350000"/>
+                <a:tint val="98000"/>
+                <a:satMod val="130000"/>
+                <a:shade val="90000"/>
+                <a:lumMod val="103000"/>
               </a:schemeClr>
             </a:gs>
             <a:gs pos="100000">
               <a:schemeClr val="phClr">
-                <a:shade val="20000"/>
-                <a:satMod val="255000"/>
+                <a:shade val="63000"/>
+                <a:satMod val="120000"/>
               </a:schemeClr>
             </a:gs>
           </a:gsLst>
-          <a:path path="circle">
-            <a:fillToRect l="50000" t="-80000" r="50000" b="180000"/>
-          </a:path>
-        </a:gradFill>
-        <a:gradFill rotWithShape="1">
-          <a:gsLst>
-            <a:gs pos="0">
-              <a:schemeClr val="phClr">
-                <a:tint val="80000"/>
-                <a:satMod val="300000"/>
-              </a:schemeClr>
-            </a:gs>
-            <a:gs pos="100000">
-              <a:schemeClr val="phClr">
-                <a:shade val="30000"/>
-                <a:satMod val="200000"/>
-              </a:schemeClr>
-            </a:gs>
-          </a:gsLst>
-          <a:path path="circle">
-            <a:fillToRect l="50000" t="50000" r="50000" b="50000"/>
-          </a:path>
+          <a:lin ang="5400000" scaled="0"/>
         </a:gradFill>
       </a:bgFillStyleLst>
     </a:fmtScheme>
   </a:themeElements>
   <a:objectDefaults>
-    <a:spDef>
-      <a:spPr/>
-      <a:bodyPr/>
-      <a:lstStyle/>
-      <a:style>
-        <a:lnRef idx="1">
-          <a:schemeClr val="accent1"/>
-        </a:lnRef>
-        <a:fillRef idx="3">
-          <a:schemeClr val="accent1"/>
-        </a:fillRef>
-        <a:effectRef idx="2">
-          <a:schemeClr val="accent1"/>
-        </a:effectRef>
-        <a:fontRef idx="minor">
-          <a:schemeClr val="lt1"/>
-        </a:fontRef>
-      </a:style>
-    </a:spDef>
     <a:lnDef>
       <a:spPr/>
       <a:bodyPr/>
@@ -19203,5 +19503,10 @@
     </a:lnDef>
   </a:objectDefaults>
   <a:extraClrSchemeLst/>
+  <a:extLst>
+    <a:ext uri="{05A4C25C-085E-4340-85A3-A5531E510DB2}">
+      <thm15:themeFamily xmlns:thm15="http://schemas.microsoft.com/office/thememl/2012/main" name="Office Theme" id="{2E142A2C-CD16-42D6-873A-C26D2A0506FA}" vid="{1BDDFF52-6CD6-40A5-AB3C-68EB2F1E4D0A}"/>
+    </a:ext>
+  </a:extLst>
 </a:theme>
 </file>